--- a/presentation/Academic_Performance_ML_Reference_Based_Final_Presentation.pptx
+++ b/presentation/Academic_Performance_ML_Reference_Based_Final_Presentation.pptx
@@ -23401,7 +23401,7 @@
                   <a:srgbClr val="2563EB"/>
                 </a:solidFill>
               </a:rPr>
-              <a:t>60.32%</a:t>
+              <a:t>59.85%</a:t>
             </a:r>
             <a:endParaRPr lang="en-US" sz="2650" dirty="0"/>
           </a:p>
@@ -23439,7 +23439,7 @@
                   <a:srgbClr val="64748B"/>
                 </a:solidFill>
               </a:rPr>
-              <a:t>Year‑1 CGPA test accuracy</a:t>
+              <a:t>CGPA test accuracy</a:t>
             </a:r>
             <a:endParaRPr lang="en-US" sz="990" dirty="0"/>
           </a:p>
@@ -23477,7 +23477,7 @@
                   <a:srgbClr val="0F766E"/>
                 </a:solidFill>
               </a:rPr>
-              <a:t>0.604</a:t>
+              <a:t>0.598</a:t>
             </a:r>
             <a:endParaRPr lang="en-US" sz="2650" dirty="0"/>
           </a:p>
@@ -23515,7 +23515,7 @@
                   <a:srgbClr val="64748B"/>
                 </a:solidFill>
               </a:rPr>
-              <a:t>Year‑1 weighted F1</a:t>
+              <a:t>weighted F1</a:t>
             </a:r>
             <a:endParaRPr lang="en-US" sz="990" dirty="0"/>
           </a:p>

--- a/presentation/Academic_Performance_ML_Reference_Based_Final_Presentation.pptx
+++ b/presentation/Academic_Performance_ML_Reference_Based_Final_Presentation.pptx
@@ -3675,14 +3675,14 @@
               <a:buNone/>
             </a:pPr>
             <a:r>
-              <a:rPr lang="en-US" sz="910" b="1" dirty="0">
+              <a:rPr lang="en-US" sz="1200" b="1" dirty="0">
                 <a:solidFill>
                   <a:srgbClr val="FFFFFF"/>
                 </a:solidFill>
               </a:rPr>
               <a:t>Metric</a:t>
             </a:r>
-            <a:endParaRPr lang="en-US" sz="910" dirty="0"/>
+            <a:endParaRPr lang="en-US" sz="1200" dirty="0"/>
           </a:p>
         </p:txBody>
       </p:sp>
@@ -3719,14 +3719,14 @@
               <a:buNone/>
             </a:pPr>
             <a:r>
-              <a:rPr lang="en-US" sz="910" b="1" dirty="0">
+              <a:rPr lang="en-US" sz="1200" b="1" dirty="0">
                 <a:solidFill>
                   <a:srgbClr val="FFFFFF"/>
                 </a:solidFill>
               </a:rPr>
               <a:t>Full tuned RF</a:t>
             </a:r>
-            <a:endParaRPr lang="en-US" sz="910" dirty="0"/>
+            <a:endParaRPr lang="en-US" sz="1200" dirty="0"/>
           </a:p>
         </p:txBody>
       </p:sp>
@@ -3763,14 +3763,14 @@
               <a:buNone/>
             </a:pPr>
             <a:r>
-              <a:rPr lang="en-US" sz="910" b="1" dirty="0">
+              <a:rPr lang="en-US" sz="1200" b="1" dirty="0">
                 <a:solidFill>
                   <a:srgbClr val="FFFFFF"/>
                 </a:solidFill>
               </a:rPr>
               <a:t>CFS + tuned RF</a:t>
             </a:r>
-            <a:endParaRPr lang="en-US" sz="910" dirty="0"/>
+            <a:endParaRPr lang="en-US" sz="1200" dirty="0"/>
           </a:p>
         </p:txBody>
       </p:sp>
@@ -3807,14 +3807,14 @@
               <a:buNone/>
             </a:pPr>
             <a:r>
-              <a:rPr lang="en-US" sz="910" b="1" dirty="0">
+              <a:rPr lang="en-US" sz="1200" b="1" dirty="0">
                 <a:solidFill>
                   <a:srgbClr val="FFFFFF"/>
                 </a:solidFill>
               </a:rPr>
               <a:t>Change</a:t>
             </a:r>
-            <a:endParaRPr lang="en-US" sz="910" dirty="0"/>
+            <a:endParaRPr lang="en-US" sz="1200" dirty="0"/>
           </a:p>
         </p:txBody>
       </p:sp>
@@ -3851,14 +3851,14 @@
               <a:buNone/>
             </a:pPr>
             <a:r>
-              <a:rPr lang="en-US" sz="910" dirty="0">
+              <a:rPr lang="en-US" sz="1200" dirty="0">
                 <a:solidFill>
                   <a:srgbClr val="0F172A"/>
                 </a:solidFill>
               </a:rPr>
               <a:t>Accuracy</a:t>
             </a:r>
-            <a:endParaRPr lang="en-US" sz="910" dirty="0"/>
+            <a:endParaRPr lang="en-US" sz="1200" dirty="0"/>
           </a:p>
         </p:txBody>
       </p:sp>
@@ -3895,14 +3895,14 @@
               <a:buNone/>
             </a:pPr>
             <a:r>
-              <a:rPr lang="en-US" sz="910" dirty="0">
+              <a:rPr lang="en-US" sz="1200" dirty="0">
                 <a:solidFill>
                   <a:srgbClr val="0F172A"/>
                 </a:solidFill>
               </a:rPr>
               <a:t>60.9499%</a:t>
             </a:r>
-            <a:endParaRPr lang="en-US" sz="910" dirty="0"/>
+            <a:endParaRPr lang="en-US" sz="1200" dirty="0"/>
           </a:p>
         </p:txBody>
       </p:sp>
@@ -3939,14 +3939,14 @@
               <a:buNone/>
             </a:pPr>
             <a:r>
-              <a:rPr lang="en-US" sz="910" dirty="0">
+              <a:rPr lang="en-US" sz="1200" dirty="0">
                 <a:solidFill>
                   <a:srgbClr val="0F172A"/>
                 </a:solidFill>
               </a:rPr>
               <a:t>36.6894%</a:t>
             </a:r>
-            <a:endParaRPr lang="en-US" sz="910" dirty="0"/>
+            <a:endParaRPr lang="en-US" sz="1200" dirty="0"/>
           </a:p>
         </p:txBody>
       </p:sp>
@@ -3983,14 +3983,14 @@
               <a:buNone/>
             </a:pPr>
             <a:r>
-              <a:rPr lang="en-US" sz="910" dirty="0">
+              <a:rPr lang="en-US" sz="1200" dirty="0">
                 <a:solidFill>
                   <a:srgbClr val="0F172A"/>
                 </a:solidFill>
               </a:rPr>
               <a:t>−24.2605 pp</a:t>
             </a:r>
-            <a:endParaRPr lang="en-US" sz="910" dirty="0"/>
+            <a:endParaRPr lang="en-US" sz="1200" dirty="0"/>
           </a:p>
         </p:txBody>
       </p:sp>
@@ -4027,14 +4027,14 @@
               <a:buNone/>
             </a:pPr>
             <a:r>
-              <a:rPr lang="en-US" sz="910" dirty="0">
+              <a:rPr lang="en-US" sz="1200" dirty="0">
                 <a:solidFill>
                   <a:srgbClr val="0F172A"/>
                 </a:solidFill>
               </a:rPr>
               <a:t>Weighted F1</a:t>
             </a:r>
-            <a:endParaRPr lang="en-US" sz="910" dirty="0"/>
+            <a:endParaRPr lang="en-US" sz="1200" dirty="0"/>
           </a:p>
         </p:txBody>
       </p:sp>
@@ -4071,14 +4071,14 @@
               <a:buNone/>
             </a:pPr>
             <a:r>
-              <a:rPr lang="en-US" sz="910" dirty="0">
+              <a:rPr lang="en-US" sz="1200" dirty="0">
                 <a:solidFill>
                   <a:srgbClr val="0F172A"/>
                 </a:solidFill>
               </a:rPr>
               <a:t>0.609</a:t>
             </a:r>
-            <a:endParaRPr lang="en-US" sz="910" dirty="0"/>
+            <a:endParaRPr lang="en-US" sz="1200" dirty="0"/>
           </a:p>
         </p:txBody>
       </p:sp>
@@ -4115,14 +4115,14 @@
               <a:buNone/>
             </a:pPr>
             <a:r>
-              <a:rPr lang="en-US" sz="910" dirty="0">
+              <a:rPr lang="en-US" sz="1200" dirty="0">
                 <a:solidFill>
                   <a:srgbClr val="0F172A"/>
                 </a:solidFill>
               </a:rPr>
               <a:t>0.351</a:t>
             </a:r>
-            <a:endParaRPr lang="en-US" sz="910" dirty="0"/>
+            <a:endParaRPr lang="en-US" sz="1200" dirty="0"/>
           </a:p>
         </p:txBody>
       </p:sp>
@@ -4159,14 +4159,14 @@
               <a:buNone/>
             </a:pPr>
             <a:r>
-              <a:rPr lang="en-US" sz="910" dirty="0">
+              <a:rPr lang="en-US" sz="1200" dirty="0">
                 <a:solidFill>
                   <a:srgbClr val="0F172A"/>
                 </a:solidFill>
               </a:rPr>
               <a:t>−0.258</a:t>
             </a:r>
-            <a:endParaRPr lang="en-US" sz="910" dirty="0"/>
+            <a:endParaRPr lang="en-US" sz="1200" dirty="0"/>
           </a:p>
         </p:txBody>
       </p:sp>
@@ -4203,14 +4203,14 @@
               <a:buNone/>
             </a:pPr>
             <a:r>
-              <a:rPr lang="en-US" sz="910" dirty="0">
+              <a:rPr lang="en-US" sz="1200" dirty="0">
                 <a:solidFill>
                   <a:srgbClr val="0F172A"/>
                 </a:solidFill>
               </a:rPr>
               <a:t>Kappa</a:t>
             </a:r>
-            <a:endParaRPr lang="en-US" sz="910" dirty="0"/>
+            <a:endParaRPr lang="en-US" sz="1200" dirty="0"/>
           </a:p>
         </p:txBody>
       </p:sp>
@@ -4247,14 +4247,14 @@
               <a:buNone/>
             </a:pPr>
             <a:r>
-              <a:rPr lang="en-US" sz="910" dirty="0">
+              <a:rPr lang="en-US" sz="1200" dirty="0">
                 <a:solidFill>
                   <a:srgbClr val="0F172A"/>
                 </a:solidFill>
               </a:rPr>
               <a:t>0.4928</a:t>
             </a:r>
-            <a:endParaRPr lang="en-US" sz="910" dirty="0"/>
+            <a:endParaRPr lang="en-US" sz="1200" dirty="0"/>
           </a:p>
         </p:txBody>
       </p:sp>
@@ -4291,14 +4291,14 @@
               <a:buNone/>
             </a:pPr>
             <a:r>
-              <a:rPr lang="en-US" sz="910" dirty="0">
+              <a:rPr lang="en-US" sz="1200" dirty="0">
                 <a:solidFill>
                   <a:srgbClr val="0F172A"/>
                 </a:solidFill>
               </a:rPr>
               <a:t>0.1739</a:t>
             </a:r>
-            <a:endParaRPr lang="en-US" sz="910" dirty="0"/>
+            <a:endParaRPr lang="en-US" sz="1200" dirty="0"/>
           </a:p>
         </p:txBody>
       </p:sp>
@@ -4335,14 +4335,14 @@
               <a:buNone/>
             </a:pPr>
             <a:r>
-              <a:rPr lang="en-US" sz="910" dirty="0">
+              <a:rPr lang="en-US" sz="1200" dirty="0">
                 <a:solidFill>
                   <a:srgbClr val="0F172A"/>
                 </a:solidFill>
               </a:rPr>
               <a:t>−0.3189</a:t>
             </a:r>
-            <a:endParaRPr lang="en-US" sz="910" dirty="0"/>
+            <a:endParaRPr lang="en-US" sz="1200" dirty="0"/>
           </a:p>
         </p:txBody>
       </p:sp>
@@ -4379,14 +4379,14 @@
               <a:buNone/>
             </a:pPr>
             <a:r>
-              <a:rPr lang="en-US" sz="910" dirty="0">
+              <a:rPr lang="en-US" sz="1200" dirty="0">
                 <a:solidFill>
                   <a:srgbClr val="0F172A"/>
                 </a:solidFill>
               </a:rPr>
               <a:t>ROC-AUC</a:t>
             </a:r>
-            <a:endParaRPr lang="en-US" sz="910" dirty="0"/>
+            <a:endParaRPr lang="en-US" sz="1200" dirty="0"/>
           </a:p>
         </p:txBody>
       </p:sp>
@@ -4423,14 +4423,14 @@
               <a:buNone/>
             </a:pPr>
             <a:r>
-              <a:rPr lang="en-US" sz="910" dirty="0">
+              <a:rPr lang="en-US" sz="1200" dirty="0">
                 <a:solidFill>
                   <a:srgbClr val="0F172A"/>
                 </a:solidFill>
               </a:rPr>
               <a:t>0.860</a:t>
             </a:r>
-            <a:endParaRPr lang="en-US" sz="910" dirty="0"/>
+            <a:endParaRPr lang="en-US" sz="1200" dirty="0"/>
           </a:p>
         </p:txBody>
       </p:sp>
@@ -4467,14 +4467,14 @@
               <a:buNone/>
             </a:pPr>
             <a:r>
-              <a:rPr lang="en-US" sz="910" dirty="0">
+              <a:rPr lang="en-US" sz="1200" dirty="0">
                 <a:solidFill>
                   <a:srgbClr val="0F172A"/>
                 </a:solidFill>
               </a:rPr>
               <a:t>0.660</a:t>
             </a:r>
-            <a:endParaRPr lang="en-US" sz="910" dirty="0"/>
+            <a:endParaRPr lang="en-US" sz="1200" dirty="0"/>
           </a:p>
         </p:txBody>
       </p:sp>
@@ -4511,14 +4511,14 @@
               <a:buNone/>
             </a:pPr>
             <a:r>
-              <a:rPr lang="en-US" sz="910" dirty="0">
+              <a:rPr lang="en-US" sz="1200" dirty="0">
                 <a:solidFill>
                   <a:srgbClr val="0F172A"/>
                 </a:solidFill>
               </a:rPr>
               <a:t>−0.200</a:t>
             </a:r>
-            <a:endParaRPr lang="en-US" sz="910" dirty="0"/>
+            <a:endParaRPr lang="en-US" sz="1200" dirty="0"/>
           </a:p>
         </p:txBody>
       </p:sp>
@@ -4555,14 +4555,14 @@
               <a:buNone/>
             </a:pPr>
             <a:r>
-              <a:rPr lang="en-US" sz="910" dirty="0">
+              <a:rPr lang="en-US" sz="1200" dirty="0">
                 <a:solidFill>
                   <a:srgbClr val="0F172A"/>
                 </a:solidFill>
               </a:rPr>
               <a:t>PRC-AUC</a:t>
             </a:r>
-            <a:endParaRPr lang="en-US" sz="910" dirty="0"/>
+            <a:endParaRPr lang="en-US" sz="1200" dirty="0"/>
           </a:p>
         </p:txBody>
       </p:sp>
@@ -4599,14 +4599,14 @@
               <a:buNone/>
             </a:pPr>
             <a:r>
-              <a:rPr lang="en-US" sz="910" dirty="0">
+              <a:rPr lang="en-US" sz="1200" dirty="0">
                 <a:solidFill>
                   <a:srgbClr val="0F172A"/>
                 </a:solidFill>
               </a:rPr>
               <a:t>0.723</a:t>
             </a:r>
-            <a:endParaRPr lang="en-US" sz="910" dirty="0"/>
+            <a:endParaRPr lang="en-US" sz="1200" dirty="0"/>
           </a:p>
         </p:txBody>
       </p:sp>
@@ -4643,14 +4643,14 @@
               <a:buNone/>
             </a:pPr>
             <a:r>
-              <a:rPr lang="en-US" sz="910" dirty="0">
+              <a:rPr lang="en-US" sz="1200" dirty="0">
                 <a:solidFill>
                   <a:srgbClr val="0F172A"/>
                 </a:solidFill>
               </a:rPr>
               <a:t>0.337</a:t>
             </a:r>
-            <a:endParaRPr lang="en-US" sz="910" dirty="0"/>
+            <a:endParaRPr lang="en-US" sz="1200" dirty="0"/>
           </a:p>
         </p:txBody>
       </p:sp>
@@ -4687,14 +4687,14 @@
               <a:buNone/>
             </a:pPr>
             <a:r>
-              <a:rPr lang="en-US" sz="910" dirty="0">
+              <a:rPr lang="en-US" sz="1200" dirty="0">
                 <a:solidFill>
                   <a:srgbClr val="0F172A"/>
                 </a:solidFill>
               </a:rPr>
               <a:t>−0.386</a:t>
             </a:r>
-            <a:endParaRPr lang="en-US" sz="910" dirty="0"/>
+            <a:endParaRPr lang="en-US" sz="1200" dirty="0"/>
           </a:p>
         </p:txBody>
       </p:sp>
@@ -5086,14 +5086,14 @@
               <a:buNone/>
             </a:pPr>
             <a:r>
-              <a:rPr lang="en-US" sz="910" b="1" dirty="0">
+              <a:rPr lang="en-US" sz="1400" b="1" dirty="0">
                 <a:solidFill>
                   <a:srgbClr val="FFFFFF"/>
                 </a:solidFill>
               </a:rPr>
               <a:t>Parameter</a:t>
             </a:r>
-            <a:endParaRPr lang="en-US" sz="910" dirty="0"/>
+            <a:endParaRPr lang="en-US" sz="1400" dirty="0"/>
           </a:p>
         </p:txBody>
       </p:sp>
@@ -5130,14 +5130,14 @@
               <a:buNone/>
             </a:pPr>
             <a:r>
-              <a:rPr lang="en-US" sz="910" b="1" dirty="0">
+              <a:rPr lang="en-US" sz="1400" b="1" dirty="0">
                 <a:solidFill>
                   <a:srgbClr val="FFFFFF"/>
                 </a:solidFill>
               </a:rPr>
               <a:t>Locked value</a:t>
             </a:r>
-            <a:endParaRPr lang="en-US" sz="910" dirty="0"/>
+            <a:endParaRPr lang="en-US" sz="1400" dirty="0"/>
           </a:p>
         </p:txBody>
       </p:sp>
@@ -5174,14 +5174,14 @@
               <a:buNone/>
             </a:pPr>
             <a:r>
-              <a:rPr lang="en-US" sz="870" dirty="0">
+              <a:rPr lang="en-US" sz="1200" dirty="0">
                 <a:solidFill>
                   <a:srgbClr val="0F172A"/>
                 </a:solidFill>
               </a:rPr>
               <a:t>Algorithm</a:t>
             </a:r>
-            <a:endParaRPr lang="en-US" sz="870" dirty="0"/>
+            <a:endParaRPr lang="en-US" sz="1200" dirty="0"/>
           </a:p>
         </p:txBody>
       </p:sp>
@@ -5218,14 +5218,14 @@
               <a:buNone/>
             </a:pPr>
             <a:r>
-              <a:rPr lang="en-US" sz="870" dirty="0">
+              <a:rPr lang="en-US" sz="1200" dirty="0">
                 <a:solidFill>
                   <a:srgbClr val="0F172A"/>
                 </a:solidFill>
               </a:rPr>
               <a:t>scikit‑learn RandomForestClassifier</a:t>
             </a:r>
-            <a:endParaRPr lang="en-US" sz="870" dirty="0"/>
+            <a:endParaRPr lang="en-US" sz="1200" dirty="0"/>
           </a:p>
         </p:txBody>
       </p:sp>
@@ -5262,14 +5262,14 @@
               <a:buNone/>
             </a:pPr>
             <a:r>
-              <a:rPr lang="en-US" sz="870" dirty="0">
+              <a:rPr lang="en-US" sz="1200" dirty="0">
                 <a:solidFill>
                   <a:srgbClr val="0F172A"/>
                 </a:solidFill>
               </a:rPr>
               <a:t>n_estimators</a:t>
             </a:r>
-            <a:endParaRPr lang="en-US" sz="870" dirty="0"/>
+            <a:endParaRPr lang="en-US" sz="1200" dirty="0"/>
           </a:p>
         </p:txBody>
       </p:sp>
@@ -5306,14 +5306,14 @@
               <a:buNone/>
             </a:pPr>
             <a:r>
-              <a:rPr lang="en-US" sz="870" dirty="0">
+              <a:rPr lang="en-US" sz="1200" dirty="0">
                 <a:solidFill>
                   <a:srgbClr val="0F172A"/>
                 </a:solidFill>
               </a:rPr>
               <a:t>100</a:t>
             </a:r>
-            <a:endParaRPr lang="en-US" sz="870" dirty="0"/>
+            <a:endParaRPr lang="en-US" sz="1200" dirty="0"/>
           </a:p>
         </p:txBody>
       </p:sp>
@@ -5350,14 +5350,14 @@
               <a:buNone/>
             </a:pPr>
             <a:r>
-              <a:rPr lang="en-US" sz="870" dirty="0">
+              <a:rPr lang="en-US" sz="1200" dirty="0">
                 <a:solidFill>
                   <a:srgbClr val="0F172A"/>
                 </a:solidFill>
               </a:rPr>
               <a:t>max_features</a:t>
             </a:r>
-            <a:endParaRPr lang="en-US" sz="870" dirty="0"/>
+            <a:endParaRPr lang="en-US" sz="1200" dirty="0"/>
           </a:p>
         </p:txBody>
       </p:sp>
@@ -5394,14 +5394,14 @@
               <a:buNone/>
             </a:pPr>
             <a:r>
-              <a:rPr lang="en-US" sz="870" dirty="0">
+              <a:rPr lang="en-US" sz="1200" dirty="0">
                 <a:solidFill>
                   <a:srgbClr val="0F172A"/>
                 </a:solidFill>
               </a:rPr>
               <a:t>sqrt</a:t>
             </a:r>
-            <a:endParaRPr lang="en-US" sz="870" dirty="0"/>
+            <a:endParaRPr lang="en-US" sz="1200" dirty="0"/>
           </a:p>
         </p:txBody>
       </p:sp>
@@ -5438,14 +5438,14 @@
               <a:buNone/>
             </a:pPr>
             <a:r>
-              <a:rPr lang="en-US" sz="870" dirty="0">
+              <a:rPr lang="en-US" sz="1200" dirty="0">
                 <a:solidFill>
                   <a:srgbClr val="0F172A"/>
                 </a:solidFill>
               </a:rPr>
               <a:t>min_samples_leaf</a:t>
             </a:r>
-            <a:endParaRPr lang="en-US" sz="870" dirty="0"/>
+            <a:endParaRPr lang="en-US" sz="1200" dirty="0"/>
           </a:p>
         </p:txBody>
       </p:sp>
@@ -5482,14 +5482,14 @@
               <a:buNone/>
             </a:pPr>
             <a:r>
-              <a:rPr lang="en-US" sz="870" dirty="0">
+              <a:rPr lang="en-US" sz="1200" dirty="0">
                 <a:solidFill>
                   <a:srgbClr val="0F172A"/>
                 </a:solidFill>
               </a:rPr>
               <a:t>1</a:t>
             </a:r>
-            <a:endParaRPr lang="en-US" sz="870" dirty="0"/>
+            <a:endParaRPr lang="en-US" sz="1200" dirty="0"/>
           </a:p>
         </p:txBody>
       </p:sp>
@@ -5526,14 +5526,14 @@
               <a:buNone/>
             </a:pPr>
             <a:r>
-              <a:rPr lang="en-US" sz="870" dirty="0">
+              <a:rPr lang="en-US" sz="1200" dirty="0">
                 <a:solidFill>
                   <a:srgbClr val="0F172A"/>
                 </a:solidFill>
               </a:rPr>
               <a:t>random_state</a:t>
             </a:r>
-            <a:endParaRPr lang="en-US" sz="870" dirty="0"/>
+            <a:endParaRPr lang="en-US" sz="1200" dirty="0"/>
           </a:p>
         </p:txBody>
       </p:sp>
@@ -5570,14 +5570,14 @@
               <a:buNone/>
             </a:pPr>
             <a:r>
-              <a:rPr lang="en-US" sz="870" dirty="0">
+              <a:rPr lang="en-US" sz="1200" dirty="0">
                 <a:solidFill>
                   <a:srgbClr val="0F172A"/>
                 </a:solidFill>
               </a:rPr>
               <a:t>1</a:t>
             </a:r>
-            <a:endParaRPr lang="en-US" sz="870" dirty="0"/>
+            <a:endParaRPr lang="en-US" sz="1200" dirty="0"/>
           </a:p>
         </p:txBody>
       </p:sp>
@@ -5614,14 +5614,14 @@
               <a:buNone/>
             </a:pPr>
             <a:r>
-              <a:rPr lang="en-US" sz="870" dirty="0">
+              <a:rPr lang="en-US" sz="1200" dirty="0">
                 <a:solidFill>
                   <a:srgbClr val="0F172A"/>
                 </a:solidFill>
               </a:rPr>
               <a:t>Final fit data</a:t>
             </a:r>
-            <a:endParaRPr lang="en-US" sz="870" dirty="0"/>
+            <a:endParaRPr lang="en-US" sz="1200" dirty="0"/>
           </a:p>
         </p:txBody>
       </p:sp>
@@ -5658,14 +5658,14 @@
               <a:buNone/>
             </a:pPr>
             <a:r>
-              <a:rPr lang="en-US" sz="870" dirty="0">
+              <a:rPr lang="en-US" sz="1200" dirty="0">
                 <a:solidFill>
                   <a:srgbClr val="0F172A"/>
                 </a:solidFill>
               </a:rPr>
               <a:t>Train + Validation = 2,988 rows</a:t>
             </a:r>
-            <a:endParaRPr lang="en-US" sz="870" dirty="0"/>
+            <a:endParaRPr lang="en-US" sz="1200" dirty="0"/>
           </a:p>
         </p:txBody>
       </p:sp>
@@ -5702,14 +5702,14 @@
               <a:buNone/>
             </a:pPr>
             <a:r>
-              <a:rPr lang="en-US" sz="870" dirty="0">
+              <a:rPr lang="en-US" sz="1200" dirty="0">
                 <a:solidFill>
                   <a:srgbClr val="0F172A"/>
                 </a:solidFill>
               </a:rPr>
               <a:t>Final Test</a:t>
             </a:r>
-            <a:endParaRPr lang="en-US" sz="870" dirty="0"/>
+            <a:endParaRPr lang="en-US" sz="1200" dirty="0"/>
           </a:p>
         </p:txBody>
       </p:sp>
@@ -5746,14 +5746,14 @@
               <a:buNone/>
             </a:pPr>
             <a:r>
-              <a:rPr lang="en-US" sz="870" dirty="0">
+              <a:rPr lang="en-US" sz="1200" dirty="0">
                 <a:solidFill>
                   <a:srgbClr val="0F172A"/>
                 </a:solidFill>
               </a:rPr>
               <a:t>528 rows</a:t>
             </a:r>
-            <a:endParaRPr lang="en-US" sz="870" dirty="0"/>
+            <a:endParaRPr lang="en-US" sz="1200" dirty="0"/>
           </a:p>
         </p:txBody>
       </p:sp>
@@ -6619,22 +6619,22 @@
         </p:spPr>
         <p:txBody>
           <a:bodyPr wrap="square" rtlCol="0" anchor="ctr">
-            <a:normAutofit/>
-          </a:bodyPr>
-          <a:lstStyle/>
-          <a:p>
-            <a:pPr marL="0" indent="0" algn="ctr">
-              <a:buNone/>
-            </a:pPr>
-            <a:r>
-              <a:rPr lang="en-US" sz="720" b="1" dirty="0">
+            <a:noAutofit/>
+          </a:bodyPr>
+          <a:lstStyle/>
+          <a:p>
+            <a:pPr marL="0" indent="0" algn="ctr">
+              <a:buNone/>
+            </a:pPr>
+            <a:r>
+              <a:rPr lang="en-US" sz="1200" b="1" dirty="0">
                 <a:solidFill>
                   <a:srgbClr val="FFFFFF"/>
                 </a:solidFill>
               </a:rPr>
               <a:t>Actual / Predicted</a:t>
             </a:r>
-            <a:endParaRPr lang="en-US" sz="720" dirty="0"/>
+            <a:endParaRPr lang="en-US" sz="1200" dirty="0"/>
           </a:p>
         </p:txBody>
       </p:sp>
@@ -6671,14 +6671,14 @@
               <a:buNone/>
             </a:pPr>
             <a:r>
-              <a:rPr lang="en-US" sz="710" b="1" dirty="0">
+              <a:rPr lang="en-US" sz="1200" b="1" dirty="0">
                 <a:solidFill>
                   <a:srgbClr val="FFFFFF"/>
                 </a:solidFill>
               </a:rPr>
               <a:t>3.00–3.25</a:t>
             </a:r>
-            <a:endParaRPr lang="en-US" sz="710" dirty="0"/>
+            <a:endParaRPr lang="en-US" sz="1200" dirty="0"/>
           </a:p>
         </p:txBody>
       </p:sp>
@@ -6715,14 +6715,14 @@
               <a:buNone/>
             </a:pPr>
             <a:r>
-              <a:rPr lang="en-US" sz="710" b="1" dirty="0">
+              <a:rPr lang="en-US" sz="1200" b="1" dirty="0">
                 <a:solidFill>
                   <a:srgbClr val="FFFFFF"/>
                 </a:solidFill>
               </a:rPr>
               <a:t>3.25–3.50</a:t>
             </a:r>
-            <a:endParaRPr lang="en-US" sz="710" dirty="0"/>
+            <a:endParaRPr lang="en-US" sz="1200" dirty="0"/>
           </a:p>
         </p:txBody>
       </p:sp>
@@ -6759,14 +6759,14 @@
               <a:buNone/>
             </a:pPr>
             <a:r>
-              <a:rPr lang="en-US" sz="710" b="1" dirty="0">
+              <a:rPr lang="en-US" sz="1200" b="1" dirty="0">
                 <a:solidFill>
                   <a:srgbClr val="FFFFFF"/>
                 </a:solidFill>
               </a:rPr>
               <a:t>3.50–3.75</a:t>
             </a:r>
-            <a:endParaRPr lang="en-US" sz="710" dirty="0"/>
+            <a:endParaRPr lang="en-US" sz="1200" dirty="0"/>
           </a:p>
         </p:txBody>
       </p:sp>
@@ -6803,14 +6803,14 @@
               <a:buNone/>
             </a:pPr>
             <a:r>
-              <a:rPr lang="en-US" sz="710" b="1" dirty="0">
+              <a:rPr lang="en-US" sz="1200" b="1" dirty="0">
                 <a:solidFill>
                   <a:srgbClr val="FFFFFF"/>
                 </a:solidFill>
               </a:rPr>
               <a:t>&gt;3.75</a:t>
             </a:r>
-            <a:endParaRPr lang="en-US" sz="710" dirty="0"/>
+            <a:endParaRPr lang="en-US" sz="1200" dirty="0"/>
           </a:p>
         </p:txBody>
       </p:sp>
@@ -6847,14 +6847,14 @@
               <a:buNone/>
             </a:pPr>
             <a:r>
-              <a:rPr lang="en-US" sz="710" b="1" dirty="0">
+              <a:rPr lang="en-US" sz="1200" b="1" dirty="0">
                 <a:solidFill>
                   <a:srgbClr val="FFFFFF"/>
                 </a:solidFill>
               </a:rPr>
               <a:t>&lt;3.00</a:t>
             </a:r>
-            <a:endParaRPr lang="en-US" sz="710" dirty="0"/>
+            <a:endParaRPr lang="en-US" sz="1200" dirty="0"/>
           </a:p>
         </p:txBody>
       </p:sp>
@@ -6891,14 +6891,14 @@
               <a:buNone/>
             </a:pPr>
             <a:r>
-              <a:rPr lang="en-US" sz="710" b="1" dirty="0">
+              <a:rPr lang="en-US" sz="1200" b="1" dirty="0">
                 <a:solidFill>
                   <a:srgbClr val="0F172A"/>
                 </a:solidFill>
               </a:rPr>
               <a:t>3.00–3.25</a:t>
             </a:r>
-            <a:endParaRPr lang="en-US" sz="710" dirty="0"/>
+            <a:endParaRPr lang="en-US" sz="1200" dirty="0"/>
           </a:p>
         </p:txBody>
       </p:sp>
@@ -6935,14 +6935,14 @@
               <a:buNone/>
             </a:pPr>
             <a:r>
-              <a:rPr lang="en-US" sz="1100" b="1" dirty="0">
+              <a:rPr lang="en-US" sz="2400" b="1" dirty="0">
                 <a:solidFill>
                   <a:srgbClr val="0F172A"/>
                 </a:solidFill>
               </a:rPr>
               <a:t>40</a:t>
             </a:r>
-            <a:endParaRPr lang="en-US" sz="1100" dirty="0"/>
+            <a:endParaRPr lang="en-US" sz="2400" dirty="0"/>
           </a:p>
         </p:txBody>
       </p:sp>
@@ -6979,14 +6979,14 @@
               <a:buNone/>
             </a:pPr>
             <a:r>
-              <a:rPr lang="en-US" sz="950" dirty="0">
+              <a:rPr lang="en-US" sz="1600" dirty="0">
                 <a:solidFill>
                   <a:srgbClr val="0F172A"/>
                 </a:solidFill>
               </a:rPr>
               <a:t>41</a:t>
             </a:r>
-            <a:endParaRPr lang="en-US" sz="950" dirty="0"/>
+            <a:endParaRPr lang="en-US" sz="1600" dirty="0"/>
           </a:p>
         </p:txBody>
       </p:sp>
@@ -7023,14 +7023,14 @@
               <a:buNone/>
             </a:pPr>
             <a:r>
-              <a:rPr lang="en-US" sz="950" dirty="0">
+              <a:rPr lang="en-US" sz="1600" dirty="0">
                 <a:solidFill>
                   <a:srgbClr val="0F172A"/>
                 </a:solidFill>
               </a:rPr>
               <a:t>12</a:t>
             </a:r>
-            <a:endParaRPr lang="en-US" sz="950" dirty="0"/>
+            <a:endParaRPr lang="en-US" sz="1600" dirty="0"/>
           </a:p>
         </p:txBody>
       </p:sp>
@@ -7067,14 +7067,14 @@
               <a:buNone/>
             </a:pPr>
             <a:r>
-              <a:rPr lang="en-US" sz="950" dirty="0">
+              <a:rPr lang="en-US" sz="1600" dirty="0">
                 <a:solidFill>
                   <a:srgbClr val="0F172A"/>
                 </a:solidFill>
               </a:rPr>
               <a:t>3</a:t>
             </a:r>
-            <a:endParaRPr lang="en-US" sz="950" dirty="0"/>
+            <a:endParaRPr lang="en-US" sz="1600" dirty="0"/>
           </a:p>
         </p:txBody>
       </p:sp>
@@ -7111,14 +7111,14 @@
               <a:buNone/>
             </a:pPr>
             <a:r>
-              <a:rPr lang="en-US" sz="950" dirty="0">
+              <a:rPr lang="en-US" sz="1600" dirty="0">
                 <a:solidFill>
                   <a:srgbClr val="0F172A"/>
                 </a:solidFill>
               </a:rPr>
               <a:t>2</a:t>
             </a:r>
-            <a:endParaRPr lang="en-US" sz="950" dirty="0"/>
+            <a:endParaRPr lang="en-US" sz="1600" dirty="0"/>
           </a:p>
         </p:txBody>
       </p:sp>
@@ -7155,14 +7155,14 @@
               <a:buNone/>
             </a:pPr>
             <a:r>
-              <a:rPr lang="en-US" sz="710" b="1" dirty="0">
+              <a:rPr lang="en-US" sz="1200" b="1" dirty="0">
                 <a:solidFill>
                   <a:srgbClr val="0F172A"/>
                 </a:solidFill>
               </a:rPr>
               <a:t>3.25–3.50</a:t>
             </a:r>
-            <a:endParaRPr lang="en-US" sz="710" dirty="0"/>
+            <a:endParaRPr lang="en-US" sz="1200" dirty="0"/>
           </a:p>
         </p:txBody>
       </p:sp>
@@ -7199,14 +7199,14 @@
               <a:buNone/>
             </a:pPr>
             <a:r>
-              <a:rPr lang="en-US" sz="950" dirty="0">
+              <a:rPr lang="en-US" sz="1600" dirty="0">
                 <a:solidFill>
                   <a:srgbClr val="0F172A"/>
                 </a:solidFill>
               </a:rPr>
               <a:t>19</a:t>
             </a:r>
-            <a:endParaRPr lang="en-US" sz="950" dirty="0"/>
+            <a:endParaRPr lang="en-US" sz="1600" dirty="0"/>
           </a:p>
         </p:txBody>
       </p:sp>
@@ -7235,22 +7235,22 @@
         </p:spPr>
         <p:txBody>
           <a:bodyPr wrap="square" rtlCol="0" anchor="ctr">
-            <a:normAutofit/>
-          </a:bodyPr>
-          <a:lstStyle/>
-          <a:p>
-            <a:pPr marL="0" indent="0" algn="ctr">
-              <a:buNone/>
-            </a:pPr>
-            <a:r>
-              <a:rPr lang="en-US" sz="1100" b="1" dirty="0">
+            <a:noAutofit/>
+          </a:bodyPr>
+          <a:lstStyle/>
+          <a:p>
+            <a:pPr marL="0" indent="0" algn="ctr">
+              <a:buNone/>
+            </a:pPr>
+            <a:r>
+              <a:rPr lang="en-US" sz="2400" b="1" dirty="0">
                 <a:solidFill>
                   <a:srgbClr val="FFFFFF"/>
                 </a:solidFill>
               </a:rPr>
               <a:t>101</a:t>
             </a:r>
-            <a:endParaRPr lang="en-US" sz="1100" dirty="0"/>
+            <a:endParaRPr lang="en-US" sz="2400" dirty="0"/>
           </a:p>
         </p:txBody>
       </p:sp>
@@ -7287,14 +7287,14 @@
               <a:buNone/>
             </a:pPr>
             <a:r>
-              <a:rPr lang="en-US" sz="950" dirty="0">
+              <a:rPr lang="en-US" sz="1600" dirty="0">
                 <a:solidFill>
                   <a:srgbClr val="0F172A"/>
                 </a:solidFill>
               </a:rPr>
               <a:t>21</a:t>
             </a:r>
-            <a:endParaRPr lang="en-US" sz="950" dirty="0"/>
+            <a:endParaRPr lang="en-US" sz="1600" dirty="0"/>
           </a:p>
         </p:txBody>
       </p:sp>
@@ -7331,14 +7331,14 @@
               <a:buNone/>
             </a:pPr>
             <a:r>
-              <a:rPr lang="en-US" sz="950" dirty="0">
+              <a:rPr lang="en-US" sz="1600" dirty="0">
                 <a:solidFill>
                   <a:srgbClr val="0F172A"/>
                 </a:solidFill>
               </a:rPr>
               <a:t>5</a:t>
             </a:r>
-            <a:endParaRPr lang="en-US" sz="950" dirty="0"/>
+            <a:endParaRPr lang="en-US" sz="1600" dirty="0"/>
           </a:p>
         </p:txBody>
       </p:sp>
@@ -7375,14 +7375,14 @@
               <a:buNone/>
             </a:pPr>
             <a:r>
-              <a:rPr lang="en-US" sz="950" dirty="0">
+              <a:rPr lang="en-US" sz="1600" dirty="0">
                 <a:solidFill>
                   <a:srgbClr val="0F172A"/>
                 </a:solidFill>
               </a:rPr>
               <a:t>2</a:t>
             </a:r>
-            <a:endParaRPr lang="en-US" sz="950" dirty="0"/>
+            <a:endParaRPr lang="en-US" sz="1600" dirty="0"/>
           </a:p>
         </p:txBody>
       </p:sp>
@@ -7419,14 +7419,14 @@
               <a:buNone/>
             </a:pPr>
             <a:r>
-              <a:rPr lang="en-US" sz="710" b="1" dirty="0">
+              <a:rPr lang="en-US" sz="1200" b="1" dirty="0">
                 <a:solidFill>
                   <a:srgbClr val="0F172A"/>
                 </a:solidFill>
               </a:rPr>
               <a:t>3.50–3.75</a:t>
             </a:r>
-            <a:endParaRPr lang="en-US" sz="710" dirty="0"/>
+            <a:endParaRPr lang="en-US" sz="1200" dirty="0"/>
           </a:p>
         </p:txBody>
       </p:sp>
@@ -7463,14 +7463,14 @@
               <a:buNone/>
             </a:pPr>
             <a:r>
-              <a:rPr lang="en-US" sz="950" dirty="0">
+              <a:rPr lang="en-US" sz="1600" dirty="0">
                 <a:solidFill>
                   <a:srgbClr val="0F172A"/>
                 </a:solidFill>
               </a:rPr>
               <a:t>8</a:t>
             </a:r>
-            <a:endParaRPr lang="en-US" sz="950" dirty="0"/>
+            <a:endParaRPr lang="en-US" sz="1600" dirty="0"/>
           </a:p>
         </p:txBody>
       </p:sp>
@@ -7507,14 +7507,14 @@
               <a:buNone/>
             </a:pPr>
             <a:r>
-              <a:rPr lang="en-US" sz="950" dirty="0">
+              <a:rPr lang="en-US" sz="1600" dirty="0">
                 <a:solidFill>
                   <a:srgbClr val="0F172A"/>
                 </a:solidFill>
               </a:rPr>
               <a:t>31</a:t>
             </a:r>
-            <a:endParaRPr lang="en-US" sz="950" dirty="0"/>
+            <a:endParaRPr lang="en-US" sz="1600" dirty="0"/>
           </a:p>
         </p:txBody>
       </p:sp>
@@ -7551,14 +7551,14 @@
               <a:buNone/>
             </a:pPr>
             <a:r>
-              <a:rPr lang="en-US" sz="1100" b="1" dirty="0">
+              <a:rPr lang="en-US" sz="2400" b="1" dirty="0">
                 <a:solidFill>
                   <a:srgbClr val="FFFFFF"/>
                 </a:solidFill>
               </a:rPr>
               <a:t>78</a:t>
             </a:r>
-            <a:endParaRPr lang="en-US" sz="1100" dirty="0"/>
+            <a:endParaRPr lang="en-US" sz="2400" dirty="0"/>
           </a:p>
         </p:txBody>
       </p:sp>
@@ -7595,14 +7595,14 @@
               <a:buNone/>
             </a:pPr>
             <a:r>
-              <a:rPr lang="en-US" sz="950" dirty="0">
+              <a:rPr lang="en-US" sz="1600" dirty="0">
                 <a:solidFill>
                   <a:srgbClr val="0F172A"/>
                 </a:solidFill>
               </a:rPr>
               <a:t>5</a:t>
             </a:r>
-            <a:endParaRPr lang="en-US" sz="950" dirty="0"/>
+            <a:endParaRPr lang="en-US" sz="1600" dirty="0"/>
           </a:p>
         </p:txBody>
       </p:sp>
@@ -7639,14 +7639,14 @@
               <a:buNone/>
             </a:pPr>
             <a:r>
-              <a:rPr lang="en-US" sz="950" dirty="0">
+              <a:rPr lang="en-US" sz="1600" dirty="0">
                 <a:solidFill>
                   <a:srgbClr val="0F172A"/>
                 </a:solidFill>
               </a:rPr>
               <a:t>1</a:t>
             </a:r>
-            <a:endParaRPr lang="en-US" sz="950" dirty="0"/>
+            <a:endParaRPr lang="en-US" sz="1600" dirty="0"/>
           </a:p>
         </p:txBody>
       </p:sp>
@@ -7683,14 +7683,14 @@
               <a:buNone/>
             </a:pPr>
             <a:r>
-              <a:rPr lang="en-US" sz="710" b="1" dirty="0">
+              <a:rPr lang="en-US" sz="1200" b="1" dirty="0">
                 <a:solidFill>
                   <a:srgbClr val="0F172A"/>
                 </a:solidFill>
               </a:rPr>
               <a:t>&gt;3.75</a:t>
             </a:r>
-            <a:endParaRPr lang="en-US" sz="710" dirty="0"/>
+            <a:endParaRPr lang="en-US" sz="1200" dirty="0"/>
           </a:p>
         </p:txBody>
       </p:sp>
@@ -7727,14 +7727,14 @@
               <a:buNone/>
             </a:pPr>
             <a:r>
-              <a:rPr lang="en-US" sz="950" dirty="0">
+              <a:rPr lang="en-US" sz="1600" dirty="0">
                 <a:solidFill>
                   <a:srgbClr val="0F172A"/>
                 </a:solidFill>
               </a:rPr>
               <a:t>2</a:t>
             </a:r>
-            <a:endParaRPr lang="en-US" sz="950" dirty="0"/>
+            <a:endParaRPr lang="en-US" sz="1600" dirty="0"/>
           </a:p>
         </p:txBody>
       </p:sp>
@@ -7771,14 +7771,14 @@
               <a:buNone/>
             </a:pPr>
             <a:r>
-              <a:rPr lang="en-US" sz="950" dirty="0">
+              <a:rPr lang="en-US" sz="1600" dirty="0">
                 <a:solidFill>
                   <a:srgbClr val="0F172A"/>
                 </a:solidFill>
               </a:rPr>
               <a:t>9</a:t>
             </a:r>
-            <a:endParaRPr lang="en-US" sz="950" dirty="0"/>
+            <a:endParaRPr lang="en-US" sz="1600" dirty="0"/>
           </a:p>
         </p:txBody>
       </p:sp>
@@ -7815,14 +7815,14 @@
               <a:buNone/>
             </a:pPr>
             <a:r>
-              <a:rPr lang="en-US" sz="950" dirty="0">
+              <a:rPr lang="en-US" sz="1600" dirty="0">
                 <a:solidFill>
                   <a:srgbClr val="0F172A"/>
                 </a:solidFill>
               </a:rPr>
               <a:t>14</a:t>
             </a:r>
-            <a:endParaRPr lang="en-US" sz="950" dirty="0"/>
+            <a:endParaRPr lang="en-US" sz="1600" dirty="0"/>
           </a:p>
         </p:txBody>
       </p:sp>
@@ -7859,14 +7859,14 @@
               <a:buNone/>
             </a:pPr>
             <a:r>
-              <a:rPr lang="en-US" sz="1100" b="1" dirty="0">
+              <a:rPr lang="en-US" sz="2400" b="1" dirty="0">
                 <a:solidFill>
                   <a:srgbClr val="FFFFFF"/>
                 </a:solidFill>
               </a:rPr>
               <a:t>62</a:t>
             </a:r>
-            <a:endParaRPr lang="en-US" sz="1100" dirty="0"/>
+            <a:endParaRPr lang="en-US" sz="2400" dirty="0"/>
           </a:p>
         </p:txBody>
       </p:sp>
@@ -7903,14 +7903,14 @@
               <a:buNone/>
             </a:pPr>
             <a:r>
-              <a:rPr lang="en-US" sz="950" dirty="0">
+              <a:rPr lang="en-US" sz="1600" dirty="0">
                 <a:solidFill>
                   <a:srgbClr val="0F172A"/>
                 </a:solidFill>
               </a:rPr>
               <a:t>2</a:t>
             </a:r>
-            <a:endParaRPr lang="en-US" sz="950" dirty="0"/>
+            <a:endParaRPr lang="en-US" sz="1600" dirty="0"/>
           </a:p>
         </p:txBody>
       </p:sp>
@@ -7947,14 +7947,14 @@
               <a:buNone/>
             </a:pPr>
             <a:r>
-              <a:rPr lang="en-US" sz="710" b="1" dirty="0">
+              <a:rPr lang="en-US" sz="1200" b="1" dirty="0">
                 <a:solidFill>
                   <a:srgbClr val="0F172A"/>
                 </a:solidFill>
               </a:rPr>
               <a:t>&lt;3.00</a:t>
             </a:r>
-            <a:endParaRPr lang="en-US" sz="710" dirty="0"/>
+            <a:endParaRPr lang="en-US" sz="1200" dirty="0"/>
           </a:p>
         </p:txBody>
       </p:sp>
@@ -7991,14 +7991,14 @@
               <a:buNone/>
             </a:pPr>
             <a:r>
-              <a:rPr lang="en-US" sz="950" dirty="0">
+              <a:rPr lang="en-US" sz="1600" dirty="0">
                 <a:solidFill>
                   <a:srgbClr val="0F172A"/>
                 </a:solidFill>
               </a:rPr>
               <a:t>8</a:t>
             </a:r>
-            <a:endParaRPr lang="en-US" sz="950" dirty="0"/>
+            <a:endParaRPr lang="en-US" sz="1600" dirty="0"/>
           </a:p>
         </p:txBody>
       </p:sp>
@@ -8035,14 +8035,14 @@
               <a:buNone/>
             </a:pPr>
             <a:r>
-              <a:rPr lang="en-US" sz="950" dirty="0">
+              <a:rPr lang="en-US" sz="1600" dirty="0">
                 <a:solidFill>
                   <a:srgbClr val="0F172A"/>
                 </a:solidFill>
               </a:rPr>
               <a:t>17</a:t>
             </a:r>
-            <a:endParaRPr lang="en-US" sz="950" dirty="0"/>
+            <a:endParaRPr lang="en-US" sz="1600" dirty="0"/>
           </a:p>
         </p:txBody>
       </p:sp>
@@ -8079,14 +8079,14 @@
               <a:buNone/>
             </a:pPr>
             <a:r>
-              <a:rPr lang="en-US" sz="950" dirty="0">
+              <a:rPr lang="en-US" sz="1600" dirty="0">
                 <a:solidFill>
                   <a:srgbClr val="0F172A"/>
                 </a:solidFill>
               </a:rPr>
               <a:t>6</a:t>
             </a:r>
-            <a:endParaRPr lang="en-US" sz="950" dirty="0"/>
+            <a:endParaRPr lang="en-US" sz="1600" dirty="0"/>
           </a:p>
         </p:txBody>
       </p:sp>
@@ -8123,14 +8123,14 @@
               <a:buNone/>
             </a:pPr>
             <a:r>
-              <a:rPr lang="en-US" sz="950" dirty="0">
+              <a:rPr lang="en-US" sz="1600" dirty="0">
                 <a:solidFill>
                   <a:srgbClr val="0F172A"/>
                 </a:solidFill>
               </a:rPr>
               <a:t>4</a:t>
             </a:r>
-            <a:endParaRPr lang="en-US" sz="950" dirty="0"/>
+            <a:endParaRPr lang="en-US" sz="1600" dirty="0"/>
           </a:p>
         </p:txBody>
       </p:sp>
@@ -8167,14 +8167,14 @@
               <a:buNone/>
             </a:pPr>
             <a:r>
-              <a:rPr lang="en-US" sz="1100" b="1" dirty="0">
+              <a:rPr lang="en-US" sz="2400" b="1" dirty="0">
                 <a:solidFill>
                   <a:srgbClr val="0F172A"/>
                 </a:solidFill>
               </a:rPr>
               <a:t>35</a:t>
             </a:r>
-            <a:endParaRPr lang="en-US" sz="1100" dirty="0"/>
+            <a:endParaRPr lang="en-US" sz="2400" dirty="0"/>
           </a:p>
         </p:txBody>
       </p:sp>
@@ -8842,14 +8842,14 @@
               <a:buNone/>
             </a:pPr>
             <a:r>
-              <a:rPr lang="en-US" sz="910" b="1" dirty="0">
+              <a:rPr lang="en-US" sz="1400" b="1" dirty="0">
                 <a:solidFill>
                   <a:srgbClr val="FFFFFF"/>
                 </a:solidFill>
               </a:rPr>
               <a:t>Audit stage</a:t>
             </a:r>
-            <a:endParaRPr lang="en-US" sz="910" dirty="0"/>
+            <a:endParaRPr lang="en-US" sz="1400" dirty="0"/>
           </a:p>
         </p:txBody>
       </p:sp>
@@ -8886,14 +8886,14 @@
               <a:buNone/>
             </a:pPr>
             <a:r>
-              <a:rPr lang="en-US" sz="910" b="1" dirty="0">
+              <a:rPr lang="en-US" sz="1400" b="1" dirty="0">
                 <a:solidFill>
                   <a:srgbClr val="FFFFFF"/>
                 </a:solidFill>
               </a:rPr>
               <a:t>Rows</a:t>
             </a:r>
-            <a:endParaRPr lang="en-US" sz="910" dirty="0"/>
+            <a:endParaRPr lang="en-US" sz="1400" dirty="0"/>
           </a:p>
         </p:txBody>
       </p:sp>
@@ -8930,14 +8930,14 @@
               <a:buNone/>
             </a:pPr>
             <a:r>
-              <a:rPr lang="en-US" sz="910" b="1" dirty="0">
+              <a:rPr lang="en-US" sz="1400" b="1" dirty="0">
                 <a:solidFill>
                   <a:srgbClr val="FFFFFF"/>
                 </a:solidFill>
               </a:rPr>
               <a:t>Result</a:t>
             </a:r>
-            <a:endParaRPr lang="en-US" sz="910" dirty="0"/>
+            <a:endParaRPr lang="en-US" sz="1400" dirty="0"/>
           </a:p>
         </p:txBody>
       </p:sp>
@@ -8974,14 +8974,14 @@
               <a:buNone/>
             </a:pPr>
             <a:r>
-              <a:rPr lang="en-US" sz="880" dirty="0">
+              <a:rPr lang="en-US" sz="1200" dirty="0">
                 <a:solidFill>
                   <a:srgbClr val="0F172A"/>
                 </a:solidFill>
               </a:rPr>
               <a:t>Raw dataset</a:t>
             </a:r>
-            <a:endParaRPr lang="en-US" sz="880" dirty="0"/>
+            <a:endParaRPr lang="en-US" sz="1200" dirty="0"/>
           </a:p>
         </p:txBody>
       </p:sp>
@@ -9018,14 +9018,14 @@
               <a:buNone/>
             </a:pPr>
             <a:r>
-              <a:rPr lang="en-US" sz="880" dirty="0">
+              <a:rPr lang="en-US" sz="1200" dirty="0">
                 <a:solidFill>
                   <a:srgbClr val="0F172A"/>
                 </a:solidFill>
               </a:rPr>
               <a:t>3,516</a:t>
             </a:r>
-            <a:endParaRPr lang="en-US" sz="880" dirty="0"/>
+            <a:endParaRPr lang="en-US" sz="1200" dirty="0"/>
           </a:p>
         </p:txBody>
       </p:sp>
@@ -9062,14 +9062,14 @@
               <a:buNone/>
             </a:pPr>
             <a:r>
-              <a:rPr lang="en-US" sz="880" dirty="0">
+              <a:rPr lang="en-US" sz="1200" dirty="0">
                 <a:solidFill>
                   <a:srgbClr val="0F172A"/>
                 </a:solidFill>
               </a:rPr>
               <a:t>32 original columns</a:t>
             </a:r>
-            <a:endParaRPr lang="en-US" sz="880" dirty="0"/>
+            <a:endParaRPr lang="en-US" sz="1200" dirty="0"/>
           </a:p>
         </p:txBody>
       </p:sp>
@@ -9106,14 +9106,14 @@
               <a:buNone/>
             </a:pPr>
             <a:r>
-              <a:rPr lang="en-US" sz="880" dirty="0">
+              <a:rPr lang="en-US" sz="1200" dirty="0">
                 <a:solidFill>
                   <a:srgbClr val="0F172A"/>
                 </a:solidFill>
               </a:rPr>
               <a:t>Missing target removed</a:t>
             </a:r>
-            <a:endParaRPr lang="en-US" sz="880" dirty="0"/>
+            <a:endParaRPr lang="en-US" sz="1200" dirty="0"/>
           </a:p>
         </p:txBody>
       </p:sp>
@@ -9150,14 +9150,14 @@
               <a:buNone/>
             </a:pPr>
             <a:r>
-              <a:rPr lang="en-US" sz="880" dirty="0">
+              <a:rPr lang="en-US" sz="1200" dirty="0">
                 <a:solidFill>
                   <a:srgbClr val="0F172A"/>
                 </a:solidFill>
               </a:rPr>
               <a:t>37</a:t>
             </a:r>
-            <a:endParaRPr lang="en-US" sz="880" dirty="0"/>
+            <a:endParaRPr lang="en-US" sz="1200" dirty="0"/>
           </a:p>
         </p:txBody>
       </p:sp>
@@ -9194,14 +9194,14 @@
               <a:buNone/>
             </a:pPr>
             <a:r>
-              <a:rPr lang="en-US" sz="880" dirty="0">
+              <a:rPr lang="en-US" sz="1200" dirty="0">
                 <a:solidFill>
                   <a:srgbClr val="0F172A"/>
                 </a:solidFill>
               </a:rPr>
               <a:t>Excluded before modeling</a:t>
             </a:r>
-            <a:endParaRPr lang="en-US" sz="880" dirty="0"/>
+            <a:endParaRPr lang="en-US" sz="1200" dirty="0"/>
           </a:p>
         </p:txBody>
       </p:sp>
@@ -9238,14 +9238,14 @@
               <a:buNone/>
             </a:pPr>
             <a:r>
-              <a:rPr lang="en-US" sz="880" dirty="0">
+              <a:rPr lang="en-US" sz="1200" dirty="0">
                 <a:solidFill>
                   <a:srgbClr val="0F172A"/>
                 </a:solidFill>
               </a:rPr>
               <a:t>Exact duplicates removed</a:t>
             </a:r>
-            <a:endParaRPr lang="en-US" sz="880" dirty="0"/>
+            <a:endParaRPr lang="en-US" sz="1200" dirty="0"/>
           </a:p>
         </p:txBody>
       </p:sp>
@@ -9282,14 +9282,14 @@
               <a:buNone/>
             </a:pPr>
             <a:r>
-              <a:rPr lang="en-US" sz="880" dirty="0">
+              <a:rPr lang="en-US" sz="1200" dirty="0">
                 <a:solidFill>
                   <a:srgbClr val="0F172A"/>
                 </a:solidFill>
               </a:rPr>
               <a:t>4</a:t>
             </a:r>
-            <a:endParaRPr lang="en-US" sz="880" dirty="0"/>
+            <a:endParaRPr lang="en-US" sz="1200" dirty="0"/>
           </a:p>
         </p:txBody>
       </p:sp>
@@ -9326,14 +9326,14 @@
               <a:buNone/>
             </a:pPr>
             <a:r>
-              <a:rPr lang="en-US" sz="880" dirty="0">
+              <a:rPr lang="en-US" sz="1200" dirty="0">
                 <a:solidFill>
                   <a:srgbClr val="0F172A"/>
                 </a:solidFill>
               </a:rPr>
               <a:t>Duplicate rows removed</a:t>
             </a:r>
-            <a:endParaRPr lang="en-US" sz="880" dirty="0"/>
+            <a:endParaRPr lang="en-US" sz="1200" dirty="0"/>
           </a:p>
         </p:txBody>
       </p:sp>
@@ -9370,14 +9370,14 @@
               <a:buNone/>
             </a:pPr>
             <a:r>
-              <a:rPr lang="en-US" sz="880" dirty="0">
+              <a:rPr lang="en-US" sz="1200" dirty="0">
                 <a:solidFill>
                   <a:srgbClr val="0F172A"/>
                 </a:solidFill>
               </a:rPr>
               <a:t>Final binary dataset</a:t>
             </a:r>
-            <a:endParaRPr lang="en-US" sz="880" dirty="0"/>
+            <a:endParaRPr lang="en-US" sz="1200" dirty="0"/>
           </a:p>
         </p:txBody>
       </p:sp>
@@ -9414,14 +9414,14 @@
               <a:buNone/>
             </a:pPr>
             <a:r>
-              <a:rPr lang="en-US" sz="880" dirty="0">
+              <a:rPr lang="en-US" sz="1200" dirty="0">
                 <a:solidFill>
                   <a:srgbClr val="0F172A"/>
                 </a:solidFill>
               </a:rPr>
               <a:t>3,475</a:t>
             </a:r>
-            <a:endParaRPr lang="en-US" sz="880" dirty="0"/>
+            <a:endParaRPr lang="en-US" sz="1200" dirty="0"/>
           </a:p>
         </p:txBody>
       </p:sp>
@@ -9458,14 +9458,14 @@
               <a:buNone/>
             </a:pPr>
             <a:r>
-              <a:rPr lang="en-US" sz="880" dirty="0">
+              <a:rPr lang="en-US" sz="1200" dirty="0">
                 <a:solidFill>
                   <a:srgbClr val="0F172A"/>
                 </a:solidFill>
               </a:rPr>
               <a:t>24 predictors + binary target</a:t>
             </a:r>
-            <a:endParaRPr lang="en-US" sz="880" dirty="0"/>
+            <a:endParaRPr lang="en-US" sz="1200" dirty="0"/>
           </a:p>
         </p:txBody>
       </p:sp>
@@ -9783,14 +9783,14 @@
               <a:buNone/>
             </a:pPr>
             <a:r>
-              <a:rPr lang="en-US" sz="910" b="1" dirty="0">
+              <a:rPr lang="en-US" sz="1200" b="1" dirty="0">
                 <a:solidFill>
                   <a:srgbClr val="FFFFFF"/>
                 </a:solidFill>
               </a:rPr>
               <a:t>Split</a:t>
             </a:r>
-            <a:endParaRPr lang="en-US" sz="910" dirty="0"/>
+            <a:endParaRPr lang="en-US" sz="1200" dirty="0"/>
           </a:p>
         </p:txBody>
       </p:sp>
@@ -9827,14 +9827,14 @@
               <a:buNone/>
             </a:pPr>
             <a:r>
-              <a:rPr lang="en-US" sz="910" b="1" dirty="0">
+              <a:rPr lang="en-US" sz="1200" b="1" dirty="0">
                 <a:solidFill>
                   <a:srgbClr val="FFFFFF"/>
                 </a:solidFill>
               </a:rPr>
               <a:t>Instances</a:t>
             </a:r>
-            <a:endParaRPr lang="en-US" sz="910" dirty="0"/>
+            <a:endParaRPr lang="en-US" sz="1200" dirty="0"/>
           </a:p>
         </p:txBody>
       </p:sp>
@@ -9863,22 +9863,22 @@
         </p:spPr>
         <p:txBody>
           <a:bodyPr wrap="square" rtlCol="0" anchor="ctr">
-            <a:normAutofit/>
-          </a:bodyPr>
-          <a:lstStyle/>
-          <a:p>
-            <a:pPr marL="0" indent="0" algn="ctr">
-              <a:buNone/>
-            </a:pPr>
-            <a:r>
-              <a:rPr lang="en-US" sz="910" b="1" dirty="0">
+            <a:noAutofit/>
+          </a:bodyPr>
+          <a:lstStyle/>
+          <a:p>
+            <a:pPr marL="0" indent="0" algn="ctr">
+              <a:buNone/>
+            </a:pPr>
+            <a:r>
+              <a:rPr lang="en-US" sz="1200" b="1" dirty="0">
                 <a:solidFill>
                   <a:srgbClr val="FFFFFF"/>
                 </a:solidFill>
               </a:rPr>
               <a:t>NotParticipated</a:t>
             </a:r>
-            <a:endParaRPr lang="en-US" sz="910" dirty="0"/>
+            <a:endParaRPr lang="en-US" sz="1200" dirty="0"/>
           </a:p>
         </p:txBody>
       </p:sp>
@@ -9915,14 +9915,14 @@
               <a:buNone/>
             </a:pPr>
             <a:r>
-              <a:rPr lang="en-US" sz="910" b="1" dirty="0">
+              <a:rPr lang="en-US" sz="1200" b="1" dirty="0">
                 <a:solidFill>
                   <a:srgbClr val="FFFFFF"/>
                 </a:solidFill>
               </a:rPr>
               <a:t>Participated</a:t>
             </a:r>
-            <a:endParaRPr lang="en-US" sz="910" dirty="0"/>
+            <a:endParaRPr lang="en-US" sz="1200" dirty="0"/>
           </a:p>
         </p:txBody>
       </p:sp>
@@ -9959,14 +9959,14 @@
               <a:buNone/>
             </a:pPr>
             <a:r>
-              <a:rPr lang="en-US" sz="920" dirty="0">
+              <a:rPr lang="en-US" sz="1200" dirty="0">
                 <a:solidFill>
                   <a:srgbClr val="0F172A"/>
                 </a:solidFill>
               </a:rPr>
               <a:t>Train</a:t>
             </a:r>
-            <a:endParaRPr lang="en-US" sz="920" dirty="0"/>
+            <a:endParaRPr lang="en-US" sz="1200" dirty="0"/>
           </a:p>
         </p:txBody>
       </p:sp>
@@ -10003,14 +10003,14 @@
               <a:buNone/>
             </a:pPr>
             <a:r>
-              <a:rPr lang="en-US" sz="920" dirty="0">
+              <a:rPr lang="en-US" sz="1200" dirty="0">
                 <a:solidFill>
                   <a:srgbClr val="0F172A"/>
                 </a:solidFill>
               </a:rPr>
               <a:t>2,432</a:t>
             </a:r>
-            <a:endParaRPr lang="en-US" sz="920" dirty="0"/>
+            <a:endParaRPr lang="en-US" sz="1200" dirty="0"/>
           </a:p>
         </p:txBody>
       </p:sp>
@@ -10047,14 +10047,14 @@
               <a:buNone/>
             </a:pPr>
             <a:r>
-              <a:rPr lang="en-US" sz="920" dirty="0">
+              <a:rPr lang="en-US" sz="1200" dirty="0">
                 <a:solidFill>
                   <a:srgbClr val="0F172A"/>
                 </a:solidFill>
               </a:rPr>
               <a:t>1,567</a:t>
             </a:r>
-            <a:endParaRPr lang="en-US" sz="920" dirty="0"/>
+            <a:endParaRPr lang="en-US" sz="1200" dirty="0"/>
           </a:p>
         </p:txBody>
       </p:sp>
@@ -10091,14 +10091,14 @@
               <a:buNone/>
             </a:pPr>
             <a:r>
-              <a:rPr lang="en-US" sz="920" dirty="0">
+              <a:rPr lang="en-US" sz="1200" dirty="0">
                 <a:solidFill>
                   <a:srgbClr val="0F172A"/>
                 </a:solidFill>
               </a:rPr>
               <a:t>865</a:t>
             </a:r>
-            <a:endParaRPr lang="en-US" sz="920" dirty="0"/>
+            <a:endParaRPr lang="en-US" sz="1200" dirty="0"/>
           </a:p>
         </p:txBody>
       </p:sp>
@@ -10135,14 +10135,14 @@
               <a:buNone/>
             </a:pPr>
             <a:r>
-              <a:rPr lang="en-US" sz="920" dirty="0">
+              <a:rPr lang="en-US" sz="1200" dirty="0">
                 <a:solidFill>
                   <a:srgbClr val="0F172A"/>
                 </a:solidFill>
               </a:rPr>
               <a:t>Validation</a:t>
             </a:r>
-            <a:endParaRPr lang="en-US" sz="920" dirty="0"/>
+            <a:endParaRPr lang="en-US" sz="1200" dirty="0"/>
           </a:p>
         </p:txBody>
       </p:sp>
@@ -10179,14 +10179,14 @@
               <a:buNone/>
             </a:pPr>
             <a:r>
-              <a:rPr lang="en-US" sz="920" dirty="0">
+              <a:rPr lang="en-US" sz="1200" dirty="0">
                 <a:solidFill>
                   <a:srgbClr val="0F172A"/>
                 </a:solidFill>
               </a:rPr>
               <a:t>521</a:t>
             </a:r>
-            <a:endParaRPr lang="en-US" sz="920" dirty="0"/>
+            <a:endParaRPr lang="en-US" sz="1200" dirty="0"/>
           </a:p>
         </p:txBody>
       </p:sp>
@@ -10223,14 +10223,14 @@
               <a:buNone/>
             </a:pPr>
             <a:r>
-              <a:rPr lang="en-US" sz="920" dirty="0">
+              <a:rPr lang="en-US" sz="1200" dirty="0">
                 <a:solidFill>
                   <a:srgbClr val="0F172A"/>
                 </a:solidFill>
               </a:rPr>
               <a:t>336</a:t>
             </a:r>
-            <a:endParaRPr lang="en-US" sz="920" dirty="0"/>
+            <a:endParaRPr lang="en-US" sz="1200" dirty="0"/>
           </a:p>
         </p:txBody>
       </p:sp>
@@ -10267,14 +10267,14 @@
               <a:buNone/>
             </a:pPr>
             <a:r>
-              <a:rPr lang="en-US" sz="920" dirty="0">
+              <a:rPr lang="en-US" sz="1200" dirty="0">
                 <a:solidFill>
                   <a:srgbClr val="0F172A"/>
                 </a:solidFill>
               </a:rPr>
               <a:t>185</a:t>
             </a:r>
-            <a:endParaRPr lang="en-US" sz="920" dirty="0"/>
+            <a:endParaRPr lang="en-US" sz="1200" dirty="0"/>
           </a:p>
         </p:txBody>
       </p:sp>
@@ -10311,14 +10311,14 @@
               <a:buNone/>
             </a:pPr>
             <a:r>
-              <a:rPr lang="en-US" sz="920" dirty="0">
+              <a:rPr lang="en-US" sz="1200" dirty="0">
                 <a:solidFill>
                   <a:srgbClr val="0F172A"/>
                 </a:solidFill>
               </a:rPr>
               <a:t>Test - locked</a:t>
             </a:r>
-            <a:endParaRPr lang="en-US" sz="920" dirty="0"/>
+            <a:endParaRPr lang="en-US" sz="1200" dirty="0"/>
           </a:p>
         </p:txBody>
       </p:sp>
@@ -10355,14 +10355,14 @@
               <a:buNone/>
             </a:pPr>
             <a:r>
-              <a:rPr lang="en-US" sz="920" dirty="0">
+              <a:rPr lang="en-US" sz="1200" dirty="0">
                 <a:solidFill>
                   <a:srgbClr val="0F172A"/>
                 </a:solidFill>
               </a:rPr>
               <a:t>522</a:t>
             </a:r>
-            <a:endParaRPr lang="en-US" sz="920" dirty="0"/>
+            <a:endParaRPr lang="en-US" sz="1200" dirty="0"/>
           </a:p>
         </p:txBody>
       </p:sp>
@@ -10399,14 +10399,14 @@
               <a:buNone/>
             </a:pPr>
             <a:r>
-              <a:rPr lang="en-US" sz="920" dirty="0">
+              <a:rPr lang="en-US" sz="1200" dirty="0">
                 <a:solidFill>
                   <a:srgbClr val="0F172A"/>
                 </a:solidFill>
               </a:rPr>
               <a:t>336</a:t>
             </a:r>
-            <a:endParaRPr lang="en-US" sz="920" dirty="0"/>
+            <a:endParaRPr lang="en-US" sz="1200" dirty="0"/>
           </a:p>
         </p:txBody>
       </p:sp>
@@ -10443,14 +10443,14 @@
               <a:buNone/>
             </a:pPr>
             <a:r>
-              <a:rPr lang="en-US" sz="920" dirty="0">
+              <a:rPr lang="en-US" sz="1200" dirty="0">
                 <a:solidFill>
                   <a:srgbClr val="0F172A"/>
                 </a:solidFill>
               </a:rPr>
               <a:t>186</a:t>
             </a:r>
-            <a:endParaRPr lang="en-US" sz="920" dirty="0"/>
+            <a:endParaRPr lang="en-US" sz="1200" dirty="0"/>
           </a:p>
         </p:txBody>
       </p:sp>
@@ -10487,14 +10487,14 @@
               <a:buNone/>
             </a:pPr>
             <a:r>
-              <a:rPr lang="en-US" sz="920" dirty="0">
+              <a:rPr lang="en-US" sz="1200" dirty="0">
                 <a:solidFill>
                   <a:srgbClr val="0F172A"/>
                 </a:solidFill>
               </a:rPr>
               <a:t>Total</a:t>
             </a:r>
-            <a:endParaRPr lang="en-US" sz="920" dirty="0"/>
+            <a:endParaRPr lang="en-US" sz="1200" dirty="0"/>
           </a:p>
         </p:txBody>
       </p:sp>
@@ -10531,14 +10531,14 @@
               <a:buNone/>
             </a:pPr>
             <a:r>
-              <a:rPr lang="en-US" sz="920" dirty="0">
+              <a:rPr lang="en-US" sz="1200" dirty="0">
                 <a:solidFill>
                   <a:srgbClr val="0F172A"/>
                 </a:solidFill>
               </a:rPr>
               <a:t>3,475</a:t>
             </a:r>
-            <a:endParaRPr lang="en-US" sz="920" dirty="0"/>
+            <a:endParaRPr lang="en-US" sz="1200" dirty="0"/>
           </a:p>
         </p:txBody>
       </p:sp>
@@ -10575,14 +10575,14 @@
               <a:buNone/>
             </a:pPr>
             <a:r>
-              <a:rPr lang="en-US" sz="920" dirty="0">
+              <a:rPr lang="en-US" sz="1200" dirty="0">
                 <a:solidFill>
                   <a:srgbClr val="0F172A"/>
                 </a:solidFill>
               </a:rPr>
               <a:t>2,239</a:t>
             </a:r>
-            <a:endParaRPr lang="en-US" sz="920" dirty="0"/>
+            <a:endParaRPr lang="en-US" sz="1200" dirty="0"/>
           </a:p>
         </p:txBody>
       </p:sp>
@@ -10619,14 +10619,14 @@
               <a:buNone/>
             </a:pPr>
             <a:r>
-              <a:rPr lang="en-US" sz="920" dirty="0">
+              <a:rPr lang="en-US" sz="1200" dirty="0">
                 <a:solidFill>
                   <a:srgbClr val="0F172A"/>
                 </a:solidFill>
               </a:rPr>
               <a:t>1,236</a:t>
             </a:r>
-            <a:endParaRPr lang="en-US" sz="920" dirty="0"/>
+            <a:endParaRPr lang="en-US" sz="1200" dirty="0"/>
           </a:p>
         </p:txBody>
       </p:sp>
@@ -11894,14 +11894,14 @@
               <a:buNone/>
             </a:pPr>
             <a:r>
-              <a:rPr lang="en-US" sz="910" b="1" dirty="0">
+              <a:rPr lang="en-US" sz="1200" b="1" dirty="0">
                 <a:solidFill>
                   <a:srgbClr val="FFFFFF"/>
                 </a:solidFill>
               </a:rPr>
               <a:t>Model</a:t>
             </a:r>
-            <a:endParaRPr lang="en-US" sz="910" dirty="0"/>
+            <a:endParaRPr lang="en-US" sz="1200" dirty="0"/>
           </a:p>
         </p:txBody>
       </p:sp>
@@ -11930,22 +11930,22 @@
         </p:spPr>
         <p:txBody>
           <a:bodyPr wrap="square" rtlCol="0" anchor="ctr">
-            <a:normAutofit/>
-          </a:bodyPr>
-          <a:lstStyle/>
-          <a:p>
-            <a:pPr marL="0" indent="0" algn="ctr">
-              <a:buNone/>
-            </a:pPr>
-            <a:r>
-              <a:rPr lang="en-US" sz="910" b="1" dirty="0">
+            <a:noAutofit/>
+          </a:bodyPr>
+          <a:lstStyle/>
+          <a:p>
+            <a:pPr marL="0" indent="0" algn="ctr">
+              <a:buNone/>
+            </a:pPr>
+            <a:r>
+              <a:rPr lang="en-US" sz="1100" b="1" dirty="0">
                 <a:solidFill>
                   <a:srgbClr val="FFFFFF"/>
                 </a:solidFill>
               </a:rPr>
               <a:t>Accuracy</a:t>
             </a:r>
-            <a:endParaRPr lang="en-US" sz="910" dirty="0"/>
+            <a:endParaRPr lang="en-US" sz="1200" dirty="0"/>
           </a:p>
         </p:txBody>
       </p:sp>
@@ -11982,14 +11982,14 @@
               <a:buNone/>
             </a:pPr>
             <a:r>
-              <a:rPr lang="en-US" sz="910" b="1" dirty="0">
+              <a:rPr lang="en-US" sz="1200" b="1" dirty="0">
                 <a:solidFill>
                   <a:srgbClr val="FFFFFF"/>
                 </a:solidFill>
               </a:rPr>
               <a:t>P</a:t>
             </a:r>
-            <a:endParaRPr lang="en-US" sz="910" dirty="0"/>
+            <a:endParaRPr lang="en-US" sz="1200" dirty="0"/>
           </a:p>
         </p:txBody>
       </p:sp>
@@ -12026,14 +12026,14 @@
               <a:buNone/>
             </a:pPr>
             <a:r>
-              <a:rPr lang="en-US" sz="910" b="1" dirty="0">
+              <a:rPr lang="en-US" sz="1200" b="1" dirty="0">
                 <a:solidFill>
                   <a:srgbClr val="FFFFFF"/>
                 </a:solidFill>
               </a:rPr>
               <a:t>R</a:t>
             </a:r>
-            <a:endParaRPr lang="en-US" sz="910" dirty="0"/>
+            <a:endParaRPr lang="en-US" sz="1200" dirty="0"/>
           </a:p>
         </p:txBody>
       </p:sp>
@@ -12070,14 +12070,14 @@
               <a:buNone/>
             </a:pPr>
             <a:r>
-              <a:rPr lang="en-US" sz="910" b="1" dirty="0">
+              <a:rPr lang="en-US" sz="1200" b="1" dirty="0">
                 <a:solidFill>
                   <a:srgbClr val="FFFFFF"/>
                 </a:solidFill>
               </a:rPr>
               <a:t>F1</a:t>
             </a:r>
-            <a:endParaRPr lang="en-US" sz="910" dirty="0"/>
+            <a:endParaRPr lang="en-US" sz="1200" dirty="0"/>
           </a:p>
         </p:txBody>
       </p:sp>
@@ -12114,14 +12114,14 @@
               <a:buNone/>
             </a:pPr>
             <a:r>
-              <a:rPr lang="en-US" sz="910" b="1" dirty="0">
+              <a:rPr lang="en-US" sz="1200" b="1" dirty="0">
                 <a:solidFill>
                   <a:srgbClr val="FFFFFF"/>
                 </a:solidFill>
               </a:rPr>
               <a:t>ROC</a:t>
             </a:r>
-            <a:endParaRPr lang="en-US" sz="910" dirty="0"/>
+            <a:endParaRPr lang="en-US" sz="1200" dirty="0"/>
           </a:p>
         </p:txBody>
       </p:sp>
@@ -12158,14 +12158,14 @@
               <a:buNone/>
             </a:pPr>
             <a:r>
-              <a:rPr lang="en-US" sz="910" b="1" dirty="0">
+              <a:rPr lang="en-US" sz="1200" b="1" dirty="0">
                 <a:solidFill>
                   <a:srgbClr val="FFFFFF"/>
                 </a:solidFill>
               </a:rPr>
               <a:t>PRC</a:t>
             </a:r>
-            <a:endParaRPr lang="en-US" sz="910" dirty="0"/>
+            <a:endParaRPr lang="en-US" sz="1200" dirty="0"/>
           </a:p>
         </p:txBody>
       </p:sp>
@@ -12202,14 +12202,14 @@
               <a:buNone/>
             </a:pPr>
             <a:r>
-              <a:rPr lang="en-US" sz="810" dirty="0">
+              <a:rPr lang="en-US" sz="1100" dirty="0">
                 <a:solidFill>
                   <a:srgbClr val="0F172A"/>
                 </a:solidFill>
               </a:rPr>
               <a:t>RandomForest</a:t>
             </a:r>
-            <a:endParaRPr lang="en-US" sz="810" dirty="0"/>
+            <a:endParaRPr lang="en-US" sz="1100" dirty="0"/>
           </a:p>
         </p:txBody>
       </p:sp>
@@ -12246,14 +12246,14 @@
               <a:buNone/>
             </a:pPr>
             <a:r>
-              <a:rPr lang="en-US" sz="810" dirty="0">
+              <a:rPr lang="en-US" sz="1100" dirty="0">
                 <a:solidFill>
                   <a:srgbClr val="0F172A"/>
                 </a:solidFill>
               </a:rPr>
               <a:t>79.11%</a:t>
             </a:r>
-            <a:endParaRPr lang="en-US" sz="810" dirty="0"/>
+            <a:endParaRPr lang="en-US" sz="1100" dirty="0"/>
           </a:p>
         </p:txBody>
       </p:sp>
@@ -12290,14 +12290,14 @@
               <a:buNone/>
             </a:pPr>
             <a:r>
-              <a:rPr lang="en-US" sz="810" dirty="0">
+              <a:rPr lang="en-US" sz="1100" dirty="0">
                 <a:solidFill>
                   <a:srgbClr val="0F172A"/>
                 </a:solidFill>
               </a:rPr>
               <a:t>.805</a:t>
             </a:r>
-            <a:endParaRPr lang="en-US" sz="810" dirty="0"/>
+            <a:endParaRPr lang="en-US" sz="1100" dirty="0"/>
           </a:p>
         </p:txBody>
       </p:sp>
@@ -12334,14 +12334,14 @@
               <a:buNone/>
             </a:pPr>
             <a:r>
-              <a:rPr lang="en-US" sz="810" dirty="0">
+              <a:rPr lang="en-US" sz="1100" dirty="0">
                 <a:solidFill>
                   <a:srgbClr val="0F172A"/>
                 </a:solidFill>
               </a:rPr>
               <a:t>.545</a:t>
             </a:r>
-            <a:endParaRPr lang="en-US" sz="810" dirty="0"/>
+            <a:endParaRPr lang="en-US" sz="1100" dirty="0"/>
           </a:p>
         </p:txBody>
       </p:sp>
@@ -12378,14 +12378,14 @@
               <a:buNone/>
             </a:pPr>
             <a:r>
-              <a:rPr lang="en-US" sz="810" dirty="0">
+              <a:rPr lang="en-US" sz="1100" dirty="0">
                 <a:solidFill>
                   <a:srgbClr val="0F172A"/>
                 </a:solidFill>
               </a:rPr>
               <a:t>.650</a:t>
             </a:r>
-            <a:endParaRPr lang="en-US" sz="810" dirty="0"/>
+            <a:endParaRPr lang="en-US" sz="1100" dirty="0"/>
           </a:p>
         </p:txBody>
       </p:sp>
@@ -12422,14 +12422,14 @@
               <a:buNone/>
             </a:pPr>
             <a:r>
-              <a:rPr lang="en-US" sz="810" dirty="0">
+              <a:rPr lang="en-US" sz="1100" dirty="0">
                 <a:solidFill>
                   <a:srgbClr val="0F172A"/>
                 </a:solidFill>
               </a:rPr>
               <a:t>.849</a:t>
             </a:r>
-            <a:endParaRPr lang="en-US" sz="810" dirty="0"/>
+            <a:endParaRPr lang="en-US" sz="1100" dirty="0"/>
           </a:p>
         </p:txBody>
       </p:sp>
@@ -12466,14 +12466,14 @@
               <a:buNone/>
             </a:pPr>
             <a:r>
-              <a:rPr lang="en-US" sz="810" dirty="0">
+              <a:rPr lang="en-US" sz="1100" dirty="0">
                 <a:solidFill>
                   <a:srgbClr val="0F172A"/>
                 </a:solidFill>
               </a:rPr>
               <a:t>.803</a:t>
             </a:r>
-            <a:endParaRPr lang="en-US" sz="810" dirty="0"/>
+            <a:endParaRPr lang="en-US" sz="1100" dirty="0"/>
           </a:p>
         </p:txBody>
       </p:sp>
@@ -12510,14 +12510,14 @@
               <a:buNone/>
             </a:pPr>
             <a:r>
-              <a:rPr lang="en-US" sz="810" dirty="0">
+              <a:rPr lang="en-US" sz="1100" dirty="0">
                 <a:solidFill>
                   <a:srgbClr val="0F172A"/>
                 </a:solidFill>
               </a:rPr>
               <a:t>LMT</a:t>
             </a:r>
-            <a:endParaRPr lang="en-US" sz="810" dirty="0"/>
+            <a:endParaRPr lang="en-US" sz="1100" dirty="0"/>
           </a:p>
         </p:txBody>
       </p:sp>
@@ -12554,14 +12554,14 @@
               <a:buNone/>
             </a:pPr>
             <a:r>
-              <a:rPr lang="en-US" sz="810" dirty="0">
+              <a:rPr lang="en-US" sz="1100" dirty="0">
                 <a:solidFill>
                   <a:srgbClr val="0F172A"/>
                 </a:solidFill>
               </a:rPr>
               <a:t>74.26%</a:t>
             </a:r>
-            <a:endParaRPr lang="en-US" sz="810" dirty="0"/>
+            <a:endParaRPr lang="en-US" sz="1100" dirty="0"/>
           </a:p>
         </p:txBody>
       </p:sp>
@@ -12598,14 +12598,14 @@
               <a:buNone/>
             </a:pPr>
             <a:r>
-              <a:rPr lang="en-US" sz="810" dirty="0">
+              <a:rPr lang="en-US" sz="1100" dirty="0">
                 <a:solidFill>
                   <a:srgbClr val="0F172A"/>
                 </a:solidFill>
               </a:rPr>
               <a:t>.644</a:t>
             </a:r>
-            <a:endParaRPr lang="en-US" sz="810" dirty="0"/>
+            <a:endParaRPr lang="en-US" sz="1100" dirty="0"/>
           </a:p>
         </p:txBody>
       </p:sp>
@@ -12642,14 +12642,14 @@
               <a:buNone/>
             </a:pPr>
             <a:r>
-              <a:rPr lang="en-US" sz="810" dirty="0">
+              <a:rPr lang="en-US" sz="1100" dirty="0">
                 <a:solidFill>
                   <a:srgbClr val="0F172A"/>
                 </a:solidFill>
               </a:rPr>
               <a:t>.616</a:t>
             </a:r>
-            <a:endParaRPr lang="en-US" sz="810" dirty="0"/>
+            <a:endParaRPr lang="en-US" sz="1100" dirty="0"/>
           </a:p>
         </p:txBody>
       </p:sp>
@@ -12686,14 +12686,14 @@
               <a:buNone/>
             </a:pPr>
             <a:r>
-              <a:rPr lang="en-US" sz="810" dirty="0">
+              <a:rPr lang="en-US" sz="1100" dirty="0">
                 <a:solidFill>
                   <a:srgbClr val="0F172A"/>
                 </a:solidFill>
               </a:rPr>
               <a:t>.630</a:t>
             </a:r>
-            <a:endParaRPr lang="en-US" sz="810" dirty="0"/>
+            <a:endParaRPr lang="en-US" sz="1100" dirty="0"/>
           </a:p>
         </p:txBody>
       </p:sp>
@@ -12730,14 +12730,14 @@
               <a:buNone/>
             </a:pPr>
             <a:r>
-              <a:rPr lang="en-US" sz="810" dirty="0">
+              <a:rPr lang="en-US" sz="1100" dirty="0">
                 <a:solidFill>
                   <a:srgbClr val="0F172A"/>
                 </a:solidFill>
               </a:rPr>
               <a:t>.743</a:t>
             </a:r>
-            <a:endParaRPr lang="en-US" sz="810" dirty="0"/>
+            <a:endParaRPr lang="en-US" sz="1100" dirty="0"/>
           </a:p>
         </p:txBody>
       </p:sp>
@@ -12774,14 +12774,14 @@
               <a:buNone/>
             </a:pPr>
             <a:r>
-              <a:rPr lang="en-US" sz="810" dirty="0">
+              <a:rPr lang="en-US" sz="1100" dirty="0">
                 <a:solidFill>
                   <a:srgbClr val="0F172A"/>
                 </a:solidFill>
               </a:rPr>
               <a:t>.610</a:t>
             </a:r>
-            <a:endParaRPr lang="en-US" sz="810" dirty="0"/>
+            <a:endParaRPr lang="en-US" sz="1100" dirty="0"/>
           </a:p>
         </p:txBody>
       </p:sp>
@@ -12818,14 +12818,14 @@
               <a:buNone/>
             </a:pPr>
             <a:r>
-              <a:rPr lang="en-US" sz="810" dirty="0">
+              <a:rPr lang="en-US" sz="1100" dirty="0">
                 <a:solidFill>
                   <a:srgbClr val="0F172A"/>
                 </a:solidFill>
               </a:rPr>
               <a:t>RandomCommittee</a:t>
             </a:r>
-            <a:endParaRPr lang="en-US" sz="810" dirty="0"/>
+            <a:endParaRPr lang="en-US" sz="1100" dirty="0"/>
           </a:p>
         </p:txBody>
       </p:sp>
@@ -12862,14 +12862,14 @@
               <a:buNone/>
             </a:pPr>
             <a:r>
-              <a:rPr lang="en-US" sz="810" dirty="0">
+              <a:rPr lang="en-US" sz="1100" dirty="0">
                 <a:solidFill>
                   <a:srgbClr val="0F172A"/>
                 </a:solidFill>
               </a:rPr>
               <a:t>76.27%</a:t>
             </a:r>
-            <a:endParaRPr lang="en-US" sz="810" dirty="0"/>
+            <a:endParaRPr lang="en-US" sz="1100" dirty="0"/>
           </a:p>
         </p:txBody>
       </p:sp>
@@ -12906,14 +12906,14 @@
               <a:buNone/>
             </a:pPr>
             <a:r>
-              <a:rPr lang="en-US" sz="810" dirty="0">
+              <a:rPr lang="en-US" sz="1100" dirty="0">
                 <a:solidFill>
                   <a:srgbClr val="0F172A"/>
                 </a:solidFill>
               </a:rPr>
               <a:t>.716</a:t>
             </a:r>
-            <a:endParaRPr lang="en-US" sz="810" dirty="0"/>
+            <a:endParaRPr lang="en-US" sz="1100" dirty="0"/>
           </a:p>
         </p:txBody>
       </p:sp>
@@ -12950,14 +12950,14 @@
               <a:buNone/>
             </a:pPr>
             <a:r>
-              <a:rPr lang="en-US" sz="810" dirty="0">
+              <a:rPr lang="en-US" sz="1100" dirty="0">
                 <a:solidFill>
                   <a:srgbClr val="0F172A"/>
                 </a:solidFill>
               </a:rPr>
               <a:t>.553</a:t>
             </a:r>
-            <a:endParaRPr lang="en-US" sz="810" dirty="0"/>
+            <a:endParaRPr lang="en-US" sz="1100" dirty="0"/>
           </a:p>
         </p:txBody>
       </p:sp>
@@ -12994,14 +12994,14 @@
               <a:buNone/>
             </a:pPr>
             <a:r>
-              <a:rPr lang="en-US" sz="810" dirty="0">
+              <a:rPr lang="en-US" sz="1100" dirty="0">
                 <a:solidFill>
                   <a:srgbClr val="0F172A"/>
                 </a:solidFill>
               </a:rPr>
               <a:t>.624</a:t>
             </a:r>
-            <a:endParaRPr lang="en-US" sz="810" dirty="0"/>
+            <a:endParaRPr lang="en-US" sz="1100" dirty="0"/>
           </a:p>
         </p:txBody>
       </p:sp>
@@ -13038,14 +13038,14 @@
               <a:buNone/>
             </a:pPr>
             <a:r>
-              <a:rPr lang="en-US" sz="810" dirty="0">
+              <a:rPr lang="en-US" sz="1100" dirty="0">
                 <a:solidFill>
                   <a:srgbClr val="0F172A"/>
                 </a:solidFill>
               </a:rPr>
               <a:t>.826</a:t>
             </a:r>
-            <a:endParaRPr lang="en-US" sz="810" dirty="0"/>
+            <a:endParaRPr lang="en-US" sz="1100" dirty="0"/>
           </a:p>
         </p:txBody>
       </p:sp>
@@ -13082,14 +13082,14 @@
               <a:buNone/>
             </a:pPr>
             <a:r>
-              <a:rPr lang="en-US" sz="810" dirty="0">
+              <a:rPr lang="en-US" sz="1100" dirty="0">
                 <a:solidFill>
                   <a:srgbClr val="0F172A"/>
                 </a:solidFill>
               </a:rPr>
               <a:t>.771</a:t>
             </a:r>
-            <a:endParaRPr lang="en-US" sz="810" dirty="0"/>
+            <a:endParaRPr lang="en-US" sz="1100" dirty="0"/>
           </a:p>
         </p:txBody>
       </p:sp>
@@ -13126,14 +13126,14 @@
               <a:buNone/>
             </a:pPr>
             <a:r>
-              <a:rPr lang="en-US" sz="810" dirty="0">
+              <a:rPr lang="en-US" sz="1100" dirty="0">
                 <a:solidFill>
                   <a:srgbClr val="0F172A"/>
                 </a:solidFill>
               </a:rPr>
               <a:t>MLP</a:t>
             </a:r>
-            <a:endParaRPr lang="en-US" sz="810" dirty="0"/>
+            <a:endParaRPr lang="en-US" sz="1100" dirty="0"/>
           </a:p>
         </p:txBody>
       </p:sp>
@@ -13170,14 +13170,14 @@
               <a:buNone/>
             </a:pPr>
             <a:r>
-              <a:rPr lang="en-US" sz="810" dirty="0">
+              <a:rPr lang="en-US" sz="1100" dirty="0">
                 <a:solidFill>
                   <a:srgbClr val="0F172A"/>
                 </a:solidFill>
               </a:rPr>
               <a:t>74.05%</a:t>
             </a:r>
-            <a:endParaRPr lang="en-US" sz="810" dirty="0"/>
+            <a:endParaRPr lang="en-US" sz="1100" dirty="0"/>
           </a:p>
         </p:txBody>
       </p:sp>
@@ -13214,14 +13214,14 @@
               <a:buNone/>
             </a:pPr>
             <a:r>
-              <a:rPr lang="en-US" sz="810" dirty="0">
+              <a:rPr lang="en-US" sz="1100" dirty="0">
                 <a:solidFill>
                   <a:srgbClr val="0F172A"/>
                 </a:solidFill>
               </a:rPr>
               <a:t>.646</a:t>
             </a:r>
-            <a:endParaRPr lang="en-US" sz="810" dirty="0"/>
+            <a:endParaRPr lang="en-US" sz="1100" dirty="0"/>
           </a:p>
         </p:txBody>
       </p:sp>
@@ -13258,14 +13258,14 @@
               <a:buNone/>
             </a:pPr>
             <a:r>
-              <a:rPr lang="en-US" sz="810" dirty="0">
+              <a:rPr lang="en-US" sz="1100" dirty="0">
                 <a:solidFill>
                   <a:srgbClr val="0F172A"/>
                 </a:solidFill>
               </a:rPr>
               <a:t>.600</a:t>
             </a:r>
-            <a:endParaRPr lang="en-US" sz="810" dirty="0"/>
+            <a:endParaRPr lang="en-US" sz="1100" dirty="0"/>
           </a:p>
         </p:txBody>
       </p:sp>
@@ -13302,14 +13302,14 @@
               <a:buNone/>
             </a:pPr>
             <a:r>
-              <a:rPr lang="en-US" sz="810" dirty="0">
+              <a:rPr lang="en-US" sz="1100" dirty="0">
                 <a:solidFill>
                   <a:srgbClr val="0F172A"/>
                 </a:solidFill>
               </a:rPr>
               <a:t>.622</a:t>
             </a:r>
-            <a:endParaRPr lang="en-US" sz="810" dirty="0"/>
+            <a:endParaRPr lang="en-US" sz="1100" dirty="0"/>
           </a:p>
         </p:txBody>
       </p:sp>
@@ -13346,14 +13346,14 @@
               <a:buNone/>
             </a:pPr>
             <a:r>
-              <a:rPr lang="en-US" sz="810" dirty="0">
+              <a:rPr lang="en-US" sz="1100" dirty="0">
                 <a:solidFill>
                   <a:srgbClr val="0F172A"/>
                 </a:solidFill>
               </a:rPr>
               <a:t>.748</a:t>
             </a:r>
-            <a:endParaRPr lang="en-US" sz="810" dirty="0"/>
+            <a:endParaRPr lang="en-US" sz="1100" dirty="0"/>
           </a:p>
         </p:txBody>
       </p:sp>
@@ -13390,14 +13390,14 @@
               <a:buNone/>
             </a:pPr>
             <a:r>
-              <a:rPr lang="en-US" sz="810" dirty="0">
+              <a:rPr lang="en-US" sz="1100" dirty="0">
                 <a:solidFill>
                   <a:srgbClr val="0F172A"/>
                 </a:solidFill>
               </a:rPr>
               <a:t>.637</a:t>
             </a:r>
-            <a:endParaRPr lang="en-US" sz="810" dirty="0"/>
+            <a:endParaRPr lang="en-US" sz="1100" dirty="0"/>
           </a:p>
         </p:txBody>
       </p:sp>
@@ -13434,14 +13434,14 @@
               <a:buNone/>
             </a:pPr>
             <a:r>
-              <a:rPr lang="en-US" sz="810" dirty="0">
+              <a:rPr lang="en-US" sz="1100" dirty="0">
                 <a:solidFill>
                   <a:srgbClr val="0F172A"/>
                 </a:solidFill>
               </a:rPr>
               <a:t>RandomTree</a:t>
             </a:r>
-            <a:endParaRPr lang="en-US" sz="810" dirty="0"/>
+            <a:endParaRPr lang="en-US" sz="1100" dirty="0"/>
           </a:p>
         </p:txBody>
       </p:sp>
@@ -13478,14 +13478,14 @@
               <a:buNone/>
             </a:pPr>
             <a:r>
-              <a:rPr lang="en-US" sz="810" dirty="0">
+              <a:rPr lang="en-US" sz="1100" dirty="0">
                 <a:solidFill>
                   <a:srgbClr val="0F172A"/>
                 </a:solidFill>
               </a:rPr>
               <a:t>73.40%</a:t>
             </a:r>
-            <a:endParaRPr lang="en-US" sz="810" dirty="0"/>
+            <a:endParaRPr lang="en-US" sz="1100" dirty="0"/>
           </a:p>
         </p:txBody>
       </p:sp>
@@ -13522,14 +13522,14 @@
               <a:buNone/>
             </a:pPr>
             <a:r>
-              <a:rPr lang="en-US" sz="810" dirty="0">
+              <a:rPr lang="en-US" sz="1100" dirty="0">
                 <a:solidFill>
                   <a:srgbClr val="0F172A"/>
                 </a:solidFill>
               </a:rPr>
               <a:t>.634</a:t>
             </a:r>
-            <a:endParaRPr lang="en-US" sz="810" dirty="0"/>
+            <a:endParaRPr lang="en-US" sz="1100" dirty="0"/>
           </a:p>
         </p:txBody>
       </p:sp>
@@ -13566,14 +13566,14 @@
               <a:buNone/>
             </a:pPr>
             <a:r>
-              <a:rPr lang="en-US" sz="810" dirty="0">
+              <a:rPr lang="en-US" sz="1100" dirty="0">
                 <a:solidFill>
                   <a:srgbClr val="0F172A"/>
                 </a:solidFill>
               </a:rPr>
               <a:t>.597</a:t>
             </a:r>
-            <a:endParaRPr lang="en-US" sz="810" dirty="0"/>
+            <a:endParaRPr lang="en-US" sz="1100" dirty="0"/>
           </a:p>
         </p:txBody>
       </p:sp>
@@ -13610,14 +13610,14 @@
               <a:buNone/>
             </a:pPr>
             <a:r>
-              <a:rPr lang="en-US" sz="810" dirty="0">
+              <a:rPr lang="en-US" sz="1100" dirty="0">
                 <a:solidFill>
                   <a:srgbClr val="0F172A"/>
                 </a:solidFill>
               </a:rPr>
               <a:t>.615</a:t>
             </a:r>
-            <a:endParaRPr lang="en-US" sz="810" dirty="0"/>
+            <a:endParaRPr lang="en-US" sz="1100" dirty="0"/>
           </a:p>
         </p:txBody>
       </p:sp>
@@ -13654,14 +13654,14 @@
               <a:buNone/>
             </a:pPr>
             <a:r>
-              <a:rPr lang="en-US" sz="810" dirty="0">
+              <a:rPr lang="en-US" sz="1100" dirty="0">
                 <a:solidFill>
                   <a:srgbClr val="0F172A"/>
                 </a:solidFill>
               </a:rPr>
               <a:t>.726</a:t>
             </a:r>
-            <a:endParaRPr lang="en-US" sz="810" dirty="0"/>
+            <a:endParaRPr lang="en-US" sz="1100" dirty="0"/>
           </a:p>
         </p:txBody>
       </p:sp>
@@ -13698,14 +13698,14 @@
               <a:buNone/>
             </a:pPr>
             <a:r>
-              <a:rPr lang="en-US" sz="810" dirty="0">
+              <a:rPr lang="en-US" sz="1100" dirty="0">
                 <a:solidFill>
                   <a:srgbClr val="0F172A"/>
                 </a:solidFill>
               </a:rPr>
               <a:t>.556</a:t>
             </a:r>
-            <a:endParaRPr lang="en-US" sz="810" dirty="0"/>
+            <a:endParaRPr lang="en-US" sz="1100" dirty="0"/>
           </a:p>
         </p:txBody>
       </p:sp>
@@ -14029,14 +14029,14 @@
               <a:buNone/>
             </a:pPr>
             <a:r>
-              <a:rPr lang="en-US" sz="910" b="1" dirty="0">
+              <a:rPr lang="en-US" sz="1400" b="1" dirty="0">
                 <a:solidFill>
                   <a:srgbClr val="FFFFFF"/>
                 </a:solidFill>
               </a:rPr>
               <a:t>Stage</a:t>
             </a:r>
-            <a:endParaRPr lang="en-US" sz="910" dirty="0"/>
+            <a:endParaRPr lang="en-US" sz="1400" dirty="0"/>
           </a:p>
         </p:txBody>
       </p:sp>
@@ -14065,22 +14065,22 @@
         </p:spPr>
         <p:txBody>
           <a:bodyPr wrap="square" rtlCol="0" anchor="ctr">
-            <a:normAutofit/>
-          </a:bodyPr>
-          <a:lstStyle/>
-          <a:p>
-            <a:pPr marL="0" indent="0" algn="ctr">
-              <a:buNone/>
-            </a:pPr>
-            <a:r>
-              <a:rPr lang="en-US" sz="910" b="1" dirty="0">
+            <a:noAutofit/>
+          </a:bodyPr>
+          <a:lstStyle/>
+          <a:p>
+            <a:pPr marL="0" indent="0" algn="ctr">
+              <a:buNone/>
+            </a:pPr>
+            <a:r>
+              <a:rPr lang="en-US" sz="1400" b="1" dirty="0">
                 <a:solidFill>
                   <a:srgbClr val="FFFFFF"/>
                 </a:solidFill>
               </a:rPr>
               <a:t>Accuracy</a:t>
             </a:r>
-            <a:endParaRPr lang="en-US" sz="910" dirty="0"/>
+            <a:endParaRPr lang="en-US" sz="1400" dirty="0"/>
           </a:p>
         </p:txBody>
       </p:sp>
@@ -14109,22 +14109,22 @@
         </p:spPr>
         <p:txBody>
           <a:bodyPr wrap="square" rtlCol="0" anchor="ctr">
-            <a:normAutofit/>
-          </a:bodyPr>
-          <a:lstStyle/>
-          <a:p>
-            <a:pPr marL="0" indent="0" algn="ctr">
-              <a:buNone/>
-            </a:pPr>
-            <a:r>
-              <a:rPr lang="en-US" sz="910" b="1" dirty="0">
+            <a:noAutofit/>
+          </a:bodyPr>
+          <a:lstStyle/>
+          <a:p>
+            <a:pPr marL="0" indent="0" algn="ctr">
+              <a:buNone/>
+            </a:pPr>
+            <a:r>
+              <a:rPr lang="en-US" sz="1400" b="1" dirty="0">
                 <a:solidFill>
                   <a:srgbClr val="FFFFFF"/>
                 </a:solidFill>
               </a:rPr>
               <a:t>Precision</a:t>
             </a:r>
-            <a:endParaRPr lang="en-US" sz="910" dirty="0"/>
+            <a:endParaRPr lang="en-US" sz="1400" dirty="0"/>
           </a:p>
         </p:txBody>
       </p:sp>
@@ -14161,14 +14161,14 @@
               <a:buNone/>
             </a:pPr>
             <a:r>
-              <a:rPr lang="en-US" sz="910" b="1" dirty="0">
+              <a:rPr lang="en-US" sz="1400" b="1" dirty="0">
                 <a:solidFill>
                   <a:srgbClr val="FFFFFF"/>
                 </a:solidFill>
               </a:rPr>
               <a:t>Recall</a:t>
             </a:r>
-            <a:endParaRPr lang="en-US" sz="910" dirty="0"/>
+            <a:endParaRPr lang="en-US" sz="1400" dirty="0"/>
           </a:p>
         </p:txBody>
       </p:sp>
@@ -14205,14 +14205,14 @@
               <a:buNone/>
             </a:pPr>
             <a:r>
-              <a:rPr lang="en-US" sz="910" b="1" dirty="0">
+              <a:rPr lang="en-US" sz="1400" b="1" dirty="0">
                 <a:solidFill>
                   <a:srgbClr val="FFFFFF"/>
                 </a:solidFill>
               </a:rPr>
               <a:t>F1</a:t>
             </a:r>
-            <a:endParaRPr lang="en-US" sz="910" dirty="0"/>
+            <a:endParaRPr lang="en-US" sz="1400" dirty="0"/>
           </a:p>
         </p:txBody>
       </p:sp>
@@ -14249,14 +14249,14 @@
               <a:buNone/>
             </a:pPr>
             <a:r>
-              <a:rPr lang="en-US" sz="910" b="1" dirty="0">
+              <a:rPr lang="en-US" sz="1400" b="1" dirty="0">
                 <a:solidFill>
                   <a:srgbClr val="FFFFFF"/>
                 </a:solidFill>
               </a:rPr>
               <a:t>ROC</a:t>
             </a:r>
-            <a:endParaRPr lang="en-US" sz="910" dirty="0"/>
+            <a:endParaRPr lang="en-US" sz="1400" dirty="0"/>
           </a:p>
         </p:txBody>
       </p:sp>
@@ -14293,14 +14293,14 @@
               <a:buNone/>
             </a:pPr>
             <a:r>
-              <a:rPr lang="en-US" sz="910" b="1" dirty="0">
+              <a:rPr lang="en-US" sz="1400" b="1" dirty="0">
                 <a:solidFill>
                   <a:srgbClr val="FFFFFF"/>
                 </a:solidFill>
               </a:rPr>
               <a:t>PRC</a:t>
             </a:r>
-            <a:endParaRPr lang="en-US" sz="910" dirty="0"/>
+            <a:endParaRPr lang="en-US" sz="1400" dirty="0"/>
           </a:p>
         </p:txBody>
       </p:sp>
@@ -14337,14 +14337,14 @@
               <a:buNone/>
             </a:pPr>
             <a:r>
-              <a:rPr lang="en-US" sz="850" dirty="0">
+              <a:rPr lang="en-US" sz="1200" dirty="0">
                 <a:solidFill>
                   <a:srgbClr val="0F172A"/>
                 </a:solidFill>
               </a:rPr>
               <a:t>RF default validation</a:t>
             </a:r>
-            <a:endParaRPr lang="en-US" sz="850" dirty="0"/>
+            <a:endParaRPr lang="en-US" sz="1200" dirty="0"/>
           </a:p>
         </p:txBody>
       </p:sp>
@@ -14381,14 +14381,14 @@
               <a:buNone/>
             </a:pPr>
             <a:r>
-              <a:rPr lang="en-US" sz="850" dirty="0">
+              <a:rPr lang="en-US" sz="1200" dirty="0">
                 <a:solidFill>
                   <a:srgbClr val="0F172A"/>
                 </a:solidFill>
               </a:rPr>
               <a:t>81.19%</a:t>
             </a:r>
-            <a:endParaRPr lang="en-US" sz="850" dirty="0"/>
+            <a:endParaRPr lang="en-US" sz="1200" dirty="0"/>
           </a:p>
         </p:txBody>
       </p:sp>
@@ -14425,14 +14425,14 @@
               <a:buNone/>
             </a:pPr>
             <a:r>
-              <a:rPr lang="en-US" sz="850" dirty="0">
+              <a:rPr lang="en-US" sz="1200" dirty="0">
                 <a:solidFill>
                   <a:srgbClr val="0F172A"/>
                 </a:solidFill>
               </a:rPr>
               <a:t>.854</a:t>
             </a:r>
-            <a:endParaRPr lang="en-US" sz="850" dirty="0"/>
+            <a:endParaRPr lang="en-US" sz="1200" dirty="0"/>
           </a:p>
         </p:txBody>
       </p:sp>
@@ -14469,14 +14469,14 @@
               <a:buNone/>
             </a:pPr>
             <a:r>
-              <a:rPr lang="en-US" sz="850" dirty="0">
+              <a:rPr lang="en-US" sz="1200" dirty="0">
                 <a:solidFill>
                   <a:srgbClr val="0F172A"/>
                 </a:solidFill>
               </a:rPr>
               <a:t>.568</a:t>
             </a:r>
-            <a:endParaRPr lang="en-US" sz="850" dirty="0"/>
+            <a:endParaRPr lang="en-US" sz="1200" dirty="0"/>
           </a:p>
         </p:txBody>
       </p:sp>
@@ -14513,14 +14513,14 @@
               <a:buNone/>
             </a:pPr>
             <a:r>
-              <a:rPr lang="en-US" sz="850" dirty="0">
+              <a:rPr lang="en-US" sz="1200" dirty="0">
                 <a:solidFill>
                   <a:srgbClr val="0F172A"/>
                 </a:solidFill>
               </a:rPr>
               <a:t>.682</a:t>
             </a:r>
-            <a:endParaRPr lang="en-US" sz="850" dirty="0"/>
+            <a:endParaRPr lang="en-US" sz="1200" dirty="0"/>
           </a:p>
         </p:txBody>
       </p:sp>
@@ -14557,14 +14557,14 @@
               <a:buNone/>
             </a:pPr>
             <a:r>
-              <a:rPr lang="en-US" sz="850" dirty="0">
+              <a:rPr lang="en-US" sz="1200" dirty="0">
                 <a:solidFill>
                   <a:srgbClr val="0F172A"/>
                 </a:solidFill>
               </a:rPr>
               <a:t>.878</a:t>
             </a:r>
-            <a:endParaRPr lang="en-US" sz="850" dirty="0"/>
+            <a:endParaRPr lang="en-US" sz="1200" dirty="0"/>
           </a:p>
         </p:txBody>
       </p:sp>
@@ -14601,14 +14601,14 @@
               <a:buNone/>
             </a:pPr>
             <a:r>
-              <a:rPr lang="en-US" sz="850" dirty="0">
+              <a:rPr lang="en-US" sz="1200" dirty="0">
                 <a:solidFill>
                   <a:srgbClr val="0F172A"/>
                 </a:solidFill>
               </a:rPr>
               <a:t>.840</a:t>
             </a:r>
-            <a:endParaRPr lang="en-US" sz="850" dirty="0"/>
+            <a:endParaRPr lang="en-US" sz="1200" dirty="0"/>
           </a:p>
         </p:txBody>
       </p:sp>
@@ -14645,14 +14645,14 @@
               <a:buNone/>
             </a:pPr>
             <a:r>
-              <a:rPr lang="en-US" sz="850" dirty="0">
+              <a:rPr lang="en-US" sz="1200" dirty="0">
                 <a:solidFill>
                   <a:srgbClr val="0F172A"/>
                 </a:solidFill>
               </a:rPr>
               <a:t>RandomCommittee validation</a:t>
             </a:r>
-            <a:endParaRPr lang="en-US" sz="850" dirty="0"/>
+            <a:endParaRPr lang="en-US" sz="1200" dirty="0"/>
           </a:p>
         </p:txBody>
       </p:sp>
@@ -14689,14 +14689,14 @@
               <a:buNone/>
             </a:pPr>
             <a:r>
-              <a:rPr lang="en-US" sz="850" dirty="0">
+              <a:rPr lang="en-US" sz="1200" dirty="0">
                 <a:solidFill>
                   <a:srgbClr val="0F172A"/>
                 </a:solidFill>
               </a:rPr>
               <a:t>80.04%</a:t>
             </a:r>
-            <a:endParaRPr lang="en-US" sz="850" dirty="0"/>
+            <a:endParaRPr lang="en-US" sz="1200" dirty="0"/>
           </a:p>
         </p:txBody>
       </p:sp>
@@ -14733,14 +14733,14 @@
               <a:buNone/>
             </a:pPr>
             <a:r>
-              <a:rPr lang="en-US" sz="850" dirty="0">
+              <a:rPr lang="en-US" sz="1200" dirty="0">
                 <a:solidFill>
                   <a:srgbClr val="0F172A"/>
                 </a:solidFill>
               </a:rPr>
               <a:t>.791</a:t>
             </a:r>
-            <a:endParaRPr lang="en-US" sz="850" dirty="0"/>
+            <a:endParaRPr lang="en-US" sz="1200" dirty="0"/>
           </a:p>
         </p:txBody>
       </p:sp>
@@ -14777,14 +14777,14 @@
               <a:buNone/>
             </a:pPr>
             <a:r>
-              <a:rPr lang="en-US" sz="850" dirty="0">
+              <a:rPr lang="en-US" sz="1200" dirty="0">
                 <a:solidFill>
                   <a:srgbClr val="0F172A"/>
                 </a:solidFill>
               </a:rPr>
               <a:t>.595</a:t>
             </a:r>
-            <a:endParaRPr lang="en-US" sz="850" dirty="0"/>
+            <a:endParaRPr lang="en-US" sz="1200" dirty="0"/>
           </a:p>
         </p:txBody>
       </p:sp>
@@ -14821,14 +14821,14 @@
               <a:buNone/>
             </a:pPr>
             <a:r>
-              <a:rPr lang="en-US" sz="850" dirty="0">
+              <a:rPr lang="en-US" sz="1200" dirty="0">
                 <a:solidFill>
                   <a:srgbClr val="0F172A"/>
                 </a:solidFill>
               </a:rPr>
               <a:t>.679</a:t>
             </a:r>
-            <a:endParaRPr lang="en-US" sz="850" dirty="0"/>
+            <a:endParaRPr lang="en-US" sz="1200" dirty="0"/>
           </a:p>
         </p:txBody>
       </p:sp>
@@ -14865,14 +14865,14 @@
               <a:buNone/>
             </a:pPr>
             <a:r>
-              <a:rPr lang="en-US" sz="850" dirty="0">
+              <a:rPr lang="en-US" sz="1200" dirty="0">
                 <a:solidFill>
                   <a:srgbClr val="0F172A"/>
                 </a:solidFill>
               </a:rPr>
               <a:t>.881</a:t>
             </a:r>
-            <a:endParaRPr lang="en-US" sz="850" dirty="0"/>
+            <a:endParaRPr lang="en-US" sz="1200" dirty="0"/>
           </a:p>
         </p:txBody>
       </p:sp>
@@ -14909,14 +14909,14 @@
               <a:buNone/>
             </a:pPr>
             <a:r>
-              <a:rPr lang="en-US" sz="850" dirty="0">
+              <a:rPr lang="en-US" sz="1200" dirty="0">
                 <a:solidFill>
                   <a:srgbClr val="0F172A"/>
                 </a:solidFill>
               </a:rPr>
               <a:t>.835</a:t>
             </a:r>
-            <a:endParaRPr lang="en-US" sz="850" dirty="0"/>
+            <a:endParaRPr lang="en-US" sz="1200" dirty="0"/>
           </a:p>
         </p:txBody>
       </p:sp>
@@ -14953,14 +14953,14 @@
               <a:buNone/>
             </a:pPr>
             <a:r>
-              <a:rPr lang="en-US" sz="850" dirty="0">
+              <a:rPr lang="en-US" sz="1200" dirty="0">
                 <a:solidFill>
                   <a:srgbClr val="0F172A"/>
                 </a:solidFill>
               </a:rPr>
               <a:t>K=10 validation</a:t>
             </a:r>
-            <a:endParaRPr lang="en-US" sz="850" dirty="0"/>
+            <a:endParaRPr lang="en-US" sz="1200" dirty="0"/>
           </a:p>
         </p:txBody>
       </p:sp>
@@ -14997,14 +14997,14 @@
               <a:buNone/>
             </a:pPr>
             <a:r>
-              <a:rPr lang="en-US" sz="850" dirty="0">
+              <a:rPr lang="en-US" sz="1200" dirty="0">
                 <a:solidFill>
                   <a:srgbClr val="0F172A"/>
                 </a:solidFill>
               </a:rPr>
               <a:t>80.81%</a:t>
             </a:r>
-            <a:endParaRPr lang="en-US" sz="850" dirty="0"/>
+            <a:endParaRPr lang="en-US" sz="1200" dirty="0"/>
           </a:p>
         </p:txBody>
       </p:sp>
@@ -15041,14 +15041,14 @@
               <a:buNone/>
             </a:pPr>
             <a:r>
-              <a:rPr lang="en-US" sz="850" dirty="0">
+              <a:rPr lang="en-US" sz="1200" dirty="0">
                 <a:solidFill>
                   <a:srgbClr val="0F172A"/>
                 </a:solidFill>
               </a:rPr>
               <a:t>.797</a:t>
             </a:r>
-            <a:endParaRPr lang="en-US" sz="850" dirty="0"/>
+            <a:endParaRPr lang="en-US" sz="1200" dirty="0"/>
           </a:p>
         </p:txBody>
       </p:sp>
@@ -15085,14 +15085,14 @@
               <a:buNone/>
             </a:pPr>
             <a:r>
-              <a:rPr lang="en-US" sz="850" dirty="0">
+              <a:rPr lang="en-US" sz="1200" dirty="0">
                 <a:solidFill>
                   <a:srgbClr val="0F172A"/>
                 </a:solidFill>
               </a:rPr>
               <a:t>.616</a:t>
             </a:r>
-            <a:endParaRPr lang="en-US" sz="850" dirty="0"/>
+            <a:endParaRPr lang="en-US" sz="1200" dirty="0"/>
           </a:p>
         </p:txBody>
       </p:sp>
@@ -15129,14 +15129,14 @@
               <a:buNone/>
             </a:pPr>
             <a:r>
-              <a:rPr lang="en-US" sz="850" dirty="0">
+              <a:rPr lang="en-US" sz="1200" dirty="0">
                 <a:solidFill>
                   <a:srgbClr val="0F172A"/>
                 </a:solidFill>
               </a:rPr>
               <a:t>.695</a:t>
             </a:r>
-            <a:endParaRPr lang="en-US" sz="850" dirty="0"/>
+            <a:endParaRPr lang="en-US" sz="1200" dirty="0"/>
           </a:p>
         </p:txBody>
       </p:sp>
@@ -15173,14 +15173,14 @@
               <a:buNone/>
             </a:pPr>
             <a:r>
-              <a:rPr lang="en-US" sz="850" dirty="0">
+              <a:rPr lang="en-US" sz="1200" dirty="0">
                 <a:solidFill>
                   <a:srgbClr val="0F172A"/>
                 </a:solidFill>
               </a:rPr>
               <a:t>.858</a:t>
             </a:r>
-            <a:endParaRPr lang="en-US" sz="850" dirty="0"/>
+            <a:endParaRPr lang="en-US" sz="1200" dirty="0"/>
           </a:p>
         </p:txBody>
       </p:sp>
@@ -15217,14 +15217,14 @@
               <a:buNone/>
             </a:pPr>
             <a:r>
-              <a:rPr lang="en-US" sz="850" dirty="0">
+              <a:rPr lang="en-US" sz="1200" dirty="0">
                 <a:solidFill>
                   <a:srgbClr val="0F172A"/>
                 </a:solidFill>
               </a:rPr>
               <a:t>.819</a:t>
             </a:r>
-            <a:endParaRPr lang="en-US" sz="850" dirty="0"/>
+            <a:endParaRPr lang="en-US" sz="1200" dirty="0"/>
           </a:p>
         </p:txBody>
       </p:sp>
@@ -15261,14 +15261,14 @@
               <a:buNone/>
             </a:pPr>
             <a:r>
-              <a:rPr lang="en-US" sz="850" dirty="0">
+              <a:rPr lang="en-US" sz="1200" dirty="0">
                 <a:solidFill>
                   <a:srgbClr val="0F172A"/>
                 </a:solidFill>
               </a:rPr>
               <a:t>K=12 validation</a:t>
             </a:r>
-            <a:endParaRPr lang="en-US" sz="850" dirty="0"/>
+            <a:endParaRPr lang="en-US" sz="1200" dirty="0"/>
           </a:p>
         </p:txBody>
       </p:sp>
@@ -15305,14 +15305,14 @@
               <a:buNone/>
             </a:pPr>
             <a:r>
-              <a:rPr lang="en-US" sz="850" dirty="0">
+              <a:rPr lang="en-US" sz="1200" dirty="0">
                 <a:solidFill>
                   <a:srgbClr val="0F172A"/>
                 </a:solidFill>
               </a:rPr>
               <a:t>81.96%</a:t>
             </a:r>
-            <a:endParaRPr lang="en-US" sz="850" dirty="0"/>
+            <a:endParaRPr lang="en-US" sz="1200" dirty="0"/>
           </a:p>
         </p:txBody>
       </p:sp>
@@ -15349,14 +15349,14 @@
               <a:buNone/>
             </a:pPr>
             <a:r>
-              <a:rPr lang="en-US" sz="850" dirty="0">
+              <a:rPr lang="en-US" sz="1200" dirty="0">
                 <a:solidFill>
                   <a:srgbClr val="0F172A"/>
                 </a:solidFill>
               </a:rPr>
               <a:t>.818</a:t>
             </a:r>
-            <a:endParaRPr lang="en-US" sz="850" dirty="0"/>
+            <a:endParaRPr lang="en-US" sz="1200" dirty="0"/>
           </a:p>
         </p:txBody>
       </p:sp>
@@ -15393,14 +15393,14 @@
               <a:buNone/>
             </a:pPr>
             <a:r>
-              <a:rPr lang="en-US" sz="850" dirty="0">
+              <a:rPr lang="en-US" sz="1200" dirty="0">
                 <a:solidFill>
                   <a:srgbClr val="0F172A"/>
                 </a:solidFill>
               </a:rPr>
               <a:t>.632</a:t>
             </a:r>
-            <a:endParaRPr lang="en-US" sz="850" dirty="0"/>
+            <a:endParaRPr lang="en-US" sz="1200" dirty="0"/>
           </a:p>
         </p:txBody>
       </p:sp>
@@ -15437,14 +15437,14 @@
               <a:buNone/>
             </a:pPr>
             <a:r>
-              <a:rPr lang="en-US" sz="850" dirty="0">
+              <a:rPr lang="en-US" sz="1200" dirty="0">
                 <a:solidFill>
                   <a:srgbClr val="0F172A"/>
                 </a:solidFill>
               </a:rPr>
               <a:t>.713</a:t>
             </a:r>
-            <a:endParaRPr lang="en-US" sz="850" dirty="0"/>
+            <a:endParaRPr lang="en-US" sz="1200" dirty="0"/>
           </a:p>
         </p:txBody>
       </p:sp>
@@ -15481,14 +15481,14 @@
               <a:buNone/>
             </a:pPr>
             <a:r>
-              <a:rPr lang="en-US" sz="850" dirty="0">
+              <a:rPr lang="en-US" sz="1200" dirty="0">
                 <a:solidFill>
                   <a:srgbClr val="0F172A"/>
                 </a:solidFill>
               </a:rPr>
               <a:t>.870</a:t>
             </a:r>
-            <a:endParaRPr lang="en-US" sz="850" dirty="0"/>
+            <a:endParaRPr lang="en-US" sz="1200" dirty="0"/>
           </a:p>
         </p:txBody>
       </p:sp>
@@ -15525,14 +15525,14 @@
               <a:buNone/>
             </a:pPr>
             <a:r>
-              <a:rPr lang="en-US" sz="850" dirty="0">
+              <a:rPr lang="en-US" sz="1200" dirty="0">
                 <a:solidFill>
                   <a:srgbClr val="0F172A"/>
                 </a:solidFill>
               </a:rPr>
               <a:t>.823</a:t>
             </a:r>
-            <a:endParaRPr lang="en-US" sz="850" dirty="0"/>
+            <a:endParaRPr lang="en-US" sz="1200" dirty="0"/>
           </a:p>
         </p:txBody>
       </p:sp>
@@ -16549,14 +16549,14 @@
               <a:buNone/>
             </a:pPr>
             <a:r>
-              <a:rPr lang="en-US" sz="910" b="1" dirty="0">
+              <a:rPr lang="en-US" sz="1400" b="1" dirty="0">
                 <a:solidFill>
                   <a:srgbClr val="FFFFFF"/>
                 </a:solidFill>
               </a:rPr>
               <a:t>Metric</a:t>
             </a:r>
-            <a:endParaRPr lang="en-US" sz="910" dirty="0"/>
+            <a:endParaRPr lang="en-US" sz="1400" dirty="0"/>
           </a:p>
         </p:txBody>
       </p:sp>
@@ -16593,14 +16593,14 @@
               <a:buNone/>
             </a:pPr>
             <a:r>
-              <a:rPr lang="en-US" sz="910" b="1" dirty="0">
+              <a:rPr lang="en-US" sz="1400" b="1" dirty="0">
                 <a:solidFill>
                   <a:srgbClr val="FFFFFF"/>
                 </a:solidFill>
               </a:rPr>
               <a:t>Final Test</a:t>
             </a:r>
-            <a:endParaRPr lang="en-US" sz="910" dirty="0"/>
+            <a:endParaRPr lang="en-US" sz="1400" dirty="0"/>
           </a:p>
         </p:txBody>
       </p:sp>
@@ -16637,14 +16637,14 @@
               <a:buNone/>
             </a:pPr>
             <a:r>
-              <a:rPr lang="en-US" sz="860" dirty="0">
+              <a:rPr lang="en-US" sz="1200" dirty="0">
                 <a:solidFill>
                   <a:srgbClr val="0F172A"/>
                 </a:solidFill>
               </a:rPr>
               <a:t>Accuracy</a:t>
             </a:r>
-            <a:endParaRPr lang="en-US" sz="860" dirty="0"/>
+            <a:endParaRPr lang="en-US" sz="1200" dirty="0"/>
           </a:p>
         </p:txBody>
       </p:sp>
@@ -16681,14 +16681,14 @@
               <a:buNone/>
             </a:pPr>
             <a:r>
-              <a:rPr lang="en-US" sz="860" dirty="0">
+              <a:rPr lang="en-US" sz="1200" dirty="0">
                 <a:solidFill>
                   <a:srgbClr val="0F172A"/>
                 </a:solidFill>
               </a:rPr>
               <a:t>81.0345%</a:t>
             </a:r>
-            <a:endParaRPr lang="en-US" sz="860" dirty="0"/>
+            <a:endParaRPr lang="en-US" sz="1200" dirty="0"/>
           </a:p>
         </p:txBody>
       </p:sp>
@@ -16725,14 +16725,14 @@
               <a:buNone/>
             </a:pPr>
             <a:r>
-              <a:rPr lang="en-US" sz="860" dirty="0">
+              <a:rPr lang="en-US" sz="1200" dirty="0">
                 <a:solidFill>
                   <a:srgbClr val="0F172A"/>
                 </a:solidFill>
               </a:rPr>
               <a:t>Participated Precision</a:t>
             </a:r>
-            <a:endParaRPr lang="en-US" sz="860" dirty="0"/>
+            <a:endParaRPr lang="en-US" sz="1200" dirty="0"/>
           </a:p>
         </p:txBody>
       </p:sp>
@@ -16769,14 +16769,14 @@
               <a:buNone/>
             </a:pPr>
             <a:r>
-              <a:rPr lang="en-US" sz="860" dirty="0">
+              <a:rPr lang="en-US" sz="1200" dirty="0">
                 <a:solidFill>
                   <a:srgbClr val="0F172A"/>
                 </a:solidFill>
               </a:rPr>
               <a:t>0.804</a:t>
             </a:r>
-            <a:endParaRPr lang="en-US" sz="860" dirty="0"/>
+            <a:endParaRPr lang="en-US" sz="1200" dirty="0"/>
           </a:p>
         </p:txBody>
       </p:sp>
@@ -16813,14 +16813,14 @@
               <a:buNone/>
             </a:pPr>
             <a:r>
-              <a:rPr lang="en-US" sz="860" dirty="0">
+              <a:rPr lang="en-US" sz="1200" dirty="0">
                 <a:solidFill>
                   <a:srgbClr val="0F172A"/>
                 </a:solidFill>
               </a:rPr>
               <a:t>Participated Recall</a:t>
             </a:r>
-            <a:endParaRPr lang="en-US" sz="860" dirty="0"/>
+            <a:endParaRPr lang="en-US" sz="1200" dirty="0"/>
           </a:p>
         </p:txBody>
       </p:sp>
@@ -16857,14 +16857,14 @@
               <a:buNone/>
             </a:pPr>
             <a:r>
-              <a:rPr lang="en-US" sz="860" dirty="0">
+              <a:rPr lang="en-US" sz="1200" dirty="0">
                 <a:solidFill>
                   <a:srgbClr val="0F172A"/>
                 </a:solidFill>
               </a:rPr>
               <a:t>0.618</a:t>
             </a:r>
-            <a:endParaRPr lang="en-US" sz="860" dirty="0"/>
+            <a:endParaRPr lang="en-US" sz="1200" dirty="0"/>
           </a:p>
         </p:txBody>
       </p:sp>
@@ -16901,14 +16901,14 @@
               <a:buNone/>
             </a:pPr>
             <a:r>
-              <a:rPr lang="en-US" sz="860" dirty="0">
+              <a:rPr lang="en-US" sz="1200" dirty="0">
                 <a:solidFill>
                   <a:srgbClr val="0F172A"/>
                 </a:solidFill>
               </a:rPr>
               <a:t>Participated F1</a:t>
             </a:r>
-            <a:endParaRPr lang="en-US" sz="860" dirty="0"/>
+            <a:endParaRPr lang="en-US" sz="1200" dirty="0"/>
           </a:p>
         </p:txBody>
       </p:sp>
@@ -16945,14 +16945,14 @@
               <a:buNone/>
             </a:pPr>
             <a:r>
-              <a:rPr lang="en-US" sz="860" dirty="0">
+              <a:rPr lang="en-US" sz="1200" dirty="0">
                 <a:solidFill>
                   <a:srgbClr val="0F172A"/>
                 </a:solidFill>
               </a:rPr>
               <a:t>0.699</a:t>
             </a:r>
-            <a:endParaRPr lang="en-US" sz="860" dirty="0"/>
+            <a:endParaRPr lang="en-US" sz="1200" dirty="0"/>
           </a:p>
         </p:txBody>
       </p:sp>
@@ -16989,14 +16989,14 @@
               <a:buNone/>
             </a:pPr>
             <a:r>
-              <a:rPr lang="en-US" sz="860" dirty="0">
+              <a:rPr lang="en-US" sz="1200" dirty="0">
                 <a:solidFill>
                   <a:srgbClr val="0F172A"/>
                 </a:solidFill>
               </a:rPr>
               <a:t>ROC-AUC</a:t>
             </a:r>
-            <a:endParaRPr lang="en-US" sz="860" dirty="0"/>
+            <a:endParaRPr lang="en-US" sz="1200" dirty="0"/>
           </a:p>
         </p:txBody>
       </p:sp>
@@ -17033,14 +17033,14 @@
               <a:buNone/>
             </a:pPr>
             <a:r>
-              <a:rPr lang="en-US" sz="860" dirty="0">
+              <a:rPr lang="en-US" sz="1200" dirty="0">
                 <a:solidFill>
                   <a:srgbClr val="0F172A"/>
                 </a:solidFill>
               </a:rPr>
               <a:t>0.879</a:t>
             </a:r>
-            <a:endParaRPr lang="en-US" sz="860" dirty="0"/>
+            <a:endParaRPr lang="en-US" sz="1200" dirty="0"/>
           </a:p>
         </p:txBody>
       </p:sp>
@@ -17077,14 +17077,14 @@
               <a:buNone/>
             </a:pPr>
             <a:r>
-              <a:rPr lang="en-US" sz="860" dirty="0">
+              <a:rPr lang="en-US" sz="1200" dirty="0">
                 <a:solidFill>
                   <a:srgbClr val="0F172A"/>
                 </a:solidFill>
               </a:rPr>
               <a:t>PRC-AUC</a:t>
             </a:r>
-            <a:endParaRPr lang="en-US" sz="860" dirty="0"/>
+            <a:endParaRPr lang="en-US" sz="1200" dirty="0"/>
           </a:p>
         </p:txBody>
       </p:sp>
@@ -17121,14 +17121,14 @@
               <a:buNone/>
             </a:pPr>
             <a:r>
-              <a:rPr lang="en-US" sz="860" dirty="0">
+              <a:rPr lang="en-US" sz="1200" dirty="0">
                 <a:solidFill>
                   <a:srgbClr val="0F172A"/>
                 </a:solidFill>
               </a:rPr>
               <a:t>0.827</a:t>
             </a:r>
-            <a:endParaRPr lang="en-US" sz="860" dirty="0"/>
+            <a:endParaRPr lang="en-US" sz="1200" dirty="0"/>
           </a:p>
         </p:txBody>
       </p:sp>
@@ -17165,14 +17165,14 @@
               <a:buNone/>
             </a:pPr>
             <a:r>
-              <a:rPr lang="en-US" sz="860" dirty="0">
+              <a:rPr lang="en-US" sz="1200" dirty="0">
                 <a:solidFill>
                   <a:srgbClr val="0F172A"/>
                 </a:solidFill>
               </a:rPr>
               <a:t>Cohen’s Kappa</a:t>
             </a:r>
-            <a:endParaRPr lang="en-US" sz="860" dirty="0"/>
+            <a:endParaRPr lang="en-US" sz="1200" dirty="0"/>
           </a:p>
         </p:txBody>
       </p:sp>
@@ -17209,14 +17209,14 @@
               <a:buNone/>
             </a:pPr>
             <a:r>
-              <a:rPr lang="en-US" sz="860" dirty="0">
+              <a:rPr lang="en-US" sz="1200" dirty="0">
                 <a:solidFill>
                   <a:srgbClr val="0F172A"/>
                 </a:solidFill>
               </a:rPr>
               <a:t>0.5641</a:t>
             </a:r>
-            <a:endParaRPr lang="en-US" sz="860" dirty="0"/>
+            <a:endParaRPr lang="en-US" sz="1200" dirty="0"/>
           </a:p>
         </p:txBody>
       </p:sp>
@@ -17253,14 +17253,14 @@
               <a:buNone/>
             </a:pPr>
             <a:r>
-              <a:rPr lang="en-US" sz="860" dirty="0">
+              <a:rPr lang="en-US" sz="1200" dirty="0">
                 <a:solidFill>
                   <a:srgbClr val="0F172A"/>
                 </a:solidFill>
               </a:rPr>
               <a:t>MCC</a:t>
             </a:r>
-            <a:endParaRPr lang="en-US" sz="860" dirty="0"/>
+            <a:endParaRPr lang="en-US" sz="1200" dirty="0"/>
           </a:p>
         </p:txBody>
       </p:sp>
@@ -17297,14 +17297,14 @@
               <a:buNone/>
             </a:pPr>
             <a:r>
-              <a:rPr lang="en-US" sz="860" dirty="0">
+              <a:rPr lang="en-US" sz="1200" dirty="0">
                 <a:solidFill>
                   <a:srgbClr val="0F172A"/>
                 </a:solidFill>
               </a:rPr>
               <a:t>0.574</a:t>
             </a:r>
-            <a:endParaRPr lang="en-US" sz="860" dirty="0"/>
+            <a:endParaRPr lang="en-US" sz="1200" dirty="0"/>
           </a:p>
         </p:txBody>
       </p:sp>
@@ -17341,14 +17341,14 @@
               <a:buNone/>
             </a:pPr>
             <a:r>
-              <a:rPr lang="en-US" sz="860" dirty="0">
+              <a:rPr lang="en-US" sz="1200" dirty="0">
                 <a:solidFill>
                   <a:srgbClr val="0F172A"/>
                 </a:solidFill>
               </a:rPr>
               <a:t>Weighted F1</a:t>
             </a:r>
-            <a:endParaRPr lang="en-US" sz="860" dirty="0"/>
+            <a:endParaRPr lang="en-US" sz="1200" dirty="0"/>
           </a:p>
         </p:txBody>
       </p:sp>
@@ -17385,14 +17385,14 @@
               <a:buNone/>
             </a:pPr>
             <a:r>
-              <a:rPr lang="en-US" sz="860" dirty="0">
+              <a:rPr lang="en-US" sz="1200" dirty="0">
                 <a:solidFill>
                   <a:srgbClr val="0F172A"/>
                 </a:solidFill>
               </a:rPr>
               <a:t>0.804</a:t>
             </a:r>
-            <a:endParaRPr lang="en-US" sz="860" dirty="0"/>
+            <a:endParaRPr lang="en-US" sz="1200" dirty="0"/>
           </a:p>
         </p:txBody>
       </p:sp>
@@ -17429,14 +17429,14 @@
               <a:buNone/>
             </a:pPr>
             <a:r>
-              <a:rPr lang="en-US" sz="860" dirty="0">
+              <a:rPr lang="en-US" sz="1200" dirty="0">
                 <a:solidFill>
                   <a:srgbClr val="0F172A"/>
                 </a:solidFill>
               </a:rPr>
               <a:t>Balanced Accuracy</a:t>
             </a:r>
-            <a:endParaRPr lang="en-US" sz="860" dirty="0"/>
+            <a:endParaRPr lang="en-US" sz="1200" dirty="0"/>
           </a:p>
         </p:txBody>
       </p:sp>
@@ -17473,14 +17473,14 @@
               <a:buNone/>
             </a:pPr>
             <a:r>
-              <a:rPr lang="en-US" sz="860" dirty="0">
+              <a:rPr lang="en-US" sz="1200" dirty="0">
                 <a:solidFill>
                   <a:srgbClr val="0F172A"/>
                 </a:solidFill>
               </a:rPr>
               <a:t>0.7675</a:t>
             </a:r>
-            <a:endParaRPr lang="en-US" sz="860" dirty="0"/>
+            <a:endParaRPr lang="en-US" sz="1200" dirty="0"/>
           </a:p>
         </p:txBody>
       </p:sp>
@@ -18308,14 +18308,14 @@
               <a:buNone/>
             </a:pPr>
             <a:r>
-              <a:rPr lang="en-US" sz="910" b="1" dirty="0">
+              <a:rPr lang="en-US" sz="1400" b="1" dirty="0">
                 <a:solidFill>
                   <a:srgbClr val="FFFFFF"/>
                 </a:solidFill>
               </a:rPr>
               <a:t>Metric</a:t>
             </a:r>
-            <a:endParaRPr lang="en-US" sz="910" dirty="0"/>
+            <a:endParaRPr lang="en-US" sz="1400" dirty="0"/>
           </a:p>
         </p:txBody>
       </p:sp>
@@ -18344,22 +18344,22 @@
         </p:spPr>
         <p:txBody>
           <a:bodyPr wrap="square" rtlCol="0" anchor="ctr">
-            <a:normAutofit/>
-          </a:bodyPr>
-          <a:lstStyle/>
-          <a:p>
-            <a:pPr marL="0" indent="0" algn="ctr">
-              <a:buNone/>
-            </a:pPr>
-            <a:r>
-              <a:rPr lang="en-US" sz="910" b="1" dirty="0">
+            <a:noAutofit/>
+          </a:bodyPr>
+          <a:lstStyle/>
+          <a:p>
+            <a:pPr marL="0" indent="0" algn="ctr">
+              <a:buNone/>
+            </a:pPr>
+            <a:r>
+              <a:rPr lang="en-US" sz="1200" b="1" dirty="0">
                 <a:solidFill>
                   <a:srgbClr val="FFFFFF"/>
                 </a:solidFill>
               </a:rPr>
               <a:t>Validation K=12</a:t>
             </a:r>
-            <a:endParaRPr lang="en-US" sz="910" dirty="0"/>
+            <a:endParaRPr lang="en-US" sz="1200" dirty="0"/>
           </a:p>
         </p:txBody>
       </p:sp>
@@ -18396,14 +18396,14 @@
               <a:buNone/>
             </a:pPr>
             <a:r>
-              <a:rPr lang="en-US" sz="910" b="1" dirty="0">
+              <a:rPr lang="en-US" sz="1400" b="1" dirty="0">
                 <a:solidFill>
                   <a:srgbClr val="FFFFFF"/>
                 </a:solidFill>
               </a:rPr>
               <a:t>Final Test</a:t>
             </a:r>
-            <a:endParaRPr lang="en-US" sz="910" dirty="0"/>
+            <a:endParaRPr lang="en-US" sz="1400" dirty="0"/>
           </a:p>
         </p:txBody>
       </p:sp>
@@ -18440,14 +18440,14 @@
               <a:buNone/>
             </a:pPr>
             <a:r>
-              <a:rPr lang="en-US" sz="910" b="1" dirty="0">
+              <a:rPr lang="en-US" sz="1400" b="1" dirty="0">
                 <a:solidFill>
                   <a:srgbClr val="FFFFFF"/>
                 </a:solidFill>
               </a:rPr>
               <a:t>Change</a:t>
             </a:r>
-            <a:endParaRPr lang="en-US" sz="910" dirty="0"/>
+            <a:endParaRPr lang="en-US" sz="1400" dirty="0"/>
           </a:p>
         </p:txBody>
       </p:sp>
@@ -18484,14 +18484,14 @@
               <a:buNone/>
             </a:pPr>
             <a:r>
-              <a:rPr lang="en-US" sz="820" dirty="0">
+              <a:rPr lang="en-US" sz="1200" dirty="0">
                 <a:solidFill>
                   <a:srgbClr val="0F172A"/>
                 </a:solidFill>
               </a:rPr>
               <a:t>Accuracy</a:t>
             </a:r>
-            <a:endParaRPr lang="en-US" sz="820" dirty="0"/>
+            <a:endParaRPr lang="en-US" sz="1200" dirty="0"/>
           </a:p>
         </p:txBody>
       </p:sp>
@@ -18528,14 +18528,14 @@
               <a:buNone/>
             </a:pPr>
             <a:r>
-              <a:rPr lang="en-US" sz="820" dirty="0">
+              <a:rPr lang="en-US" sz="1200" dirty="0">
                 <a:solidFill>
                   <a:srgbClr val="0F172A"/>
                 </a:solidFill>
               </a:rPr>
               <a:t>81.9578%</a:t>
             </a:r>
-            <a:endParaRPr lang="en-US" sz="820" dirty="0"/>
+            <a:endParaRPr lang="en-US" sz="1200" dirty="0"/>
           </a:p>
         </p:txBody>
       </p:sp>
@@ -18572,14 +18572,14 @@
               <a:buNone/>
             </a:pPr>
             <a:r>
-              <a:rPr lang="en-US" sz="820" dirty="0">
+              <a:rPr lang="en-US" sz="1200" dirty="0">
                 <a:solidFill>
                   <a:srgbClr val="0F172A"/>
                 </a:solidFill>
               </a:rPr>
               <a:t>81.0345%</a:t>
             </a:r>
-            <a:endParaRPr lang="en-US" sz="820" dirty="0"/>
+            <a:endParaRPr lang="en-US" sz="1200" dirty="0"/>
           </a:p>
         </p:txBody>
       </p:sp>
@@ -18616,14 +18616,14 @@
               <a:buNone/>
             </a:pPr>
             <a:r>
-              <a:rPr lang="en-US" sz="820" dirty="0">
+              <a:rPr lang="en-US" sz="1200" dirty="0">
                 <a:solidFill>
                   <a:srgbClr val="0F172A"/>
                 </a:solidFill>
               </a:rPr>
               <a:t>−0.9233 pp</a:t>
             </a:r>
-            <a:endParaRPr lang="en-US" sz="820" dirty="0"/>
+            <a:endParaRPr lang="en-US" sz="1200" dirty="0"/>
           </a:p>
         </p:txBody>
       </p:sp>
@@ -18660,14 +18660,14 @@
               <a:buNone/>
             </a:pPr>
             <a:r>
-              <a:rPr lang="en-US" sz="820" dirty="0">
+              <a:rPr lang="en-US" sz="1200" dirty="0">
                 <a:solidFill>
                   <a:srgbClr val="0F172A"/>
                 </a:solidFill>
               </a:rPr>
               <a:t>Precision</a:t>
             </a:r>
-            <a:endParaRPr lang="en-US" sz="820" dirty="0"/>
+            <a:endParaRPr lang="en-US" sz="1200" dirty="0"/>
           </a:p>
         </p:txBody>
       </p:sp>
@@ -18704,14 +18704,14 @@
               <a:buNone/>
             </a:pPr>
             <a:r>
-              <a:rPr lang="en-US" sz="820" dirty="0">
+              <a:rPr lang="en-US" sz="1200" dirty="0">
                 <a:solidFill>
                   <a:srgbClr val="0F172A"/>
                 </a:solidFill>
               </a:rPr>
               <a:t>0.818</a:t>
             </a:r>
-            <a:endParaRPr lang="en-US" sz="820" dirty="0"/>
+            <a:endParaRPr lang="en-US" sz="1200" dirty="0"/>
           </a:p>
         </p:txBody>
       </p:sp>
@@ -18748,14 +18748,14 @@
               <a:buNone/>
             </a:pPr>
             <a:r>
-              <a:rPr lang="en-US" sz="820" dirty="0">
+              <a:rPr lang="en-US" sz="1200" dirty="0">
                 <a:solidFill>
                   <a:srgbClr val="0F172A"/>
                 </a:solidFill>
               </a:rPr>
               <a:t>0.804</a:t>
             </a:r>
-            <a:endParaRPr lang="en-US" sz="820" dirty="0"/>
+            <a:endParaRPr lang="en-US" sz="1200" dirty="0"/>
           </a:p>
         </p:txBody>
       </p:sp>
@@ -18792,14 +18792,14 @@
               <a:buNone/>
             </a:pPr>
             <a:r>
-              <a:rPr lang="en-US" sz="820" dirty="0">
+              <a:rPr lang="en-US" sz="1200" dirty="0">
                 <a:solidFill>
                   <a:srgbClr val="0F172A"/>
                 </a:solidFill>
               </a:rPr>
               <a:t>−0.014</a:t>
             </a:r>
-            <a:endParaRPr lang="en-US" sz="820" dirty="0"/>
+            <a:endParaRPr lang="en-US" sz="1200" dirty="0"/>
           </a:p>
         </p:txBody>
       </p:sp>
@@ -18836,14 +18836,14 @@
               <a:buNone/>
             </a:pPr>
             <a:r>
-              <a:rPr lang="en-US" sz="820" dirty="0">
+              <a:rPr lang="en-US" sz="1200" dirty="0">
                 <a:solidFill>
                   <a:srgbClr val="0F172A"/>
                 </a:solidFill>
               </a:rPr>
               <a:t>Recall</a:t>
             </a:r>
-            <a:endParaRPr lang="en-US" sz="820" dirty="0"/>
+            <a:endParaRPr lang="en-US" sz="1200" dirty="0"/>
           </a:p>
         </p:txBody>
       </p:sp>
@@ -18880,14 +18880,14 @@
               <a:buNone/>
             </a:pPr>
             <a:r>
-              <a:rPr lang="en-US" sz="820" dirty="0">
+              <a:rPr lang="en-US" sz="1200" dirty="0">
                 <a:solidFill>
                   <a:srgbClr val="0F172A"/>
                 </a:solidFill>
               </a:rPr>
               <a:t>0.632</a:t>
             </a:r>
-            <a:endParaRPr lang="en-US" sz="820" dirty="0"/>
+            <a:endParaRPr lang="en-US" sz="1200" dirty="0"/>
           </a:p>
         </p:txBody>
       </p:sp>
@@ -18924,14 +18924,14 @@
               <a:buNone/>
             </a:pPr>
             <a:r>
-              <a:rPr lang="en-US" sz="820" dirty="0">
+              <a:rPr lang="en-US" sz="1200" dirty="0">
                 <a:solidFill>
                   <a:srgbClr val="0F172A"/>
                 </a:solidFill>
               </a:rPr>
               <a:t>0.618</a:t>
             </a:r>
-            <a:endParaRPr lang="en-US" sz="820" dirty="0"/>
+            <a:endParaRPr lang="en-US" sz="1200" dirty="0"/>
           </a:p>
         </p:txBody>
       </p:sp>
@@ -18968,14 +18968,14 @@
               <a:buNone/>
             </a:pPr>
             <a:r>
-              <a:rPr lang="en-US" sz="820" dirty="0">
+              <a:rPr lang="en-US" sz="1200" dirty="0">
                 <a:solidFill>
                   <a:srgbClr val="0F172A"/>
                 </a:solidFill>
               </a:rPr>
               <a:t>−0.014</a:t>
             </a:r>
-            <a:endParaRPr lang="en-US" sz="820" dirty="0"/>
+            <a:endParaRPr lang="en-US" sz="1200" dirty="0"/>
           </a:p>
         </p:txBody>
       </p:sp>
@@ -19012,14 +19012,14 @@
               <a:buNone/>
             </a:pPr>
             <a:r>
-              <a:rPr lang="en-US" sz="820" dirty="0">
+              <a:rPr lang="en-US" sz="1200" dirty="0">
                 <a:solidFill>
                   <a:srgbClr val="0F172A"/>
                 </a:solidFill>
               </a:rPr>
               <a:t>F1</a:t>
             </a:r>
-            <a:endParaRPr lang="en-US" sz="820" dirty="0"/>
+            <a:endParaRPr lang="en-US" sz="1200" dirty="0"/>
           </a:p>
         </p:txBody>
       </p:sp>
@@ -19056,14 +19056,14 @@
               <a:buNone/>
             </a:pPr>
             <a:r>
-              <a:rPr lang="en-US" sz="820" dirty="0">
+              <a:rPr lang="en-US" sz="1200" dirty="0">
                 <a:solidFill>
                   <a:srgbClr val="0F172A"/>
                 </a:solidFill>
               </a:rPr>
               <a:t>0.713</a:t>
             </a:r>
-            <a:endParaRPr lang="en-US" sz="820" dirty="0"/>
+            <a:endParaRPr lang="en-US" sz="1200" dirty="0"/>
           </a:p>
         </p:txBody>
       </p:sp>
@@ -19100,14 +19100,14 @@
               <a:buNone/>
             </a:pPr>
             <a:r>
-              <a:rPr lang="en-US" sz="820" dirty="0">
+              <a:rPr lang="en-US" sz="1200" dirty="0">
                 <a:solidFill>
                   <a:srgbClr val="0F172A"/>
                 </a:solidFill>
               </a:rPr>
               <a:t>0.699</a:t>
             </a:r>
-            <a:endParaRPr lang="en-US" sz="820" dirty="0"/>
+            <a:endParaRPr lang="en-US" sz="1200" dirty="0"/>
           </a:p>
         </p:txBody>
       </p:sp>
@@ -19144,14 +19144,14 @@
               <a:buNone/>
             </a:pPr>
             <a:r>
-              <a:rPr lang="en-US" sz="820" dirty="0">
+              <a:rPr lang="en-US" sz="1200" dirty="0">
                 <a:solidFill>
                   <a:srgbClr val="0F172A"/>
                 </a:solidFill>
               </a:rPr>
               <a:t>−0.014</a:t>
             </a:r>
-            <a:endParaRPr lang="en-US" sz="820" dirty="0"/>
+            <a:endParaRPr lang="en-US" sz="1200" dirty="0"/>
           </a:p>
         </p:txBody>
       </p:sp>
@@ -19188,14 +19188,14 @@
               <a:buNone/>
             </a:pPr>
             <a:r>
-              <a:rPr lang="en-US" sz="820" dirty="0">
+              <a:rPr lang="en-US" sz="1200" dirty="0">
                 <a:solidFill>
                   <a:srgbClr val="0F172A"/>
                 </a:solidFill>
               </a:rPr>
               <a:t>ROC-AUC</a:t>
             </a:r>
-            <a:endParaRPr lang="en-US" sz="820" dirty="0"/>
+            <a:endParaRPr lang="en-US" sz="1200" dirty="0"/>
           </a:p>
         </p:txBody>
       </p:sp>
@@ -19232,14 +19232,14 @@
               <a:buNone/>
             </a:pPr>
             <a:r>
-              <a:rPr lang="en-US" sz="820" dirty="0">
+              <a:rPr lang="en-US" sz="1200" dirty="0">
                 <a:solidFill>
                   <a:srgbClr val="0F172A"/>
                 </a:solidFill>
               </a:rPr>
               <a:t>0.870</a:t>
             </a:r>
-            <a:endParaRPr lang="en-US" sz="820" dirty="0"/>
+            <a:endParaRPr lang="en-US" sz="1200" dirty="0"/>
           </a:p>
         </p:txBody>
       </p:sp>
@@ -19276,14 +19276,14 @@
               <a:buNone/>
             </a:pPr>
             <a:r>
-              <a:rPr lang="en-US" sz="820" dirty="0">
+              <a:rPr lang="en-US" sz="1200" dirty="0">
                 <a:solidFill>
                   <a:srgbClr val="0F172A"/>
                 </a:solidFill>
               </a:rPr>
               <a:t>0.879</a:t>
             </a:r>
-            <a:endParaRPr lang="en-US" sz="820" dirty="0"/>
+            <a:endParaRPr lang="en-US" sz="1200" dirty="0"/>
           </a:p>
         </p:txBody>
       </p:sp>
@@ -19320,14 +19320,14 @@
               <a:buNone/>
             </a:pPr>
             <a:r>
-              <a:rPr lang="en-US" sz="820" dirty="0">
+              <a:rPr lang="en-US" sz="1200" dirty="0">
                 <a:solidFill>
                   <a:srgbClr val="0F172A"/>
                 </a:solidFill>
               </a:rPr>
               <a:t>+0.009</a:t>
             </a:r>
-            <a:endParaRPr lang="en-US" sz="820" dirty="0"/>
+            <a:endParaRPr lang="en-US" sz="1200" dirty="0"/>
           </a:p>
         </p:txBody>
       </p:sp>
@@ -19364,14 +19364,14 @@
               <a:buNone/>
             </a:pPr>
             <a:r>
-              <a:rPr lang="en-US" sz="820" dirty="0">
+              <a:rPr lang="en-US" sz="1200" dirty="0">
                 <a:solidFill>
                   <a:srgbClr val="0F172A"/>
                 </a:solidFill>
               </a:rPr>
               <a:t>PRC-AUC</a:t>
             </a:r>
-            <a:endParaRPr lang="en-US" sz="820" dirty="0"/>
+            <a:endParaRPr lang="en-US" sz="1200" dirty="0"/>
           </a:p>
         </p:txBody>
       </p:sp>
@@ -19408,14 +19408,14 @@
               <a:buNone/>
             </a:pPr>
             <a:r>
-              <a:rPr lang="en-US" sz="820" dirty="0">
+              <a:rPr lang="en-US" sz="1200" dirty="0">
                 <a:solidFill>
                   <a:srgbClr val="0F172A"/>
                 </a:solidFill>
               </a:rPr>
               <a:t>0.823</a:t>
             </a:r>
-            <a:endParaRPr lang="en-US" sz="820" dirty="0"/>
+            <a:endParaRPr lang="en-US" sz="1200" dirty="0"/>
           </a:p>
         </p:txBody>
       </p:sp>
@@ -19452,14 +19452,14 @@
               <a:buNone/>
             </a:pPr>
             <a:r>
-              <a:rPr lang="en-US" sz="820" dirty="0">
+              <a:rPr lang="en-US" sz="1200" dirty="0">
                 <a:solidFill>
                   <a:srgbClr val="0F172A"/>
                 </a:solidFill>
               </a:rPr>
               <a:t>0.827</a:t>
             </a:r>
-            <a:endParaRPr lang="en-US" sz="820" dirty="0"/>
+            <a:endParaRPr lang="en-US" sz="1200" dirty="0"/>
           </a:p>
         </p:txBody>
       </p:sp>
@@ -19496,14 +19496,14 @@
               <a:buNone/>
             </a:pPr>
             <a:r>
-              <a:rPr lang="en-US" sz="820" dirty="0">
+              <a:rPr lang="en-US" sz="1200" dirty="0">
                 <a:solidFill>
                   <a:srgbClr val="0F172A"/>
                 </a:solidFill>
               </a:rPr>
               <a:t>+0.004</a:t>
             </a:r>
-            <a:endParaRPr lang="en-US" sz="820" dirty="0"/>
+            <a:endParaRPr lang="en-US" sz="1200" dirty="0"/>
           </a:p>
         </p:txBody>
       </p:sp>
@@ -19540,14 +19540,14 @@
               <a:buNone/>
             </a:pPr>
             <a:r>
-              <a:rPr lang="en-US" sz="820" dirty="0">
+              <a:rPr lang="en-US" sz="1200" dirty="0">
                 <a:solidFill>
                   <a:srgbClr val="0F172A"/>
                 </a:solidFill>
               </a:rPr>
               <a:t>MCC</a:t>
             </a:r>
-            <a:endParaRPr lang="en-US" sz="820" dirty="0"/>
+            <a:endParaRPr lang="en-US" sz="1200" dirty="0"/>
           </a:p>
         </p:txBody>
       </p:sp>
@@ -19584,14 +19584,14 @@
               <a:buNone/>
             </a:pPr>
             <a:r>
-              <a:rPr lang="en-US" sz="820" dirty="0">
+              <a:rPr lang="en-US" sz="1200" dirty="0">
                 <a:solidFill>
                   <a:srgbClr val="0F172A"/>
                 </a:solidFill>
               </a:rPr>
               <a:t>0.595</a:t>
             </a:r>
-            <a:endParaRPr lang="en-US" sz="820" dirty="0"/>
+            <a:endParaRPr lang="en-US" sz="1200" dirty="0"/>
           </a:p>
         </p:txBody>
       </p:sp>
@@ -19628,14 +19628,14 @@
               <a:buNone/>
             </a:pPr>
             <a:r>
-              <a:rPr lang="en-US" sz="820" dirty="0">
+              <a:rPr lang="en-US" sz="1200" dirty="0">
                 <a:solidFill>
                   <a:srgbClr val="0F172A"/>
                 </a:solidFill>
               </a:rPr>
               <a:t>0.574</a:t>
             </a:r>
-            <a:endParaRPr lang="en-US" sz="820" dirty="0"/>
+            <a:endParaRPr lang="en-US" sz="1200" dirty="0"/>
           </a:p>
         </p:txBody>
       </p:sp>
@@ -19672,14 +19672,14 @@
               <a:buNone/>
             </a:pPr>
             <a:r>
-              <a:rPr lang="en-US" sz="820" dirty="0">
+              <a:rPr lang="en-US" sz="1200" dirty="0">
                 <a:solidFill>
                   <a:srgbClr val="0F172A"/>
                 </a:solidFill>
               </a:rPr>
               <a:t>−0.021</a:t>
             </a:r>
-            <a:endParaRPr lang="en-US" sz="820" dirty="0"/>
+            <a:endParaRPr lang="en-US" sz="1200" dirty="0"/>
           </a:p>
         </p:txBody>
       </p:sp>
@@ -20901,7 +20901,7 @@
         </p:nvSpPr>
         <p:spPr>
           <a:xfrm>
-            <a:off x="502920" y="1069848"/>
+            <a:off x="5161788" y="4965192"/>
             <a:ext cx="11201400" cy="0"/>
           </a:xfrm>
           <a:prstGeom prst="line">
@@ -20941,22 +20941,22 @@
         </p:spPr>
         <p:txBody>
           <a:bodyPr wrap="square" rtlCol="0" anchor="ctr">
-            <a:normAutofit/>
-          </a:bodyPr>
-          <a:lstStyle/>
-          <a:p>
-            <a:pPr marL="0" indent="0" algn="ctr">
-              <a:buNone/>
-            </a:pPr>
-            <a:r>
-              <a:rPr lang="en-US" sz="910" b="1" dirty="0">
+            <a:noAutofit/>
+          </a:bodyPr>
+          <a:lstStyle/>
+          <a:p>
+            <a:pPr marL="0" indent="0" algn="ctr">
+              <a:buNone/>
+            </a:pPr>
+            <a:r>
+              <a:rPr lang="en-US" sz="1600" b="1" dirty="0">
                 <a:solidFill>
                   <a:srgbClr val="FFFFFF"/>
                 </a:solidFill>
               </a:rPr>
               <a:t>Dimension</a:t>
             </a:r>
-            <a:endParaRPr lang="en-US" sz="910" dirty="0"/>
+            <a:endParaRPr lang="en-US" sz="1600" dirty="0"/>
           </a:p>
         </p:txBody>
       </p:sp>
@@ -20985,22 +20985,22 @@
         </p:spPr>
         <p:txBody>
           <a:bodyPr wrap="square" rtlCol="0" anchor="ctr">
-            <a:normAutofit/>
-          </a:bodyPr>
-          <a:lstStyle/>
-          <a:p>
-            <a:pPr marL="0" indent="0" algn="ctr">
-              <a:buNone/>
-            </a:pPr>
-            <a:r>
-              <a:rPr lang="en-US" sz="910" b="1" dirty="0">
+            <a:noAutofit/>
+          </a:bodyPr>
+          <a:lstStyle/>
+          <a:p>
+            <a:pPr marL="0" indent="0" algn="ctr">
+              <a:buNone/>
+            </a:pPr>
+            <a:r>
+              <a:rPr lang="en-US" sz="1600" b="1" dirty="0">
                 <a:solidFill>
                   <a:srgbClr val="FFFFFF"/>
                 </a:solidFill>
               </a:rPr>
               <a:t>Phase 1: Year‑1 CGPA</a:t>
             </a:r>
-            <a:endParaRPr lang="en-US" sz="910" dirty="0"/>
+            <a:endParaRPr lang="en-US" sz="1600" dirty="0"/>
           </a:p>
         </p:txBody>
       </p:sp>
@@ -21029,22 +21029,22 @@
         </p:spPr>
         <p:txBody>
           <a:bodyPr wrap="square" rtlCol="0" anchor="ctr">
-            <a:normAutofit/>
-          </a:bodyPr>
-          <a:lstStyle/>
-          <a:p>
-            <a:pPr marL="0" indent="0" algn="ctr">
-              <a:buNone/>
-            </a:pPr>
-            <a:r>
-              <a:rPr lang="en-US" sz="910" b="1" dirty="0">
+            <a:noAutofit/>
+          </a:bodyPr>
+          <a:lstStyle/>
+          <a:p>
+            <a:pPr marL="0" indent="0" algn="ctr">
+              <a:buNone/>
+            </a:pPr>
+            <a:r>
+              <a:rPr lang="en-US" sz="1400" b="1" dirty="0">
                 <a:solidFill>
                   <a:srgbClr val="FFFFFF"/>
                 </a:solidFill>
               </a:rPr>
               <a:t>Phase 2: ResearchParticipation</a:t>
             </a:r>
-            <a:endParaRPr lang="en-US" sz="910" dirty="0"/>
+            <a:endParaRPr lang="en-US" sz="1400" dirty="0"/>
           </a:p>
         </p:txBody>
       </p:sp>
@@ -21081,14 +21081,14 @@
               <a:buNone/>
             </a:pPr>
             <a:r>
-              <a:rPr lang="en-US" sz="790" dirty="0">
+              <a:rPr lang="en-US" sz="1200" dirty="0">
                 <a:solidFill>
                   <a:srgbClr val="0F172A"/>
                 </a:solidFill>
               </a:rPr>
               <a:t>Problem type</a:t>
             </a:r>
-            <a:endParaRPr lang="en-US" sz="790" dirty="0"/>
+            <a:endParaRPr lang="en-US" sz="1200" dirty="0"/>
           </a:p>
         </p:txBody>
       </p:sp>
@@ -21125,14 +21125,14 @@
               <a:buNone/>
             </a:pPr>
             <a:r>
-              <a:rPr lang="en-US" sz="790" dirty="0">
+              <a:rPr lang="en-US" sz="1200" dirty="0">
                 <a:solidFill>
                   <a:srgbClr val="0F172A"/>
                 </a:solidFill>
               </a:rPr>
               <a:t>5-class nominal classification</a:t>
             </a:r>
-            <a:endParaRPr lang="en-US" sz="790" dirty="0"/>
+            <a:endParaRPr lang="en-US" sz="1200" dirty="0"/>
           </a:p>
         </p:txBody>
       </p:sp>
@@ -21169,14 +21169,14 @@
               <a:buNone/>
             </a:pPr>
             <a:r>
-              <a:rPr lang="en-US" sz="790" dirty="0">
+              <a:rPr lang="en-US" sz="1200" dirty="0">
                 <a:solidFill>
                   <a:srgbClr val="0F172A"/>
                 </a:solidFill>
               </a:rPr>
               <a:t>Binary classification</a:t>
             </a:r>
-            <a:endParaRPr lang="en-US" sz="790" dirty="0"/>
+            <a:endParaRPr lang="en-US" sz="1200" dirty="0"/>
           </a:p>
         </p:txBody>
       </p:sp>
@@ -21213,14 +21213,14 @@
               <a:buNone/>
             </a:pPr>
             <a:r>
-              <a:rPr lang="en-US" sz="790" dirty="0">
+              <a:rPr lang="en-US" sz="1200" dirty="0">
                 <a:solidFill>
                   <a:srgbClr val="0F172A"/>
                 </a:solidFill>
               </a:rPr>
               <a:t>Final usable N</a:t>
             </a:r>
-            <a:endParaRPr lang="en-US" sz="790" dirty="0"/>
+            <a:endParaRPr lang="en-US" sz="1200" dirty="0"/>
           </a:p>
         </p:txBody>
       </p:sp>
@@ -21257,14 +21257,14 @@
               <a:buNone/>
             </a:pPr>
             <a:r>
-              <a:rPr lang="en-US" sz="790" dirty="0">
+              <a:rPr lang="en-US" sz="1200" dirty="0">
                 <a:solidFill>
                   <a:srgbClr val="0F172A"/>
                 </a:solidFill>
               </a:rPr>
               <a:t>3,516</a:t>
             </a:r>
-            <a:endParaRPr lang="en-US" sz="790" dirty="0"/>
+            <a:endParaRPr lang="en-US" sz="1200" dirty="0"/>
           </a:p>
         </p:txBody>
       </p:sp>
@@ -21301,14 +21301,14 @@
               <a:buNone/>
             </a:pPr>
             <a:r>
-              <a:rPr lang="en-US" sz="790" dirty="0">
+              <a:rPr lang="en-US" sz="1200" dirty="0">
                 <a:solidFill>
                   <a:srgbClr val="0F172A"/>
                 </a:solidFill>
               </a:rPr>
               <a:t>3,475</a:t>
             </a:r>
-            <a:endParaRPr lang="en-US" sz="790" dirty="0"/>
+            <a:endParaRPr lang="en-US" sz="1200" dirty="0"/>
           </a:p>
         </p:txBody>
       </p:sp>
@@ -21345,14 +21345,14 @@
               <a:buNone/>
             </a:pPr>
             <a:r>
-              <a:rPr lang="en-US" sz="790" dirty="0">
+              <a:rPr lang="en-US" sz="1200" dirty="0">
                 <a:solidFill>
                   <a:srgbClr val="0F172A"/>
                 </a:solidFill>
               </a:rPr>
               <a:t>Predictors</a:t>
             </a:r>
-            <a:endParaRPr lang="en-US" sz="790" dirty="0"/>
+            <a:endParaRPr lang="en-US" sz="1200" dirty="0"/>
           </a:p>
         </p:txBody>
       </p:sp>
@@ -21389,14 +21389,14 @@
               <a:buNone/>
             </a:pPr>
             <a:r>
-              <a:rPr lang="en-US" sz="790" dirty="0">
+              <a:rPr lang="en-US" sz="1200" dirty="0">
                 <a:solidFill>
                   <a:srgbClr val="0F172A"/>
                 </a:solidFill>
               </a:rPr>
               <a:t>23</a:t>
             </a:r>
-            <a:endParaRPr lang="en-US" sz="790" dirty="0"/>
+            <a:endParaRPr lang="en-US" sz="1200" dirty="0"/>
           </a:p>
         </p:txBody>
       </p:sp>
@@ -21433,14 +21433,14 @@
               <a:buNone/>
             </a:pPr>
             <a:r>
-              <a:rPr lang="en-US" sz="790" dirty="0">
+              <a:rPr lang="en-US" sz="1200" dirty="0">
                 <a:solidFill>
                   <a:srgbClr val="0F172A"/>
                 </a:solidFill>
               </a:rPr>
               <a:t>24</a:t>
             </a:r>
-            <a:endParaRPr lang="en-US" sz="790" dirty="0"/>
+            <a:endParaRPr lang="en-US" sz="1200" dirty="0"/>
           </a:p>
         </p:txBody>
       </p:sp>
@@ -21477,14 +21477,14 @@
               <a:buNone/>
             </a:pPr>
             <a:r>
-              <a:rPr lang="en-US" sz="790" dirty="0">
+              <a:rPr lang="en-US" sz="1200" dirty="0">
                 <a:solidFill>
                   <a:srgbClr val="0F172A"/>
                 </a:solidFill>
               </a:rPr>
               <a:t>Final Test N</a:t>
             </a:r>
-            <a:endParaRPr lang="en-US" sz="790" dirty="0"/>
+            <a:endParaRPr lang="en-US" sz="1200" dirty="0"/>
           </a:p>
         </p:txBody>
       </p:sp>
@@ -21521,14 +21521,14 @@
               <a:buNone/>
             </a:pPr>
             <a:r>
-              <a:rPr lang="en-US" sz="790" dirty="0">
+              <a:rPr lang="en-US" sz="1200" dirty="0">
                 <a:solidFill>
                   <a:srgbClr val="0F172A"/>
                 </a:solidFill>
               </a:rPr>
               <a:t>528</a:t>
             </a:r>
-            <a:endParaRPr lang="en-US" sz="790" dirty="0"/>
+            <a:endParaRPr lang="en-US" sz="1200" dirty="0"/>
           </a:p>
         </p:txBody>
       </p:sp>
@@ -21565,14 +21565,14 @@
               <a:buNone/>
             </a:pPr>
             <a:r>
-              <a:rPr lang="en-US" sz="790" dirty="0">
+              <a:rPr lang="en-US" sz="1200" dirty="0">
                 <a:solidFill>
                   <a:srgbClr val="0F172A"/>
                 </a:solidFill>
               </a:rPr>
               <a:t>522</a:t>
             </a:r>
-            <a:endParaRPr lang="en-US" sz="790" dirty="0"/>
+            <a:endParaRPr lang="en-US" sz="1200" dirty="0"/>
           </a:p>
         </p:txBody>
       </p:sp>
@@ -21609,14 +21609,14 @@
               <a:buNone/>
             </a:pPr>
             <a:r>
-              <a:rPr lang="en-US" sz="790" dirty="0">
+              <a:rPr lang="en-US" sz="1200" dirty="0">
                 <a:solidFill>
                   <a:srgbClr val="0F172A"/>
                 </a:solidFill>
               </a:rPr>
               <a:t>Final Accuracy</a:t>
             </a:r>
-            <a:endParaRPr lang="en-US" sz="790" dirty="0"/>
+            <a:endParaRPr lang="en-US" sz="1200" dirty="0"/>
           </a:p>
         </p:txBody>
       </p:sp>
@@ -21653,14 +21653,14 @@
               <a:buNone/>
             </a:pPr>
             <a:r>
-              <a:rPr lang="en-US" sz="790" dirty="0">
+              <a:rPr lang="en-US" sz="1200" dirty="0">
                 <a:solidFill>
                   <a:srgbClr val="0F172A"/>
                 </a:solidFill>
               </a:rPr>
               <a:t>59.85%</a:t>
             </a:r>
-            <a:endParaRPr lang="en-US" sz="790" dirty="0"/>
+            <a:endParaRPr lang="en-US" sz="1200" dirty="0"/>
           </a:p>
         </p:txBody>
       </p:sp>
@@ -21697,14 +21697,14 @@
               <a:buNone/>
             </a:pPr>
             <a:r>
-              <a:rPr lang="en-US" sz="790" dirty="0">
+              <a:rPr lang="en-US" sz="1200" dirty="0">
                 <a:solidFill>
                   <a:srgbClr val="0F172A"/>
                 </a:solidFill>
               </a:rPr>
               <a:t>81.03%</a:t>
             </a:r>
-            <a:endParaRPr lang="en-US" sz="790" dirty="0"/>
+            <a:endParaRPr lang="en-US" sz="1200" dirty="0"/>
           </a:p>
         </p:txBody>
       </p:sp>
@@ -21741,14 +21741,14 @@
               <a:buNone/>
             </a:pPr>
             <a:r>
-              <a:rPr lang="en-US" sz="790" dirty="0">
+              <a:rPr lang="en-US" sz="1200" dirty="0">
                 <a:solidFill>
                   <a:srgbClr val="0F172A"/>
                 </a:solidFill>
               </a:rPr>
               <a:t>Main F1</a:t>
             </a:r>
-            <a:endParaRPr lang="en-US" sz="790" dirty="0"/>
+            <a:endParaRPr lang="en-US" sz="1200" dirty="0"/>
           </a:p>
         </p:txBody>
       </p:sp>
@@ -21785,14 +21785,14 @@
               <a:buNone/>
             </a:pPr>
             <a:r>
-              <a:rPr lang="en-US" sz="790" dirty="0">
+              <a:rPr lang="en-US" sz="1200" dirty="0">
                 <a:solidFill>
                   <a:srgbClr val="0F172A"/>
                 </a:solidFill>
               </a:rPr>
               <a:t>0.598 weighted</a:t>
             </a:r>
-            <a:endParaRPr lang="en-US" sz="790" dirty="0"/>
+            <a:endParaRPr lang="en-US" sz="1200" dirty="0"/>
           </a:p>
         </p:txBody>
       </p:sp>
@@ -21829,14 +21829,14 @@
               <a:buNone/>
             </a:pPr>
             <a:r>
-              <a:rPr lang="en-US" sz="790" dirty="0">
+              <a:rPr lang="en-US" sz="1200" dirty="0">
                 <a:solidFill>
                   <a:srgbClr val="0F172A"/>
                 </a:solidFill>
               </a:rPr>
               <a:t>0.699 Participated</a:t>
             </a:r>
-            <a:endParaRPr lang="en-US" sz="790" dirty="0"/>
+            <a:endParaRPr lang="en-US" sz="1200" dirty="0"/>
           </a:p>
         </p:txBody>
       </p:sp>
@@ -21873,14 +21873,14 @@
               <a:buNone/>
             </a:pPr>
             <a:r>
-              <a:rPr lang="en-US" sz="790" dirty="0">
+              <a:rPr lang="en-US" sz="1200" dirty="0">
                 <a:solidFill>
                   <a:srgbClr val="0F172A"/>
                 </a:solidFill>
               </a:rPr>
               <a:t>ROC-AUC</a:t>
             </a:r>
-            <a:endParaRPr lang="en-US" sz="790" dirty="0"/>
+            <a:endParaRPr lang="en-US" sz="1200" dirty="0"/>
           </a:p>
         </p:txBody>
       </p:sp>
@@ -21917,14 +21917,14 @@
               <a:buNone/>
             </a:pPr>
             <a:r>
-              <a:rPr lang="en-US" sz="790" dirty="0">
+              <a:rPr lang="en-US" sz="1200" dirty="0">
                 <a:solidFill>
                   <a:srgbClr val="0F172A"/>
                 </a:solidFill>
               </a:rPr>
               <a:t>~0.862 weighted</a:t>
             </a:r>
-            <a:endParaRPr lang="en-US" sz="790" dirty="0"/>
+            <a:endParaRPr lang="en-US" sz="1200" dirty="0"/>
           </a:p>
         </p:txBody>
       </p:sp>
@@ -21961,14 +21961,14 @@
               <a:buNone/>
             </a:pPr>
             <a:r>
-              <a:rPr lang="en-US" sz="790" dirty="0">
+              <a:rPr lang="en-US" sz="1200" dirty="0">
                 <a:solidFill>
                   <a:srgbClr val="0F172A"/>
                 </a:solidFill>
               </a:rPr>
               <a:t>0.879</a:t>
             </a:r>
-            <a:endParaRPr lang="en-US" sz="790" dirty="0"/>
+            <a:endParaRPr lang="en-US" sz="1200" dirty="0"/>
           </a:p>
         </p:txBody>
       </p:sp>
@@ -22005,14 +22005,14 @@
               <a:buNone/>
             </a:pPr>
             <a:r>
-              <a:rPr lang="en-US" sz="790" dirty="0">
+              <a:rPr lang="en-US" sz="1200" dirty="0">
                 <a:solidFill>
                   <a:srgbClr val="0F172A"/>
                 </a:solidFill>
               </a:rPr>
               <a:t>PRC-AUC</a:t>
             </a:r>
-            <a:endParaRPr lang="en-US" sz="790" dirty="0"/>
+            <a:endParaRPr lang="en-US" sz="1200" dirty="0"/>
           </a:p>
         </p:txBody>
       </p:sp>
@@ -22049,14 +22049,14 @@
               <a:buNone/>
             </a:pPr>
             <a:r>
-              <a:rPr lang="en-US" sz="790" dirty="0">
+              <a:rPr lang="en-US" sz="1200" dirty="0">
                 <a:solidFill>
                   <a:srgbClr val="0F172A"/>
                 </a:solidFill>
               </a:rPr>
               <a:t>~0.715 weighted</a:t>
             </a:r>
-            <a:endParaRPr lang="en-US" sz="790" dirty="0"/>
+            <a:endParaRPr lang="en-US" sz="1200" dirty="0"/>
           </a:p>
         </p:txBody>
       </p:sp>
@@ -22093,14 +22093,14 @@
               <a:buNone/>
             </a:pPr>
             <a:r>
-              <a:rPr lang="en-US" sz="790" dirty="0">
+              <a:rPr lang="en-US" sz="1200" dirty="0">
                 <a:solidFill>
                   <a:srgbClr val="0F172A"/>
                 </a:solidFill>
               </a:rPr>
               <a:t>0.827</a:t>
             </a:r>
-            <a:endParaRPr lang="en-US" sz="790" dirty="0"/>
+            <a:endParaRPr lang="en-US" sz="1200" dirty="0"/>
           </a:p>
         </p:txBody>
       </p:sp>
@@ -22137,14 +22137,14 @@
               <a:buNone/>
             </a:pPr>
             <a:r>
-              <a:rPr lang="en-US" sz="790" dirty="0">
+              <a:rPr lang="en-US" sz="1200" dirty="0">
                 <a:solidFill>
                   <a:srgbClr val="0F172A"/>
                 </a:solidFill>
               </a:rPr>
               <a:t>Kappa</a:t>
             </a:r>
-            <a:endParaRPr lang="en-US" sz="790" dirty="0"/>
+            <a:endParaRPr lang="en-US" sz="1200" dirty="0"/>
           </a:p>
         </p:txBody>
       </p:sp>
@@ -22181,14 +22181,14 @@
               <a:buNone/>
             </a:pPr>
             <a:r>
-              <a:rPr lang="en-US" sz="790" dirty="0">
+              <a:rPr lang="en-US" sz="1200" dirty="0">
                 <a:solidFill>
                   <a:srgbClr val="0F172A"/>
                 </a:solidFill>
               </a:rPr>
               <a:t>0.4811</a:t>
             </a:r>
-            <a:endParaRPr lang="en-US" sz="790" dirty="0"/>
+            <a:endParaRPr lang="en-US" sz="1200" dirty="0"/>
           </a:p>
         </p:txBody>
       </p:sp>
@@ -22225,14 +22225,14 @@
               <a:buNone/>
             </a:pPr>
             <a:r>
-              <a:rPr lang="en-US" sz="790" dirty="0">
+              <a:rPr lang="en-US" sz="1200" dirty="0">
                 <a:solidFill>
                   <a:srgbClr val="0F172A"/>
                 </a:solidFill>
               </a:rPr>
               <a:t>0.5641</a:t>
             </a:r>
-            <a:endParaRPr lang="en-US" sz="790" dirty="0"/>
+            <a:endParaRPr lang="en-US" sz="1200" dirty="0"/>
           </a:p>
         </p:txBody>
       </p:sp>
@@ -22269,14 +22269,14 @@
               <a:buNone/>
             </a:pPr>
             <a:r>
-              <a:rPr lang="en-US" sz="790" dirty="0">
+              <a:rPr lang="en-US" sz="1200" dirty="0">
                 <a:solidFill>
                   <a:srgbClr val="0F172A"/>
                 </a:solidFill>
               </a:rPr>
               <a:t>Key lesson</a:t>
             </a:r>
-            <a:endParaRPr lang="en-US" sz="790" dirty="0"/>
+            <a:endParaRPr lang="en-US" sz="1200" dirty="0"/>
           </a:p>
         </p:txBody>
       </p:sp>
@@ -22313,14 +22313,14 @@
               <a:buNone/>
             </a:pPr>
             <a:r>
-              <a:rPr lang="en-US" sz="790" dirty="0">
+              <a:rPr lang="en-US" sz="1200" dirty="0">
                 <a:solidFill>
                   <a:srgbClr val="0F172A"/>
                 </a:solidFill>
               </a:rPr>
               <a:t>Context beats 4-feature reduction</a:t>
             </a:r>
-            <a:endParaRPr lang="en-US" sz="790" dirty="0"/>
+            <a:endParaRPr lang="en-US" sz="1200" dirty="0"/>
           </a:p>
         </p:txBody>
       </p:sp>
@@ -22357,14 +22357,14 @@
               <a:buNone/>
             </a:pPr>
             <a:r>
-              <a:rPr lang="en-US" sz="790" dirty="0">
+              <a:rPr lang="en-US" sz="1200" dirty="0">
                 <a:solidFill>
                   <a:srgbClr val="0F172A"/>
                 </a:solidFill>
               </a:rPr>
               <a:t>K=12 improves minority-class balance</a:t>
             </a:r>
-            <a:endParaRPr lang="en-US" sz="790" dirty="0"/>
+            <a:endParaRPr lang="en-US" sz="1200" dirty="0"/>
           </a:p>
         </p:txBody>
       </p:sp>
@@ -26028,7 +26028,7 @@
                   <a:srgbClr val="334155"/>
                 </a:solidFill>
               </a:rPr>
-              <a:t>• Year‑1 CGPA is ordinal in meaning but modeled as nominal classes.</a:t>
+              <a:t>• CGPA is ordinal in meaning but modeled as nominal classes.</a:t>
             </a:r>
             <a:endParaRPr lang="en-US" sz="1340" dirty="0"/>
           </a:p>
@@ -26053,7 +26053,7 @@
         </p:spPr>
         <p:txBody>
           <a:bodyPr wrap="square" lIns="0" tIns="0" rIns="0" bIns="0" rtlCol="0" anchor="ctr">
-            <a:normAutofit fontScale="92500"/>
+            <a:normAutofit/>
           </a:bodyPr>
           <a:lstStyle/>
           <a:p>
@@ -26066,7 +26066,7 @@
                   <a:srgbClr val="334155"/>
                 </a:solidFill>
               </a:rPr>
-              <a:t>• Year‑1 historical WEKA exploration occurred before the final fixed split.</a:t>
+              <a:t>• historical WEKA exploration occurred before the final fixed split.</a:t>
             </a:r>
             <a:endParaRPr lang="en-US" sz="1340" dirty="0"/>
           </a:p>
@@ -32265,14 +32265,14 @@
               <a:buNone/>
             </a:pPr>
             <a:r>
-              <a:rPr lang="en-US" sz="910" b="1" dirty="0">
+              <a:rPr lang="en-US" sz="1400" b="1" dirty="0">
                 <a:solidFill>
                   <a:srgbClr val="FFFFFF"/>
                 </a:solidFill>
               </a:rPr>
               <a:t>Dimension</a:t>
             </a:r>
-            <a:endParaRPr lang="en-US" sz="910" dirty="0"/>
+            <a:endParaRPr lang="en-US" sz="1400" dirty="0"/>
           </a:p>
         </p:txBody>
       </p:sp>
@@ -32309,14 +32309,14 @@
               <a:buNone/>
             </a:pPr>
             <a:r>
-              <a:rPr lang="en-US" sz="910" b="1" dirty="0">
+              <a:rPr lang="en-US" sz="1400" b="1" dirty="0">
                 <a:solidFill>
                   <a:srgbClr val="FFFFFF"/>
                 </a:solidFill>
               </a:rPr>
               <a:t>Reference paper</a:t>
             </a:r>
-            <a:endParaRPr lang="en-US" sz="910" dirty="0"/>
+            <a:endParaRPr lang="en-US" sz="1400" dirty="0"/>
           </a:p>
         </p:txBody>
       </p:sp>
@@ -32353,14 +32353,14 @@
               <a:buNone/>
             </a:pPr>
             <a:r>
-              <a:rPr lang="en-US" sz="910" b="1" dirty="0">
+              <a:rPr lang="en-US" sz="1400" b="1" dirty="0">
                 <a:solidFill>
                   <a:srgbClr val="FFFFFF"/>
                 </a:solidFill>
               </a:rPr>
               <a:t>This project</a:t>
             </a:r>
-            <a:endParaRPr lang="en-US" sz="910" dirty="0"/>
+            <a:endParaRPr lang="en-US" sz="1400" dirty="0"/>
           </a:p>
         </p:txBody>
       </p:sp>
@@ -32397,14 +32397,14 @@
               <a:buNone/>
             </a:pPr>
             <a:r>
-              <a:rPr lang="en-US" sz="880" dirty="0">
+              <a:rPr lang="en-US" sz="1200" dirty="0">
                 <a:solidFill>
                   <a:srgbClr val="0F172A"/>
                 </a:solidFill>
               </a:rPr>
               <a:t>Primary output</a:t>
             </a:r>
-            <a:endParaRPr lang="en-US" sz="880" dirty="0"/>
+            <a:endParaRPr lang="en-US" sz="1200" dirty="0"/>
           </a:p>
         </p:txBody>
       </p:sp>
@@ -32441,14 +32441,14 @@
               <a:buNone/>
             </a:pPr>
             <a:r>
-              <a:rPr lang="en-US" sz="880" dirty="0">
+              <a:rPr lang="en-US" sz="1200" dirty="0">
                 <a:solidFill>
                   <a:srgbClr val="0F172A"/>
                 </a:solidFill>
               </a:rPr>
               <a:t>Dataset article and release</a:t>
             </a:r>
-            <a:endParaRPr lang="en-US" sz="880" dirty="0"/>
+            <a:endParaRPr lang="en-US" sz="1200" dirty="0"/>
           </a:p>
         </p:txBody>
       </p:sp>
@@ -32485,14 +32485,14 @@
               <a:buNone/>
             </a:pPr>
             <a:r>
-              <a:rPr lang="en-US" sz="880" dirty="0">
+              <a:rPr lang="en-US" sz="1200" dirty="0">
                 <a:solidFill>
                   <a:srgbClr val="0F172A"/>
                 </a:solidFill>
               </a:rPr>
               <a:t>Predictive modeling workflow</a:t>
             </a:r>
-            <a:endParaRPr lang="en-US" sz="880" dirty="0"/>
+            <a:endParaRPr lang="en-US" sz="1200" dirty="0"/>
           </a:p>
         </p:txBody>
       </p:sp>
@@ -32529,14 +32529,14 @@
               <a:buNone/>
             </a:pPr>
             <a:r>
-              <a:rPr lang="en-US" sz="880" dirty="0">
+              <a:rPr lang="en-US" sz="1200" dirty="0">
                 <a:solidFill>
                   <a:srgbClr val="0F172A"/>
                 </a:solidFill>
               </a:rPr>
               <a:t>Data scope</a:t>
             </a:r>
-            <a:endParaRPr lang="en-US" sz="880" dirty="0"/>
+            <a:endParaRPr lang="en-US" sz="1200" dirty="0"/>
           </a:p>
         </p:txBody>
       </p:sp>
@@ -32573,14 +32573,14 @@
               <a:buNone/>
             </a:pPr>
             <a:r>
-              <a:rPr lang="en-US" sz="880" dirty="0">
+              <a:rPr lang="en-US" sz="1200" dirty="0">
                 <a:solidFill>
                   <a:srgbClr val="0F172A"/>
                 </a:solidFill>
               </a:rPr>
               <a:t>Colombian engineering assessments</a:t>
             </a:r>
-            <a:endParaRPr lang="en-US" sz="880" dirty="0"/>
+            <a:endParaRPr lang="en-US" sz="1200" dirty="0"/>
           </a:p>
         </p:txBody>
       </p:sp>
@@ -32617,14 +32617,14 @@
               <a:buNone/>
             </a:pPr>
             <a:r>
-              <a:rPr lang="en-US" sz="880" dirty="0">
+              <a:rPr lang="en-US" sz="1200" dirty="0">
                 <a:solidFill>
                   <a:srgbClr val="0F172A"/>
                 </a:solidFill>
               </a:rPr>
               <a:t>Bangladesh engineering assessments</a:t>
             </a:r>
-            <a:endParaRPr lang="en-US" sz="880" dirty="0"/>
+            <a:endParaRPr lang="en-US" sz="1200" dirty="0"/>
           </a:p>
         </p:txBody>
       </p:sp>
@@ -32661,14 +32661,14 @@
               <a:buNone/>
             </a:pPr>
             <a:r>
-              <a:rPr lang="en-US" sz="880" dirty="0">
+              <a:rPr lang="en-US" sz="1200" dirty="0">
                 <a:solidFill>
                   <a:srgbClr val="0F172A"/>
                 </a:solidFill>
               </a:rPr>
               <a:t>Model benchmark</a:t>
             </a:r>
-            <a:endParaRPr lang="en-US" sz="880" dirty="0"/>
+            <a:endParaRPr lang="en-US" sz="1200" dirty="0"/>
           </a:p>
         </p:txBody>
       </p:sp>
@@ -32705,14 +32705,14 @@
               <a:buNone/>
             </a:pPr>
             <a:r>
-              <a:rPr lang="en-US" sz="880" dirty="0">
+              <a:rPr lang="en-US" sz="1200" dirty="0">
                 <a:solidFill>
                   <a:srgbClr val="0F172A"/>
                 </a:solidFill>
               </a:rPr>
               <a:t>No equivalent classifier benchmark</a:t>
             </a:r>
-            <a:endParaRPr lang="en-US" sz="880" dirty="0"/>
+            <a:endParaRPr lang="en-US" sz="1200" dirty="0"/>
           </a:p>
         </p:txBody>
       </p:sp>
@@ -32749,14 +32749,14 @@
               <a:buNone/>
             </a:pPr>
             <a:r>
-              <a:rPr lang="en-US" sz="880" dirty="0">
+              <a:rPr lang="en-US" sz="1200" dirty="0">
                 <a:solidFill>
                   <a:srgbClr val="0F172A"/>
                 </a:solidFill>
               </a:rPr>
               <a:t>WEKA + Python benchmarks</a:t>
             </a:r>
-            <a:endParaRPr lang="en-US" sz="880" dirty="0"/>
+            <a:endParaRPr lang="en-US" sz="1200" dirty="0"/>
           </a:p>
         </p:txBody>
       </p:sp>
@@ -32793,14 +32793,14 @@
               <a:buNone/>
             </a:pPr>
             <a:r>
-              <a:rPr lang="en-US" sz="880" dirty="0">
+              <a:rPr lang="en-US" sz="1200" dirty="0">
                 <a:solidFill>
                   <a:srgbClr val="0F172A"/>
                 </a:solidFill>
               </a:rPr>
               <a:t>Final tasks</a:t>
             </a:r>
-            <a:endParaRPr lang="en-US" sz="880" dirty="0"/>
+            <a:endParaRPr lang="en-US" sz="1200" dirty="0"/>
           </a:p>
         </p:txBody>
       </p:sp>
@@ -32837,14 +32837,14 @@
               <a:buNone/>
             </a:pPr>
             <a:r>
-              <a:rPr lang="en-US" sz="880" dirty="0">
+              <a:rPr lang="en-US" sz="1200" dirty="0">
                 <a:solidFill>
                   <a:srgbClr val="0F172A"/>
                 </a:solidFill>
               </a:rPr>
               <a:t>Not the article focus</a:t>
             </a:r>
-            <a:endParaRPr lang="en-US" sz="880" dirty="0"/>
+            <a:endParaRPr lang="en-US" sz="1200" dirty="0"/>
           </a:p>
         </p:txBody>
       </p:sp>
@@ -32881,14 +32881,14 @@
               <a:buNone/>
             </a:pPr>
             <a:r>
-              <a:rPr lang="en-US" sz="880" dirty="0">
+              <a:rPr lang="en-US" sz="1200" dirty="0">
                 <a:solidFill>
                   <a:srgbClr val="0F172A"/>
                 </a:solidFill>
               </a:rPr>
               <a:t>CGPA + ResearchParticipation</a:t>
             </a:r>
-            <a:endParaRPr lang="en-US" sz="880" dirty="0"/>
+            <a:endParaRPr lang="en-US" sz="1200" dirty="0"/>
           </a:p>
         </p:txBody>
       </p:sp>
@@ -33124,14 +33124,14 @@
               <a:buNone/>
             </a:pPr>
             <a:r>
-              <a:rPr lang="en-US" sz="910" b="1" dirty="0">
+              <a:rPr lang="en-US" sz="1200" b="1" dirty="0">
                 <a:solidFill>
                   <a:srgbClr val="FFFFFF"/>
                 </a:solidFill>
               </a:rPr>
               <a:t>Question</a:t>
             </a:r>
-            <a:endParaRPr lang="en-US" sz="910" dirty="0"/>
+            <a:endParaRPr lang="en-US" sz="1200" dirty="0"/>
           </a:p>
         </p:txBody>
       </p:sp>
@@ -33168,14 +33168,14 @@
               <a:buNone/>
             </a:pPr>
             <a:r>
-              <a:rPr lang="en-US" sz="910" b="1" dirty="0">
+              <a:rPr lang="en-US" sz="1200" b="1" dirty="0">
                 <a:solidFill>
                   <a:srgbClr val="FFFFFF"/>
                 </a:solidFill>
               </a:rPr>
               <a:t>Operational task</a:t>
             </a:r>
-            <a:endParaRPr lang="en-US" sz="910" dirty="0"/>
+            <a:endParaRPr lang="en-US" sz="1200" dirty="0"/>
           </a:p>
         </p:txBody>
       </p:sp>
@@ -33212,14 +33212,14 @@
               <a:buNone/>
             </a:pPr>
             <a:r>
-              <a:rPr lang="en-US" sz="910" b="1" dirty="0">
+              <a:rPr lang="en-US" sz="1200" b="1" dirty="0">
                 <a:solidFill>
                   <a:srgbClr val="FFFFFF"/>
                 </a:solidFill>
               </a:rPr>
               <a:t>Information scope</a:t>
             </a:r>
-            <a:endParaRPr lang="en-US" sz="910" dirty="0"/>
+            <a:endParaRPr lang="en-US" sz="1200" dirty="0"/>
           </a:p>
         </p:txBody>
       </p:sp>
@@ -33256,14 +33256,14 @@
               <a:buNone/>
             </a:pPr>
             <a:r>
-              <a:rPr lang="en-US" sz="960" dirty="0">
+              <a:rPr lang="en-US" sz="1200" dirty="0">
                 <a:solidFill>
                   <a:srgbClr val="0F172A"/>
                 </a:solidFill>
               </a:rPr>
               <a:t>RQ1</a:t>
             </a:r>
-            <a:endParaRPr lang="en-US" sz="960" dirty="0"/>
+            <a:endParaRPr lang="en-US" sz="1200" dirty="0"/>
           </a:p>
         </p:txBody>
       </p:sp>
@@ -33300,14 +33300,14 @@
               <a:buNone/>
             </a:pPr>
             <a:r>
-              <a:rPr lang="en-US" sz="960" dirty="0">
+              <a:rPr lang="en-US" sz="1200" dirty="0">
                 <a:solidFill>
                   <a:srgbClr val="0F172A"/>
                 </a:solidFill>
               </a:rPr>
               <a:t>Predict CGPA category</a:t>
             </a:r>
-            <a:endParaRPr lang="en-US" sz="960" dirty="0"/>
+            <a:endParaRPr lang="en-US" sz="1200" dirty="0"/>
           </a:p>
         </p:txBody>
       </p:sp>
@@ -33344,14 +33344,14 @@
               <a:buNone/>
             </a:pPr>
             <a:r>
-              <a:rPr lang="en-US" sz="960" dirty="0">
+              <a:rPr lang="en-US" sz="1200" dirty="0">
                 <a:solidFill>
                   <a:srgbClr val="0F172A"/>
                 </a:solidFill>
               </a:rPr>
               <a:t>Use pre-/entry-level information; remove later university outcomes</a:t>
             </a:r>
-            <a:endParaRPr lang="en-US" sz="960" dirty="0"/>
+            <a:endParaRPr lang="en-US" sz="1200" dirty="0"/>
           </a:p>
         </p:txBody>
       </p:sp>
@@ -33388,14 +33388,14 @@
               <a:buNone/>
             </a:pPr>
             <a:r>
-              <a:rPr lang="en-US" sz="960" dirty="0">
+              <a:rPr lang="en-US" sz="1200" dirty="0">
                 <a:solidFill>
                   <a:srgbClr val="0F172A"/>
                 </a:solidFill>
               </a:rPr>
               <a:t>RQ2</a:t>
             </a:r>
-            <a:endParaRPr lang="en-US" sz="960" dirty="0"/>
+            <a:endParaRPr lang="en-US" sz="1200" dirty="0"/>
           </a:p>
         </p:txBody>
       </p:sp>
@@ -33432,14 +33432,14 @@
               <a:buNone/>
             </a:pPr>
             <a:r>
-              <a:rPr lang="en-US" sz="960" dirty="0">
+              <a:rPr lang="en-US" sz="1200" dirty="0">
                 <a:solidFill>
                   <a:srgbClr val="0F172A"/>
                 </a:solidFill>
               </a:rPr>
               <a:t>Predict ResearchParticipation</a:t>
             </a:r>
-            <a:endParaRPr lang="en-US" sz="960" dirty="0"/>
+            <a:endParaRPr lang="en-US" sz="1200" dirty="0"/>
           </a:p>
         </p:txBody>
       </p:sp>
@@ -33476,14 +33476,14 @@
               <a:buNone/>
             </a:pPr>
             <a:r>
-              <a:rPr lang="en-US" sz="960" dirty="0">
+              <a:rPr lang="en-US" sz="1200" dirty="0">
                 <a:solidFill>
                   <a:srgbClr val="0F172A"/>
                 </a:solidFill>
               </a:rPr>
               <a:t>Use cleaned contextual predictors plus Year1CGPA</a:t>
             </a:r>
-            <a:endParaRPr lang="en-US" sz="960" dirty="0"/>
+            <a:endParaRPr lang="en-US" sz="1200" dirty="0"/>
           </a:p>
         </p:txBody>
       </p:sp>
@@ -33520,14 +33520,14 @@
               <a:buNone/>
             </a:pPr>
             <a:r>
-              <a:rPr lang="en-US" sz="960" dirty="0">
+              <a:rPr lang="en-US" sz="1200" dirty="0">
                 <a:solidFill>
                   <a:srgbClr val="0F172A"/>
                 </a:solidFill>
               </a:rPr>
               <a:t>Method</a:t>
             </a:r>
-            <a:endParaRPr lang="en-US" sz="960" dirty="0"/>
+            <a:endParaRPr lang="en-US" sz="1200" dirty="0"/>
           </a:p>
         </p:txBody>
       </p:sp>
@@ -33564,14 +33564,14 @@
               <a:buNone/>
             </a:pPr>
             <a:r>
-              <a:rPr lang="en-US" sz="960" dirty="0">
+              <a:rPr lang="en-US" sz="1200" dirty="0">
                 <a:solidFill>
                   <a:srgbClr val="0F172A"/>
                 </a:solidFill>
               </a:rPr>
               <a:t>Do compact feature subsets preserve performance?</a:t>
             </a:r>
-            <a:endParaRPr lang="en-US" sz="960" dirty="0"/>
+            <a:endParaRPr lang="en-US" sz="1200" dirty="0"/>
           </a:p>
         </p:txBody>
       </p:sp>
@@ -33608,14 +33608,14 @@
               <a:buNone/>
             </a:pPr>
             <a:r>
-              <a:rPr lang="en-US" sz="960" dirty="0">
+              <a:rPr lang="en-US" sz="1200" dirty="0">
                 <a:solidFill>
                   <a:srgbClr val="0F172A"/>
                 </a:solidFill>
               </a:rPr>
               <a:t>Test with leakage-controlled feature selection</a:t>
             </a:r>
-            <a:endParaRPr lang="en-US" sz="960" dirty="0"/>
+            <a:endParaRPr lang="en-US" sz="1200" dirty="0"/>
           </a:p>
         </p:txBody>
       </p:sp>
@@ -34121,14 +34121,14 @@
               <a:buNone/>
             </a:pPr>
             <a:r>
-              <a:rPr lang="en-US" sz="910" b="1" dirty="0">
+              <a:rPr lang="en-US" sz="1200" b="1" dirty="0">
                 <a:solidFill>
                   <a:srgbClr val="FFFFFF"/>
                 </a:solidFill>
               </a:rPr>
               <a:t>Stage</a:t>
             </a:r>
-            <a:endParaRPr lang="en-US" sz="910" dirty="0"/>
+            <a:endParaRPr lang="en-US" sz="1200" dirty="0"/>
           </a:p>
         </p:txBody>
       </p:sp>
@@ -34165,14 +34165,14 @@
               <a:buNone/>
             </a:pPr>
             <a:r>
-              <a:rPr lang="en-US" sz="910" b="1" dirty="0">
+              <a:rPr lang="en-US" sz="1200" b="1" dirty="0">
                 <a:solidFill>
                   <a:srgbClr val="FFFFFF"/>
                 </a:solidFill>
               </a:rPr>
               <a:t>Rows</a:t>
             </a:r>
-            <a:endParaRPr lang="en-US" sz="910" dirty="0"/>
+            <a:endParaRPr lang="en-US" sz="1200" dirty="0"/>
           </a:p>
         </p:txBody>
       </p:sp>
@@ -34209,14 +34209,14 @@
               <a:buNone/>
             </a:pPr>
             <a:r>
-              <a:rPr lang="en-US" sz="910" b="1" dirty="0">
+              <a:rPr lang="en-US" sz="1200" b="1" dirty="0">
                 <a:solidFill>
                   <a:srgbClr val="FFFFFF"/>
                 </a:solidFill>
               </a:rPr>
               <a:t>Columns / attributes</a:t>
             </a:r>
-            <a:endParaRPr lang="en-US" sz="910" dirty="0"/>
+            <a:endParaRPr lang="en-US" sz="1200" dirty="0"/>
           </a:p>
         </p:txBody>
       </p:sp>
@@ -34253,14 +34253,14 @@
               <a:buNone/>
             </a:pPr>
             <a:r>
-              <a:rPr lang="en-US" sz="910" b="1" dirty="0">
+              <a:rPr lang="en-US" sz="1200" b="1" dirty="0">
                 <a:solidFill>
                   <a:srgbClr val="FFFFFF"/>
                 </a:solidFill>
               </a:rPr>
               <a:t>Purpose</a:t>
             </a:r>
-            <a:endParaRPr lang="en-US" sz="910" dirty="0"/>
+            <a:endParaRPr lang="en-US" sz="1200" dirty="0"/>
           </a:p>
         </p:txBody>
       </p:sp>
@@ -34297,14 +34297,14 @@
               <a:buNone/>
             </a:pPr>
             <a:r>
-              <a:rPr lang="en-US" sz="920" dirty="0">
+              <a:rPr lang="en-US" sz="1200" dirty="0">
                 <a:solidFill>
                   <a:srgbClr val="0F172A"/>
                 </a:solidFill>
               </a:rPr>
               <a:t>Raw project dataset</a:t>
             </a:r>
-            <a:endParaRPr lang="en-US" sz="920" dirty="0"/>
+            <a:endParaRPr lang="en-US" sz="1200" dirty="0"/>
           </a:p>
         </p:txBody>
       </p:sp>
@@ -34341,14 +34341,14 @@
               <a:buNone/>
             </a:pPr>
             <a:r>
-              <a:rPr lang="en-US" sz="920" dirty="0">
+              <a:rPr lang="en-US" sz="1200" dirty="0">
                 <a:solidFill>
                   <a:srgbClr val="0F172A"/>
                 </a:solidFill>
               </a:rPr>
               <a:t>3,516</a:t>
             </a:r>
-            <a:endParaRPr lang="en-US" sz="920" dirty="0"/>
+            <a:endParaRPr lang="en-US" sz="1200" dirty="0"/>
           </a:p>
         </p:txBody>
       </p:sp>
@@ -34385,14 +34385,14 @@
               <a:buNone/>
             </a:pPr>
             <a:r>
-              <a:rPr lang="en-US" sz="920" dirty="0">
+              <a:rPr lang="en-US" sz="1200" dirty="0">
                 <a:solidFill>
                   <a:srgbClr val="0F172A"/>
                 </a:solidFill>
               </a:rPr>
               <a:t>32</a:t>
             </a:r>
-            <a:endParaRPr lang="en-US" sz="920" dirty="0"/>
+            <a:endParaRPr lang="en-US" sz="1200" dirty="0"/>
           </a:p>
         </p:txBody>
       </p:sp>
@@ -34429,14 +34429,14 @@
               <a:buNone/>
             </a:pPr>
             <a:r>
-              <a:rPr lang="en-US" sz="920" dirty="0">
+              <a:rPr lang="en-US" sz="1200" dirty="0">
                 <a:solidFill>
                   <a:srgbClr val="0F172A"/>
                 </a:solidFill>
               </a:rPr>
               <a:t>Starting point</a:t>
             </a:r>
-            <a:endParaRPr lang="en-US" sz="920" dirty="0"/>
+            <a:endParaRPr lang="en-US" sz="1200" dirty="0"/>
           </a:p>
         </p:txBody>
       </p:sp>
@@ -34473,14 +34473,14 @@
               <a:buNone/>
             </a:pPr>
             <a:r>
-              <a:rPr lang="en-US" sz="920" dirty="0">
+              <a:rPr lang="en-US" sz="1200" dirty="0">
                 <a:solidFill>
                   <a:srgbClr val="0F172A"/>
                 </a:solidFill>
               </a:rPr>
               <a:t>Year‑1 final table</a:t>
             </a:r>
-            <a:endParaRPr lang="en-US" sz="920" dirty="0"/>
+            <a:endParaRPr lang="en-US" sz="1200" dirty="0"/>
           </a:p>
         </p:txBody>
       </p:sp>
@@ -34517,14 +34517,14 @@
               <a:buNone/>
             </a:pPr>
             <a:r>
-              <a:rPr lang="en-US" sz="920" dirty="0">
+              <a:rPr lang="en-US" sz="1200" dirty="0">
                 <a:solidFill>
                   <a:srgbClr val="0F172A"/>
                 </a:solidFill>
               </a:rPr>
               <a:t>3,516</a:t>
             </a:r>
-            <a:endParaRPr lang="en-US" sz="920" dirty="0"/>
+            <a:endParaRPr lang="en-US" sz="1200" dirty="0"/>
           </a:p>
         </p:txBody>
       </p:sp>
@@ -34561,14 +34561,14 @@
               <a:buNone/>
             </a:pPr>
             <a:r>
-              <a:rPr lang="en-US" sz="920" dirty="0">
+              <a:rPr lang="en-US" sz="1200" dirty="0">
                 <a:solidFill>
                   <a:srgbClr val="0F172A"/>
                 </a:solidFill>
               </a:rPr>
               <a:t>29 = 28 predictors + target</a:t>
             </a:r>
-            <a:endParaRPr lang="en-US" sz="920" dirty="0"/>
+            <a:endParaRPr lang="en-US" sz="1200" dirty="0"/>
           </a:p>
         </p:txBody>
       </p:sp>
@@ -34605,14 +34605,14 @@
               <a:buNone/>
             </a:pPr>
             <a:r>
-              <a:rPr lang="en-US" sz="920" dirty="0">
+              <a:rPr lang="en-US" sz="1200" dirty="0">
                 <a:solidFill>
                   <a:srgbClr val="0F172A"/>
                 </a:solidFill>
               </a:rPr>
               <a:t>Five-class CGPA prediction</a:t>
             </a:r>
-            <a:endParaRPr lang="en-US" sz="920" dirty="0"/>
+            <a:endParaRPr lang="en-US" sz="1200" dirty="0"/>
           </a:p>
         </p:txBody>
       </p:sp>
@@ -34649,14 +34649,14 @@
               <a:buNone/>
             </a:pPr>
             <a:r>
-              <a:rPr lang="en-US" sz="920" dirty="0">
+              <a:rPr lang="en-US" sz="1200" dirty="0">
                 <a:solidFill>
                   <a:srgbClr val="0F172A"/>
                 </a:solidFill>
               </a:rPr>
               <a:t>ResearchParticipation table</a:t>
             </a:r>
-            <a:endParaRPr lang="en-US" sz="920" dirty="0"/>
+            <a:endParaRPr lang="en-US" sz="1200" dirty="0"/>
           </a:p>
         </p:txBody>
       </p:sp>
@@ -34693,14 +34693,14 @@
               <a:buNone/>
             </a:pPr>
             <a:r>
-              <a:rPr lang="en-US" sz="920" dirty="0">
+              <a:rPr lang="en-US" sz="1200" dirty="0">
                 <a:solidFill>
                   <a:srgbClr val="0F172A"/>
                 </a:solidFill>
               </a:rPr>
               <a:t>3,475</a:t>
             </a:r>
-            <a:endParaRPr lang="en-US" sz="920" dirty="0"/>
+            <a:endParaRPr lang="en-US" sz="1200" dirty="0"/>
           </a:p>
         </p:txBody>
       </p:sp>
@@ -34737,14 +34737,14 @@
               <a:buNone/>
             </a:pPr>
             <a:r>
-              <a:rPr lang="en-US" sz="920" dirty="0">
+              <a:rPr lang="en-US" sz="1200" dirty="0">
                 <a:solidFill>
                   <a:srgbClr val="0F172A"/>
                 </a:solidFill>
               </a:rPr>
               <a:t>29 = 28 predictors + target</a:t>
             </a:r>
-            <a:endParaRPr lang="en-US" sz="920" dirty="0"/>
+            <a:endParaRPr lang="en-US" sz="1200" dirty="0"/>
           </a:p>
         </p:txBody>
       </p:sp>
@@ -34781,14 +34781,14 @@
               <a:buNone/>
             </a:pPr>
             <a:r>
-              <a:rPr lang="en-US" sz="920" dirty="0">
+              <a:rPr lang="en-US" sz="1200" dirty="0">
                 <a:solidFill>
                   <a:srgbClr val="0F172A"/>
                 </a:solidFill>
               </a:rPr>
               <a:t>Binary participation prediction</a:t>
             </a:r>
-            <a:endParaRPr lang="en-US" sz="920" dirty="0"/>
+            <a:endParaRPr lang="en-US" sz="1200" dirty="0"/>
           </a:p>
         </p:txBody>
       </p:sp>
@@ -35172,14 +35172,14 @@
               <a:buNone/>
             </a:pPr>
             <a:r>
-              <a:rPr lang="en-US" sz="970" b="1" dirty="0">
+              <a:rPr lang="en-US" sz="1200" b="1" dirty="0">
                 <a:solidFill>
                   <a:srgbClr val="FFFFFF"/>
                 </a:solidFill>
               </a:rPr>
               <a:t>Target</a:t>
             </a:r>
-            <a:endParaRPr lang="en-US" sz="970" dirty="0"/>
+            <a:endParaRPr lang="en-US" sz="1200" dirty="0"/>
           </a:p>
         </p:txBody>
       </p:sp>
@@ -35216,14 +35216,14 @@
               <a:buNone/>
             </a:pPr>
             <a:r>
-              <a:rPr lang="en-US" sz="950" dirty="0">
+              <a:rPr lang="en-US" sz="1200" dirty="0">
                 <a:solidFill>
                   <a:srgbClr val="0F172A"/>
                 </a:solidFill>
               </a:rPr>
               <a:t>Define outcome + horizon</a:t>
             </a:r>
-            <a:endParaRPr lang="en-US" sz="950" dirty="0"/>
+            <a:endParaRPr lang="en-US" sz="1200" dirty="0"/>
           </a:p>
         </p:txBody>
       </p:sp>
@@ -35284,14 +35284,14 @@
               <a:buNone/>
             </a:pPr>
             <a:r>
-              <a:rPr lang="en-US" sz="970" b="1" dirty="0">
+              <a:rPr lang="en-US" sz="1200" b="1" dirty="0">
                 <a:solidFill>
                   <a:srgbClr val="FFFFFF"/>
                 </a:solidFill>
               </a:rPr>
               <a:t>Clean</a:t>
             </a:r>
-            <a:endParaRPr lang="en-US" sz="970" dirty="0"/>
+            <a:endParaRPr lang="en-US" sz="1200" dirty="0"/>
           </a:p>
         </p:txBody>
       </p:sp>
@@ -35328,14 +35328,14 @@
               <a:buNone/>
             </a:pPr>
             <a:r>
-              <a:rPr lang="en-US" sz="950" dirty="0">
+              <a:rPr lang="en-US" sz="1200" dirty="0">
                 <a:solidFill>
                   <a:srgbClr val="0F172A"/>
                 </a:solidFill>
               </a:rPr>
               <a:t>Prepare modeling table</a:t>
             </a:r>
-            <a:endParaRPr lang="en-US" sz="950" dirty="0"/>
+            <a:endParaRPr lang="en-US" sz="1200" dirty="0"/>
           </a:p>
         </p:txBody>
       </p:sp>
@@ -35396,14 +35396,14 @@
               <a:buNone/>
             </a:pPr>
             <a:r>
-              <a:rPr lang="en-US" sz="970" b="1" dirty="0">
+              <a:rPr lang="en-US" sz="1200" b="1" dirty="0">
                 <a:solidFill>
                   <a:srgbClr val="FFFFFF"/>
                 </a:solidFill>
               </a:rPr>
               <a:t>Benchmark</a:t>
             </a:r>
-            <a:endParaRPr lang="en-US" sz="970" dirty="0"/>
+            <a:endParaRPr lang="en-US" sz="1200" dirty="0"/>
           </a:p>
         </p:txBody>
       </p:sp>
@@ -35440,14 +35440,14 @@
               <a:buNone/>
             </a:pPr>
             <a:r>
-              <a:rPr lang="en-US" sz="950" dirty="0">
+              <a:rPr lang="en-US" sz="1200" dirty="0">
                 <a:solidFill>
                   <a:srgbClr val="0F172A"/>
                 </a:solidFill>
               </a:rPr>
               <a:t>Many families in WEKA</a:t>
             </a:r>
-            <a:endParaRPr lang="en-US" sz="950" dirty="0"/>
+            <a:endParaRPr lang="en-US" sz="1200" dirty="0"/>
           </a:p>
         </p:txBody>
       </p:sp>
@@ -35508,14 +35508,14 @@
               <a:buNone/>
             </a:pPr>
             <a:r>
-              <a:rPr lang="en-US" sz="970" b="1" dirty="0">
+              <a:rPr lang="en-US" sz="1200" b="1" dirty="0">
                 <a:solidFill>
                   <a:srgbClr val="FFFFFF"/>
                 </a:solidFill>
               </a:rPr>
               <a:t>Tune</a:t>
             </a:r>
-            <a:endParaRPr lang="en-US" sz="970" dirty="0"/>
+            <a:endParaRPr lang="en-US" sz="1200" dirty="0"/>
           </a:p>
         </p:txBody>
       </p:sp>
@@ -35552,14 +35552,14 @@
               <a:buNone/>
             </a:pPr>
             <a:r>
-              <a:rPr lang="en-US" sz="950" dirty="0">
+              <a:rPr lang="en-US" sz="1200" dirty="0">
                 <a:solidFill>
                   <a:srgbClr val="0F172A"/>
                 </a:solidFill>
               </a:rPr>
               <a:t>Restricted RF tuning</a:t>
             </a:r>
-            <a:endParaRPr lang="en-US" sz="950" dirty="0"/>
+            <a:endParaRPr lang="en-US" sz="1200" dirty="0"/>
           </a:p>
         </p:txBody>
       </p:sp>
@@ -35620,14 +35620,14 @@
               <a:buNone/>
             </a:pPr>
             <a:r>
-              <a:rPr lang="en-US" sz="970" b="1" dirty="0">
+              <a:rPr lang="en-US" sz="1200" b="1" dirty="0">
                 <a:solidFill>
                   <a:srgbClr val="FFFFFF"/>
                 </a:solidFill>
               </a:rPr>
               <a:t>Freeze</a:t>
             </a:r>
-            <a:endParaRPr lang="en-US" sz="970" dirty="0"/>
+            <a:endParaRPr lang="en-US" sz="1200" dirty="0"/>
           </a:p>
         </p:txBody>
       </p:sp>
@@ -35664,14 +35664,14 @@
               <a:buNone/>
             </a:pPr>
             <a:r>
-              <a:rPr lang="en-US" sz="950" dirty="0">
+              <a:rPr lang="en-US" sz="1200" dirty="0">
                 <a:solidFill>
                   <a:srgbClr val="0F172A"/>
                 </a:solidFill>
               </a:rPr>
               <a:t>Lock config</a:t>
             </a:r>
-            <a:endParaRPr lang="en-US" sz="950" dirty="0"/>
+            <a:endParaRPr lang="en-US" sz="1200" dirty="0"/>
           </a:p>
         </p:txBody>
       </p:sp>
@@ -35820,14 +35820,14 @@
               <a:buNone/>
             </a:pPr>
             <a:r>
-              <a:rPr lang="en-US" sz="910" b="1" dirty="0">
+              <a:rPr lang="en-US" sz="1400" b="1" dirty="0">
                 <a:solidFill>
                   <a:srgbClr val="FFFFFF"/>
                 </a:solidFill>
               </a:rPr>
               <a:t>Phase</a:t>
             </a:r>
-            <a:endParaRPr lang="en-US" sz="910" dirty="0"/>
+            <a:endParaRPr lang="en-US" sz="1400" dirty="0"/>
           </a:p>
         </p:txBody>
       </p:sp>
@@ -35864,14 +35864,14 @@
               <a:buNone/>
             </a:pPr>
             <a:r>
-              <a:rPr lang="en-US" sz="910" b="1" dirty="0">
+              <a:rPr lang="en-US" sz="1400" b="1" dirty="0">
                 <a:solidFill>
                   <a:srgbClr val="FFFFFF"/>
                 </a:solidFill>
               </a:rPr>
               <a:t>Governance status</a:t>
             </a:r>
-            <a:endParaRPr lang="en-US" sz="910" dirty="0"/>
+            <a:endParaRPr lang="en-US" sz="1400" dirty="0"/>
           </a:p>
         </p:txBody>
       </p:sp>
@@ -35908,14 +35908,14 @@
               <a:buNone/>
             </a:pPr>
             <a:r>
-              <a:rPr lang="en-US" sz="910" b="1" dirty="0">
+              <a:rPr lang="en-US" sz="1400" b="1" dirty="0">
                 <a:solidFill>
                   <a:srgbClr val="FFFFFF"/>
                 </a:solidFill>
               </a:rPr>
               <a:t>Interpretation</a:t>
             </a:r>
-            <a:endParaRPr lang="en-US" sz="910" dirty="0"/>
+            <a:endParaRPr lang="en-US" sz="1400" dirty="0"/>
           </a:p>
         </p:txBody>
       </p:sp>
@@ -35952,14 +35952,14 @@
               <a:buNone/>
             </a:pPr>
             <a:r>
-              <a:rPr lang="en-US" sz="890" dirty="0">
+              <a:rPr lang="en-US" sz="1200" dirty="0">
                 <a:solidFill>
                   <a:srgbClr val="0F172A"/>
                 </a:solidFill>
               </a:rPr>
               <a:t>CGPA</a:t>
             </a:r>
-            <a:endParaRPr lang="en-US" sz="890" dirty="0"/>
+            <a:endParaRPr lang="en-US" sz="1200" dirty="0"/>
           </a:p>
         </p:txBody>
       </p:sp>
@@ -35996,14 +35996,14 @@
               <a:buNone/>
             </a:pPr>
             <a:r>
-              <a:rPr lang="en-US" sz="890" dirty="0">
+              <a:rPr lang="en-US" sz="1200" dirty="0">
                 <a:solidFill>
                   <a:srgbClr val="0F172A"/>
                 </a:solidFill>
               </a:rPr>
               <a:t>Final Python pipeline kept Test out of coded tuning, but earlier WEKA exploration used the full dataset before split</a:t>
             </a:r>
-            <a:endParaRPr lang="en-US" sz="890" dirty="0"/>
+            <a:endParaRPr lang="en-US" sz="1200" dirty="0"/>
           </a:p>
         </p:txBody>
       </p:sp>
@@ -36040,14 +36040,14 @@
               <a:buNone/>
             </a:pPr>
             <a:r>
-              <a:rPr lang="en-US" sz="890" dirty="0">
+              <a:rPr lang="en-US" sz="1200" dirty="0">
                 <a:solidFill>
                   <a:srgbClr val="0F172A"/>
                 </a:solidFill>
               </a:rPr>
               <a:t>Report as held-out test of final coded pipeline; acknowledge historical caveat</a:t>
             </a:r>
-            <a:endParaRPr lang="en-US" sz="890" dirty="0"/>
+            <a:endParaRPr lang="en-US" sz="1200" dirty="0"/>
           </a:p>
         </p:txBody>
       </p:sp>
@@ -36084,14 +36084,14 @@
               <a:buNone/>
             </a:pPr>
             <a:r>
-              <a:rPr lang="en-US" sz="890" dirty="0">
+              <a:rPr lang="en-US" sz="1200" dirty="0">
                 <a:solidFill>
                   <a:srgbClr val="0F172A"/>
                 </a:solidFill>
               </a:rPr>
               <a:t>ResearchParticipation</a:t>
             </a:r>
-            <a:endParaRPr lang="en-US" sz="890" dirty="0"/>
+            <a:endParaRPr lang="en-US" sz="1200" dirty="0"/>
           </a:p>
         </p:txBody>
       </p:sp>
@@ -36128,14 +36128,14 @@
               <a:buNone/>
             </a:pPr>
             <a:r>
-              <a:rPr lang="en-US" sz="890" dirty="0">
+              <a:rPr lang="en-US" sz="1200" dirty="0">
                 <a:solidFill>
                   <a:srgbClr val="0F172A"/>
                 </a:solidFill>
               </a:rPr>
               <a:t>Fixed split created before model sweep; 522-row Test was not used during selection/tuning</a:t>
             </a:r>
-            <a:endParaRPr lang="en-US" sz="890" dirty="0"/>
+            <a:endParaRPr lang="en-US" sz="1200" dirty="0"/>
           </a:p>
         </p:txBody>
       </p:sp>
@@ -36172,14 +36172,14 @@
               <a:buNone/>
             </a:pPr>
             <a:r>
-              <a:rPr lang="en-US" sz="890" dirty="0">
+              <a:rPr lang="en-US" sz="1200" dirty="0">
                 <a:solidFill>
                   <a:srgbClr val="0F172A"/>
                 </a:solidFill>
               </a:rPr>
               <a:t>Stronger prospective Test governance; model frozen before final Test</a:t>
             </a:r>
-            <a:endParaRPr lang="en-US" sz="890" dirty="0"/>
+            <a:endParaRPr lang="en-US" sz="1200" dirty="0"/>
           </a:p>
         </p:txBody>
       </p:sp>
@@ -38255,14 +38255,14 @@
               <a:buNone/>
             </a:pPr>
             <a:r>
-              <a:rPr lang="en-US" sz="910" b="1" dirty="0">
+              <a:rPr lang="en-US" sz="1200" b="1" dirty="0">
                 <a:solidFill>
                   <a:srgbClr val="FFFFFF"/>
                 </a:solidFill>
               </a:rPr>
               <a:t>Model</a:t>
             </a:r>
-            <a:endParaRPr lang="en-US" sz="910" dirty="0"/>
+            <a:endParaRPr lang="en-US" sz="1200" dirty="0"/>
           </a:p>
         </p:txBody>
       </p:sp>
@@ -38299,14 +38299,14 @@
               <a:buNone/>
             </a:pPr>
             <a:r>
-              <a:rPr lang="en-US" sz="910" b="1" dirty="0">
+              <a:rPr lang="en-US" sz="1200" b="1" dirty="0">
                 <a:solidFill>
                   <a:srgbClr val="FFFFFF"/>
                 </a:solidFill>
               </a:rPr>
               <a:t>Accuracy</a:t>
             </a:r>
-            <a:endParaRPr lang="en-US" sz="910" dirty="0"/>
+            <a:endParaRPr lang="en-US" sz="1200" dirty="0"/>
           </a:p>
         </p:txBody>
       </p:sp>
@@ -38343,14 +38343,14 @@
               <a:buNone/>
             </a:pPr>
             <a:r>
-              <a:rPr lang="en-US" sz="910" b="1" dirty="0">
+              <a:rPr lang="en-US" sz="1200" b="1" dirty="0">
                 <a:solidFill>
                   <a:srgbClr val="FFFFFF"/>
                 </a:solidFill>
               </a:rPr>
               <a:t>W-F1</a:t>
             </a:r>
-            <a:endParaRPr lang="en-US" sz="910" dirty="0"/>
+            <a:endParaRPr lang="en-US" sz="1200" dirty="0"/>
           </a:p>
         </p:txBody>
       </p:sp>
@@ -38387,14 +38387,14 @@
               <a:buNone/>
             </a:pPr>
             <a:r>
-              <a:rPr lang="en-US" sz="910" b="1" dirty="0">
+              <a:rPr lang="en-US" sz="1200" b="1" dirty="0">
                 <a:solidFill>
                   <a:srgbClr val="FFFFFF"/>
                 </a:solidFill>
               </a:rPr>
               <a:t>ROC</a:t>
             </a:r>
-            <a:endParaRPr lang="en-US" sz="910" dirty="0"/>
+            <a:endParaRPr lang="en-US" sz="1200" dirty="0"/>
           </a:p>
         </p:txBody>
       </p:sp>
@@ -38431,14 +38431,14 @@
               <a:buNone/>
             </a:pPr>
             <a:r>
-              <a:rPr lang="en-US" sz="910" b="1" dirty="0">
+              <a:rPr lang="en-US" sz="1200" b="1" dirty="0">
                 <a:solidFill>
                   <a:srgbClr val="FFFFFF"/>
                 </a:solidFill>
               </a:rPr>
               <a:t>PRC</a:t>
             </a:r>
-            <a:endParaRPr lang="en-US" sz="910" dirty="0"/>
+            <a:endParaRPr lang="en-US" sz="1200" dirty="0"/>
           </a:p>
         </p:txBody>
       </p:sp>
@@ -38475,14 +38475,14 @@
               <a:buNone/>
             </a:pPr>
             <a:r>
-              <a:rPr lang="en-US" sz="840" dirty="0">
+              <a:rPr lang="en-US" sz="1100" dirty="0">
                 <a:solidFill>
                   <a:srgbClr val="0F172A"/>
                 </a:solidFill>
               </a:rPr>
               <a:t>RandomForest</a:t>
             </a:r>
-            <a:endParaRPr lang="en-US" sz="840" dirty="0"/>
+            <a:endParaRPr lang="en-US" sz="1100" dirty="0"/>
           </a:p>
         </p:txBody>
       </p:sp>
@@ -38519,14 +38519,14 @@
               <a:buNone/>
             </a:pPr>
             <a:r>
-              <a:rPr lang="en-US" sz="840" dirty="0">
+              <a:rPr lang="en-US" sz="1100" dirty="0">
                 <a:solidFill>
                   <a:srgbClr val="0F172A"/>
                 </a:solidFill>
               </a:rPr>
               <a:t>60.3242%</a:t>
             </a:r>
-            <a:endParaRPr lang="en-US" sz="840" dirty="0"/>
+            <a:endParaRPr lang="en-US" sz="1100" dirty="0"/>
           </a:p>
         </p:txBody>
       </p:sp>
@@ -38563,14 +38563,14 @@
               <a:buNone/>
             </a:pPr>
             <a:r>
-              <a:rPr lang="en-US" sz="840" dirty="0">
+              <a:rPr lang="en-US" sz="1100" dirty="0">
                 <a:solidFill>
                   <a:srgbClr val="0F172A"/>
                 </a:solidFill>
               </a:rPr>
               <a:t>0.604</a:t>
             </a:r>
-            <a:endParaRPr lang="en-US" sz="840" dirty="0"/>
+            <a:endParaRPr lang="en-US" sz="1100" dirty="0"/>
           </a:p>
         </p:txBody>
       </p:sp>
@@ -38607,14 +38607,14 @@
               <a:buNone/>
             </a:pPr>
             <a:r>
-              <a:rPr lang="en-US" sz="840" dirty="0">
+              <a:rPr lang="en-US" sz="1100" dirty="0">
                 <a:solidFill>
                   <a:srgbClr val="0F172A"/>
                 </a:solidFill>
               </a:rPr>
               <a:t>0.863</a:t>
             </a:r>
-            <a:endParaRPr lang="en-US" sz="840" dirty="0"/>
+            <a:endParaRPr lang="en-US" sz="1100" dirty="0"/>
           </a:p>
         </p:txBody>
       </p:sp>
@@ -38651,14 +38651,14 @@
               <a:buNone/>
             </a:pPr>
             <a:r>
-              <a:rPr lang="en-US" sz="840" dirty="0">
+              <a:rPr lang="en-US" sz="1100" dirty="0">
                 <a:solidFill>
                   <a:srgbClr val="0F172A"/>
                 </a:solidFill>
               </a:rPr>
               <a:t>0.724</a:t>
             </a:r>
-            <a:endParaRPr lang="en-US" sz="840" dirty="0"/>
+            <a:endParaRPr lang="en-US" sz="1100" dirty="0"/>
           </a:p>
         </p:txBody>
       </p:sp>
@@ -38687,7 +38687,7 @@
         </p:spPr>
         <p:txBody>
           <a:bodyPr wrap="square" rtlCol="0" anchor="ctr">
-            <a:normAutofit/>
+            <a:noAutofit/>
           </a:bodyPr>
           <a:lstStyle/>
           <a:p>
@@ -38695,14 +38695,14 @@
               <a:buNone/>
             </a:pPr>
             <a:r>
-              <a:rPr lang="en-US" sz="840" dirty="0">
+              <a:rPr lang="en-US" sz="1100" dirty="0">
                 <a:solidFill>
                   <a:srgbClr val="0F172A"/>
                 </a:solidFill>
               </a:rPr>
               <a:t>RandomCommittee</a:t>
             </a:r>
-            <a:endParaRPr lang="en-US" sz="840" dirty="0"/>
+            <a:endParaRPr lang="en-US" sz="1100" dirty="0"/>
           </a:p>
         </p:txBody>
       </p:sp>
@@ -38739,14 +38739,14 @@
               <a:buNone/>
             </a:pPr>
             <a:r>
-              <a:rPr lang="en-US" sz="840" dirty="0">
+              <a:rPr lang="en-US" sz="1100" dirty="0">
                 <a:solidFill>
                   <a:srgbClr val="0F172A"/>
                 </a:solidFill>
               </a:rPr>
               <a:t>58.2480%</a:t>
             </a:r>
-            <a:endParaRPr lang="en-US" sz="840" dirty="0"/>
+            <a:endParaRPr lang="en-US" sz="1100" dirty="0"/>
           </a:p>
         </p:txBody>
       </p:sp>
@@ -38783,14 +38783,14 @@
               <a:buNone/>
             </a:pPr>
             <a:r>
-              <a:rPr lang="en-US" sz="840" dirty="0">
+              <a:rPr lang="en-US" sz="1100" dirty="0">
                 <a:solidFill>
                   <a:srgbClr val="0F172A"/>
                 </a:solidFill>
               </a:rPr>
               <a:t>0.583</a:t>
             </a:r>
-            <a:endParaRPr lang="en-US" sz="840" dirty="0"/>
+            <a:endParaRPr lang="en-US" sz="1100" dirty="0"/>
           </a:p>
         </p:txBody>
       </p:sp>
@@ -38827,14 +38827,14 @@
               <a:buNone/>
             </a:pPr>
             <a:r>
-              <a:rPr lang="en-US" sz="840" dirty="0">
+              <a:rPr lang="en-US" sz="1100" dirty="0">
                 <a:solidFill>
                   <a:srgbClr val="0F172A"/>
                 </a:solidFill>
               </a:rPr>
               <a:t>0.848</a:t>
             </a:r>
-            <a:endParaRPr lang="en-US" sz="840" dirty="0"/>
+            <a:endParaRPr lang="en-US" sz="1100" dirty="0"/>
           </a:p>
         </p:txBody>
       </p:sp>
@@ -38871,14 +38871,14 @@
               <a:buNone/>
             </a:pPr>
             <a:r>
-              <a:rPr lang="en-US" sz="840" dirty="0">
+              <a:rPr lang="en-US" sz="1100" dirty="0">
                 <a:solidFill>
                   <a:srgbClr val="0F172A"/>
                 </a:solidFill>
               </a:rPr>
               <a:t>0.704</a:t>
             </a:r>
-            <a:endParaRPr lang="en-US" sz="840" dirty="0"/>
+            <a:endParaRPr lang="en-US" sz="1100" dirty="0"/>
           </a:p>
         </p:txBody>
       </p:sp>
@@ -38915,14 +38915,14 @@
               <a:buNone/>
             </a:pPr>
             <a:r>
-              <a:rPr lang="en-US" sz="840" dirty="0">
+              <a:rPr lang="en-US" sz="1100" dirty="0">
                 <a:solidFill>
                   <a:srgbClr val="0F172A"/>
                 </a:solidFill>
               </a:rPr>
               <a:t>LMT</a:t>
             </a:r>
-            <a:endParaRPr lang="en-US" sz="840" dirty="0"/>
+            <a:endParaRPr lang="en-US" sz="1100" dirty="0"/>
           </a:p>
         </p:txBody>
       </p:sp>
@@ -38959,14 +38959,14 @@
               <a:buNone/>
             </a:pPr>
             <a:r>
-              <a:rPr lang="en-US" sz="840" dirty="0">
+              <a:rPr lang="en-US" sz="1100" dirty="0">
                 <a:solidFill>
                   <a:srgbClr val="0F172A"/>
                 </a:solidFill>
               </a:rPr>
               <a:t>58.1342%</a:t>
             </a:r>
-            <a:endParaRPr lang="en-US" sz="840" dirty="0"/>
+            <a:endParaRPr lang="en-US" sz="1100" dirty="0"/>
           </a:p>
         </p:txBody>
       </p:sp>
@@ -39003,14 +39003,14 @@
               <a:buNone/>
             </a:pPr>
             <a:r>
-              <a:rPr lang="en-US" sz="840" dirty="0">
+              <a:rPr lang="en-US" sz="1100" dirty="0">
                 <a:solidFill>
                   <a:srgbClr val="0F172A"/>
                 </a:solidFill>
               </a:rPr>
               <a:t>0.581</a:t>
             </a:r>
-            <a:endParaRPr lang="en-US" sz="840" dirty="0"/>
+            <a:endParaRPr lang="en-US" sz="1100" dirty="0"/>
           </a:p>
         </p:txBody>
       </p:sp>
@@ -39047,14 +39047,14 @@
               <a:buNone/>
             </a:pPr>
             <a:r>
-              <a:rPr lang="en-US" sz="840" dirty="0">
+              <a:rPr lang="en-US" sz="1100" dirty="0">
                 <a:solidFill>
                   <a:srgbClr val="0F172A"/>
                 </a:solidFill>
               </a:rPr>
               <a:t>0.781</a:t>
             </a:r>
-            <a:endParaRPr lang="en-US" sz="840" dirty="0"/>
+            <a:endParaRPr lang="en-US" sz="1100" dirty="0"/>
           </a:p>
         </p:txBody>
       </p:sp>
@@ -39091,14 +39091,14 @@
               <a:buNone/>
             </a:pPr>
             <a:r>
-              <a:rPr lang="en-US" sz="840" dirty="0">
+              <a:rPr lang="en-US" sz="1100" dirty="0">
                 <a:solidFill>
                   <a:srgbClr val="0F172A"/>
                 </a:solidFill>
               </a:rPr>
               <a:t>0.544</a:t>
             </a:r>
-            <a:endParaRPr lang="en-US" sz="840" dirty="0"/>
+            <a:endParaRPr lang="en-US" sz="1100" dirty="0"/>
           </a:p>
         </p:txBody>
       </p:sp>
@@ -39135,14 +39135,14 @@
               <a:buNone/>
             </a:pPr>
             <a:r>
-              <a:rPr lang="en-US" sz="840" dirty="0">
+              <a:rPr lang="en-US" sz="1100" dirty="0">
                 <a:solidFill>
                   <a:srgbClr val="0F172A"/>
                 </a:solidFill>
               </a:rPr>
               <a:t>KStar</a:t>
             </a:r>
-            <a:endParaRPr lang="en-US" sz="840" dirty="0"/>
+            <a:endParaRPr lang="en-US" sz="1100" dirty="0"/>
           </a:p>
         </p:txBody>
       </p:sp>
@@ -39179,14 +39179,14 @@
               <a:buNone/>
             </a:pPr>
             <a:r>
-              <a:rPr lang="en-US" sz="840" dirty="0">
+              <a:rPr lang="en-US" sz="1100" dirty="0">
                 <a:solidFill>
                   <a:srgbClr val="0F172A"/>
                 </a:solidFill>
               </a:rPr>
               <a:t>58.0489%</a:t>
             </a:r>
-            <a:endParaRPr lang="en-US" sz="840" dirty="0"/>
+            <a:endParaRPr lang="en-US" sz="1100" dirty="0"/>
           </a:p>
         </p:txBody>
       </p:sp>
@@ -39223,14 +39223,14 @@
               <a:buNone/>
             </a:pPr>
             <a:r>
-              <a:rPr lang="en-US" sz="840" dirty="0">
+              <a:rPr lang="en-US" sz="1100" dirty="0">
                 <a:solidFill>
                   <a:srgbClr val="0F172A"/>
                 </a:solidFill>
               </a:rPr>
               <a:t>0.579</a:t>
             </a:r>
-            <a:endParaRPr lang="en-US" sz="840" dirty="0"/>
+            <a:endParaRPr lang="en-US" sz="1100" dirty="0"/>
           </a:p>
         </p:txBody>
       </p:sp>
@@ -39267,14 +39267,14 @@
               <a:buNone/>
             </a:pPr>
             <a:r>
-              <a:rPr lang="en-US" sz="840" dirty="0">
+              <a:rPr lang="en-US" sz="1100" dirty="0">
                 <a:solidFill>
                   <a:srgbClr val="0F172A"/>
                 </a:solidFill>
               </a:rPr>
               <a:t>0.851</a:t>
             </a:r>
-            <a:endParaRPr lang="en-US" sz="840" dirty="0"/>
+            <a:endParaRPr lang="en-US" sz="1100" dirty="0"/>
           </a:p>
         </p:txBody>
       </p:sp>
@@ -39311,14 +39311,14 @@
               <a:buNone/>
             </a:pPr>
             <a:r>
-              <a:rPr lang="en-US" sz="840" dirty="0">
+              <a:rPr lang="en-US" sz="1100" dirty="0">
                 <a:solidFill>
                   <a:srgbClr val="0F172A"/>
                 </a:solidFill>
               </a:rPr>
               <a:t>0.702</a:t>
             </a:r>
-            <a:endParaRPr lang="en-US" sz="840" dirty="0"/>
+            <a:endParaRPr lang="en-US" sz="1100" dirty="0"/>
           </a:p>
         </p:txBody>
       </p:sp>
@@ -39355,14 +39355,14 @@
               <a:buNone/>
             </a:pPr>
             <a:r>
-              <a:rPr lang="en-US" sz="840" dirty="0">
+              <a:rPr lang="en-US" sz="1100" dirty="0">
                 <a:solidFill>
                   <a:srgbClr val="0F172A"/>
                 </a:solidFill>
               </a:rPr>
               <a:t>IBk</a:t>
             </a:r>
-            <a:endParaRPr lang="en-US" sz="840" dirty="0"/>
+            <a:endParaRPr lang="en-US" sz="1100" dirty="0"/>
           </a:p>
         </p:txBody>
       </p:sp>
@@ -39399,14 +39399,14 @@
               <a:buNone/>
             </a:pPr>
             <a:r>
-              <a:rPr lang="en-US" sz="840" dirty="0">
+              <a:rPr lang="en-US" sz="1100" dirty="0">
                 <a:solidFill>
                   <a:srgbClr val="0F172A"/>
                 </a:solidFill>
               </a:rPr>
               <a:t>57.2810%</a:t>
             </a:r>
-            <a:endParaRPr lang="en-US" sz="840" dirty="0"/>
+            <a:endParaRPr lang="en-US" sz="1100" dirty="0"/>
           </a:p>
         </p:txBody>
       </p:sp>
@@ -39443,14 +39443,14 @@
               <a:buNone/>
             </a:pPr>
             <a:r>
-              <a:rPr lang="en-US" sz="840" dirty="0">
+              <a:rPr lang="en-US" sz="1100" dirty="0">
                 <a:solidFill>
                   <a:srgbClr val="0F172A"/>
                 </a:solidFill>
               </a:rPr>
               <a:t>0.572</a:t>
             </a:r>
-            <a:endParaRPr lang="en-US" sz="840" dirty="0"/>
+            <a:endParaRPr lang="en-US" sz="1100" dirty="0"/>
           </a:p>
         </p:txBody>
       </p:sp>
@@ -39487,14 +39487,14 @@
               <a:buNone/>
             </a:pPr>
             <a:r>
-              <a:rPr lang="en-US" sz="840" dirty="0">
+              <a:rPr lang="en-US" sz="1100" dirty="0">
                 <a:solidFill>
                   <a:srgbClr val="0F172A"/>
                 </a:solidFill>
               </a:rPr>
               <a:t>0.740</a:t>
             </a:r>
-            <a:endParaRPr lang="en-US" sz="840" dirty="0"/>
+            <a:endParaRPr lang="en-US" sz="1100" dirty="0"/>
           </a:p>
         </p:txBody>
       </p:sp>
@@ -39531,14 +39531,14 @@
               <a:buNone/>
             </a:pPr>
             <a:r>
-              <a:rPr lang="en-US" sz="840" dirty="0">
+              <a:rPr lang="en-US" sz="1100" dirty="0">
                 <a:solidFill>
                   <a:srgbClr val="0F172A"/>
                 </a:solidFill>
               </a:rPr>
               <a:t>0.479</a:t>
             </a:r>
-            <a:endParaRPr lang="en-US" sz="840" dirty="0"/>
+            <a:endParaRPr lang="en-US" sz="1100" dirty="0"/>
           </a:p>
         </p:txBody>
       </p:sp>
@@ -39818,14 +39818,14 @@
               <a:buNone/>
             </a:pPr>
             <a:r>
-              <a:rPr lang="en-US" sz="910" b="1" dirty="0">
+              <a:rPr lang="en-US" sz="1400" b="1" dirty="0">
                 <a:solidFill>
                   <a:srgbClr val="FFFFFF"/>
                 </a:solidFill>
               </a:rPr>
               <a:t>Run</a:t>
             </a:r>
-            <a:endParaRPr lang="en-US" sz="910" dirty="0"/>
+            <a:endParaRPr lang="en-US" sz="1400" dirty="0"/>
           </a:p>
         </p:txBody>
       </p:sp>
@@ -39862,14 +39862,14 @@
               <a:buNone/>
             </a:pPr>
             <a:r>
-              <a:rPr lang="en-US" sz="910" b="1" dirty="0">
+              <a:rPr lang="en-US" sz="1400" b="1" dirty="0">
                 <a:solidFill>
                   <a:srgbClr val="FFFFFF"/>
                 </a:solidFill>
               </a:rPr>
               <a:t>Change</a:t>
             </a:r>
-            <a:endParaRPr lang="en-US" sz="910" dirty="0"/>
+            <a:endParaRPr lang="en-US" sz="1400" dirty="0"/>
           </a:p>
         </p:txBody>
       </p:sp>
@@ -39906,14 +39906,14 @@
               <a:buNone/>
             </a:pPr>
             <a:r>
-              <a:rPr lang="en-US" sz="910" b="1" dirty="0">
+              <a:rPr lang="en-US" sz="1400" b="1" dirty="0">
                 <a:solidFill>
                   <a:srgbClr val="FFFFFF"/>
                 </a:solidFill>
               </a:rPr>
               <a:t>Accuracy</a:t>
             </a:r>
-            <a:endParaRPr lang="en-US" sz="910" dirty="0"/>
+            <a:endParaRPr lang="en-US" sz="1400" dirty="0"/>
           </a:p>
         </p:txBody>
       </p:sp>
@@ -39950,14 +39950,14 @@
               <a:buNone/>
             </a:pPr>
             <a:r>
-              <a:rPr lang="en-US" sz="910" b="1" dirty="0">
+              <a:rPr lang="en-US" sz="1400" b="1" dirty="0">
                 <a:solidFill>
                   <a:srgbClr val="FFFFFF"/>
                 </a:solidFill>
               </a:rPr>
               <a:t>W-F1</a:t>
             </a:r>
-            <a:endParaRPr lang="en-US" sz="910" dirty="0"/>
+            <a:endParaRPr lang="en-US" sz="1400" dirty="0"/>
           </a:p>
         </p:txBody>
       </p:sp>
@@ -39994,14 +39994,14 @@
               <a:buNone/>
             </a:pPr>
             <a:r>
-              <a:rPr lang="en-US" sz="910" b="1" dirty="0">
+              <a:rPr lang="en-US" sz="1400" b="1" dirty="0">
                 <a:solidFill>
                   <a:srgbClr val="FFFFFF"/>
                 </a:solidFill>
               </a:rPr>
               <a:t>Kappa</a:t>
             </a:r>
-            <a:endParaRPr lang="en-US" sz="910" dirty="0"/>
+            <a:endParaRPr lang="en-US" sz="1400" dirty="0"/>
           </a:p>
         </p:txBody>
       </p:sp>
@@ -40038,14 +40038,14 @@
               <a:buNone/>
             </a:pPr>
             <a:r>
-              <a:rPr lang="en-US" sz="860" dirty="0">
+              <a:rPr lang="en-US" sz="1200" dirty="0">
                 <a:solidFill>
                   <a:srgbClr val="0F172A"/>
                 </a:solidFill>
               </a:rPr>
               <a:t>Baseline</a:t>
             </a:r>
-            <a:endParaRPr lang="en-US" sz="860" dirty="0"/>
+            <a:endParaRPr lang="en-US" sz="1200" dirty="0"/>
           </a:p>
         </p:txBody>
       </p:sp>
@@ -40082,14 +40082,14 @@
               <a:buNone/>
             </a:pPr>
             <a:r>
-              <a:rPr lang="en-US" sz="860" dirty="0">
+              <a:rPr lang="en-US" sz="1200" dirty="0">
                 <a:solidFill>
                   <a:srgbClr val="0F172A"/>
                 </a:solidFill>
               </a:rPr>
               <a:t>100 trees, K=0, M=1</a:t>
             </a:r>
-            <a:endParaRPr lang="en-US" sz="860" dirty="0"/>
+            <a:endParaRPr lang="en-US" sz="1200" dirty="0"/>
           </a:p>
         </p:txBody>
       </p:sp>
@@ -40126,14 +40126,14 @@
               <a:buNone/>
             </a:pPr>
             <a:r>
-              <a:rPr lang="en-US" sz="860" dirty="0">
+              <a:rPr lang="en-US" sz="1200" dirty="0">
                 <a:solidFill>
                   <a:srgbClr val="0F172A"/>
                 </a:solidFill>
               </a:rPr>
               <a:t>60.3242%</a:t>
             </a:r>
-            <a:endParaRPr lang="en-US" sz="860" dirty="0"/>
+            <a:endParaRPr lang="en-US" sz="1200" dirty="0"/>
           </a:p>
         </p:txBody>
       </p:sp>
@@ -40170,14 +40170,14 @@
               <a:buNone/>
             </a:pPr>
             <a:r>
-              <a:rPr lang="en-US" sz="860" dirty="0">
+              <a:rPr lang="en-US" sz="1200" dirty="0">
                 <a:solidFill>
                   <a:srgbClr val="0F172A"/>
                 </a:solidFill>
               </a:rPr>
               <a:t>0.604</a:t>
             </a:r>
-            <a:endParaRPr lang="en-US" sz="860" dirty="0"/>
+            <a:endParaRPr lang="en-US" sz="1200" dirty="0"/>
           </a:p>
         </p:txBody>
       </p:sp>
@@ -40214,14 +40214,14 @@
               <a:buNone/>
             </a:pPr>
             <a:r>
-              <a:rPr lang="en-US" sz="860" dirty="0">
+              <a:rPr lang="en-US" sz="1200" dirty="0">
                 <a:solidFill>
                   <a:srgbClr val="0F172A"/>
                 </a:solidFill>
               </a:rPr>
               <a:t>0.4855</a:t>
             </a:r>
-            <a:endParaRPr lang="en-US" sz="860" dirty="0"/>
+            <a:endParaRPr lang="en-US" sz="1200" dirty="0"/>
           </a:p>
         </p:txBody>
       </p:sp>
@@ -40258,14 +40258,14 @@
               <a:buNone/>
             </a:pPr>
             <a:r>
-              <a:rPr lang="en-US" sz="860" dirty="0">
+              <a:rPr lang="en-US" sz="1200" dirty="0">
                 <a:solidFill>
                   <a:srgbClr val="0F172A"/>
                 </a:solidFill>
               </a:rPr>
               <a:t>RF‑T01</a:t>
             </a:r>
-            <a:endParaRPr lang="en-US" sz="860" dirty="0"/>
+            <a:endParaRPr lang="en-US" sz="1200" dirty="0"/>
           </a:p>
         </p:txBody>
       </p:sp>
@@ -40302,14 +40302,14 @@
               <a:buNone/>
             </a:pPr>
             <a:r>
-              <a:rPr lang="en-US" sz="860" dirty="0">
+              <a:rPr lang="en-US" sz="1200" dirty="0">
                 <a:solidFill>
                   <a:srgbClr val="0F172A"/>
                 </a:solidFill>
               </a:rPr>
               <a:t>250 trees</a:t>
             </a:r>
-            <a:endParaRPr lang="en-US" sz="860" dirty="0"/>
+            <a:endParaRPr lang="en-US" sz="1200" dirty="0"/>
           </a:p>
         </p:txBody>
       </p:sp>
@@ -40346,14 +40346,14 @@
               <a:buNone/>
             </a:pPr>
             <a:r>
-              <a:rPr lang="en-US" sz="860" dirty="0">
+              <a:rPr lang="en-US" sz="1200" dirty="0">
                 <a:solidFill>
                   <a:srgbClr val="0F172A"/>
                 </a:solidFill>
               </a:rPr>
               <a:t>60.7509%</a:t>
             </a:r>
-            <a:endParaRPr lang="en-US" sz="860" dirty="0"/>
+            <a:endParaRPr lang="en-US" sz="1200" dirty="0"/>
           </a:p>
         </p:txBody>
       </p:sp>
@@ -40390,14 +40390,14 @@
               <a:buNone/>
             </a:pPr>
             <a:r>
-              <a:rPr lang="en-US" sz="860" dirty="0">
+              <a:rPr lang="en-US" sz="1200" dirty="0">
                 <a:solidFill>
                   <a:srgbClr val="0F172A"/>
                 </a:solidFill>
               </a:rPr>
               <a:t>0.608</a:t>
             </a:r>
-            <a:endParaRPr lang="en-US" sz="860" dirty="0"/>
+            <a:endParaRPr lang="en-US" sz="1200" dirty="0"/>
           </a:p>
         </p:txBody>
       </p:sp>
@@ -40434,14 +40434,14 @@
               <a:buNone/>
             </a:pPr>
             <a:r>
-              <a:rPr lang="en-US" sz="860" dirty="0">
+              <a:rPr lang="en-US" sz="1200" dirty="0">
                 <a:solidFill>
                   <a:srgbClr val="0F172A"/>
                 </a:solidFill>
               </a:rPr>
               <a:t>0.4901</a:t>
             </a:r>
-            <a:endParaRPr lang="en-US" sz="860" dirty="0"/>
+            <a:endParaRPr lang="en-US" sz="1200" dirty="0"/>
           </a:p>
         </p:txBody>
       </p:sp>
@@ -40478,14 +40478,14 @@
               <a:buNone/>
             </a:pPr>
             <a:r>
-              <a:rPr lang="en-US" sz="860" dirty="0">
+              <a:rPr lang="en-US" sz="1200" dirty="0">
                 <a:solidFill>
                   <a:srgbClr val="0F172A"/>
                 </a:solidFill>
               </a:rPr>
               <a:t>RF‑T02</a:t>
             </a:r>
-            <a:endParaRPr lang="en-US" sz="860" dirty="0"/>
+            <a:endParaRPr lang="en-US" sz="1200" dirty="0"/>
           </a:p>
         </p:txBody>
       </p:sp>
@@ -40522,14 +40522,14 @@
               <a:buNone/>
             </a:pPr>
             <a:r>
-              <a:rPr lang="en-US" sz="860" dirty="0">
+              <a:rPr lang="en-US" sz="1200" dirty="0">
                 <a:solidFill>
                   <a:srgbClr val="0F172A"/>
                 </a:solidFill>
               </a:rPr>
               <a:t>K=2</a:t>
             </a:r>
-            <a:endParaRPr lang="en-US" sz="860" dirty="0"/>
+            <a:endParaRPr lang="en-US" sz="1200" dirty="0"/>
           </a:p>
         </p:txBody>
       </p:sp>
@@ -40566,14 +40566,14 @@
               <a:buNone/>
             </a:pPr>
             <a:r>
-              <a:rPr lang="en-US" sz="860" dirty="0">
+              <a:rPr lang="en-US" sz="1200" dirty="0">
                 <a:solidFill>
                   <a:srgbClr val="0F172A"/>
                 </a:solidFill>
               </a:rPr>
               <a:t>60.6086%</a:t>
             </a:r>
-            <a:endParaRPr lang="en-US" sz="860" dirty="0"/>
+            <a:endParaRPr lang="en-US" sz="1200" dirty="0"/>
           </a:p>
         </p:txBody>
       </p:sp>
@@ -40610,14 +40610,14 @@
               <a:buNone/>
             </a:pPr>
             <a:r>
-              <a:rPr lang="en-US" sz="860" dirty="0">
+              <a:rPr lang="en-US" sz="1200" dirty="0">
                 <a:solidFill>
                   <a:srgbClr val="0F172A"/>
                 </a:solidFill>
               </a:rPr>
               <a:t>0.605</a:t>
             </a:r>
-            <a:endParaRPr lang="en-US" sz="860" dirty="0"/>
+            <a:endParaRPr lang="en-US" sz="1200" dirty="0"/>
           </a:p>
         </p:txBody>
       </p:sp>
@@ -40654,14 +40654,14 @@
               <a:buNone/>
             </a:pPr>
             <a:r>
-              <a:rPr lang="en-US" sz="860" dirty="0">
+              <a:rPr lang="en-US" sz="1200" dirty="0">
                 <a:solidFill>
                   <a:srgbClr val="0F172A"/>
                 </a:solidFill>
               </a:rPr>
               <a:t>0.4865</a:t>
             </a:r>
-            <a:endParaRPr lang="en-US" sz="860" dirty="0"/>
+            <a:endParaRPr lang="en-US" sz="1200" dirty="0"/>
           </a:p>
         </p:txBody>
       </p:sp>
@@ -40698,14 +40698,14 @@
               <a:buNone/>
             </a:pPr>
             <a:r>
-              <a:rPr lang="en-US" sz="860" dirty="0">
+              <a:rPr lang="en-US" sz="1200" dirty="0">
                 <a:solidFill>
                   <a:srgbClr val="0F172A"/>
                 </a:solidFill>
               </a:rPr>
               <a:t>RF‑T03</a:t>
             </a:r>
-            <a:endParaRPr lang="en-US" sz="860" dirty="0"/>
+            <a:endParaRPr lang="en-US" sz="1200" dirty="0"/>
           </a:p>
         </p:txBody>
       </p:sp>
@@ -40742,14 +40742,14 @@
               <a:buNone/>
             </a:pPr>
             <a:r>
-              <a:rPr lang="en-US" sz="860" dirty="0">
+              <a:rPr lang="en-US" sz="1200" dirty="0">
                 <a:solidFill>
                   <a:srgbClr val="0F172A"/>
                 </a:solidFill>
               </a:rPr>
               <a:t>M=3</a:t>
             </a:r>
-            <a:endParaRPr lang="en-US" sz="860" dirty="0"/>
+            <a:endParaRPr lang="en-US" sz="1200" dirty="0"/>
           </a:p>
         </p:txBody>
       </p:sp>
@@ -40786,14 +40786,14 @@
               <a:buNone/>
             </a:pPr>
             <a:r>
-              <a:rPr lang="en-US" sz="860" dirty="0">
+              <a:rPr lang="en-US" sz="1200" dirty="0">
                 <a:solidFill>
                   <a:srgbClr val="0F172A"/>
                 </a:solidFill>
               </a:rPr>
               <a:t>60.9499%</a:t>
             </a:r>
-            <a:endParaRPr lang="en-US" sz="860" dirty="0"/>
+            <a:endParaRPr lang="en-US" sz="1200" dirty="0"/>
           </a:p>
         </p:txBody>
       </p:sp>
@@ -40830,14 +40830,14 @@
               <a:buNone/>
             </a:pPr>
             <a:r>
-              <a:rPr lang="en-US" sz="860" dirty="0">
+              <a:rPr lang="en-US" sz="1200" dirty="0">
                 <a:solidFill>
                   <a:srgbClr val="0F172A"/>
                 </a:solidFill>
               </a:rPr>
               <a:t>0.609</a:t>
             </a:r>
-            <a:endParaRPr lang="en-US" sz="860" dirty="0"/>
+            <a:endParaRPr lang="en-US" sz="1200" dirty="0"/>
           </a:p>
         </p:txBody>
       </p:sp>
@@ -40874,14 +40874,14 @@
               <a:buNone/>
             </a:pPr>
             <a:r>
-              <a:rPr lang="en-US" sz="860" dirty="0">
+              <a:rPr lang="en-US" sz="1200" dirty="0">
                 <a:solidFill>
                   <a:srgbClr val="0F172A"/>
                 </a:solidFill>
               </a:rPr>
               <a:t>0.4928</a:t>
             </a:r>
-            <a:endParaRPr lang="en-US" sz="860" dirty="0"/>
+            <a:endParaRPr lang="en-US" sz="1200" dirty="0"/>
           </a:p>
         </p:txBody>
       </p:sp>
